--- a/tcc_pos_graduacao_apresentacao_evandrocoelho.pptx
+++ b/tcc_pos_graduacao_apresentacao_evandrocoelho.pptx
@@ -5,41 +5,39 @@
     <p:sldMasterId id="2147483712" r:id="rId1"/>
   </p:sldMasterIdLst>
   <p:notesMasterIdLst>
-    <p:notesMasterId r:id="rId31"/>
+    <p:notesMasterId r:id="rId29"/>
   </p:notesMasterIdLst>
   <p:handoutMasterIdLst>
-    <p:handoutMasterId r:id="rId32"/>
+    <p:handoutMasterId r:id="rId30"/>
   </p:handoutMasterIdLst>
   <p:sldIdLst>
     <p:sldId id="265" r:id="rId2"/>
     <p:sldId id="259" r:id="rId3"/>
     <p:sldId id="261" r:id="rId4"/>
-    <p:sldId id="262" r:id="rId5"/>
-    <p:sldId id="282" r:id="rId6"/>
-    <p:sldId id="290" r:id="rId7"/>
-    <p:sldId id="283" r:id="rId8"/>
-    <p:sldId id="288" r:id="rId9"/>
-    <p:sldId id="284" r:id="rId10"/>
-    <p:sldId id="285" r:id="rId11"/>
-    <p:sldId id="286" r:id="rId12"/>
-    <p:sldId id="267" r:id="rId13"/>
-    <p:sldId id="258" r:id="rId14"/>
-    <p:sldId id="266" r:id="rId15"/>
-    <p:sldId id="274" r:id="rId16"/>
-    <p:sldId id="275" r:id="rId17"/>
-    <p:sldId id="272" r:id="rId18"/>
-    <p:sldId id="289" r:id="rId19"/>
-    <p:sldId id="273" r:id="rId20"/>
-    <p:sldId id="268" r:id="rId21"/>
-    <p:sldId id="281" r:id="rId22"/>
-    <p:sldId id="277" r:id="rId23"/>
-    <p:sldId id="291" r:id="rId24"/>
-    <p:sldId id="269" r:id="rId25"/>
-    <p:sldId id="278" r:id="rId26"/>
-    <p:sldId id="280" r:id="rId27"/>
-    <p:sldId id="270" r:id="rId28"/>
-    <p:sldId id="287" r:id="rId29"/>
-    <p:sldId id="271" r:id="rId30"/>
+    <p:sldId id="290" r:id="rId5"/>
+    <p:sldId id="262" r:id="rId6"/>
+    <p:sldId id="288" r:id="rId7"/>
+    <p:sldId id="284" r:id="rId8"/>
+    <p:sldId id="285" r:id="rId9"/>
+    <p:sldId id="286" r:id="rId10"/>
+    <p:sldId id="267" r:id="rId11"/>
+    <p:sldId id="258" r:id="rId12"/>
+    <p:sldId id="266" r:id="rId13"/>
+    <p:sldId id="274" r:id="rId14"/>
+    <p:sldId id="275" r:id="rId15"/>
+    <p:sldId id="272" r:id="rId16"/>
+    <p:sldId id="289" r:id="rId17"/>
+    <p:sldId id="273" r:id="rId18"/>
+    <p:sldId id="268" r:id="rId19"/>
+    <p:sldId id="281" r:id="rId20"/>
+    <p:sldId id="277" r:id="rId21"/>
+    <p:sldId id="291" r:id="rId22"/>
+    <p:sldId id="269" r:id="rId23"/>
+    <p:sldId id="278" r:id="rId24"/>
+    <p:sldId id="280" r:id="rId25"/>
+    <p:sldId id="270" r:id="rId26"/>
+    <p:sldId id="287" r:id="rId27"/>
+    <p:sldId id="271" r:id="rId28"/>
   </p:sldIdLst>
   <p:sldSz cx="12192000" cy="6858000"/>
   <p:notesSz cx="6858000" cy="9144000"/>
@@ -7802,7 +7800,7 @@
             <a:pPr rtl="0"/>
             <a:fld id="{92C0A50A-E1AF-4D0A-877B-79573E96B26C}" type="datetime1">
               <a:rPr lang="pt-BR" smtClean="0"/>
-              <a:t>04/06/2026</a:t>
+              <a:t>07/06/2026</a:t>
             </a:fld>
             <a:endParaRPr lang="en-US" dirty="0"/>
           </a:p>
@@ -7972,7 +7970,7 @@
             <a:pPr rtl="0"/>
             <a:fld id="{7B4431DD-63F2-4E86-8430-6B3E8223C379}" type="datetime1">
               <a:rPr lang="pt-BR" smtClean="0"/>
-              <a:t>04/06/2026</a:t>
+              <a:t>07/06/2026</a:t>
             </a:fld>
             <a:endParaRPr lang="en-US"/>
           </a:p>
@@ -8486,7 +8484,7 @@
             <a:pPr rtl="0"/>
             <a:fld id="{D33FD6CF-7D8D-4470-9F2C-40284CBEE22A}" type="datetime1">
               <a:rPr lang="pt-BR" smtClean="0"/>
-              <a:t>04/06/2026</a:t>
+              <a:t>07/06/2026</a:t>
             </a:fld>
             <a:endParaRPr lang="en-US" dirty="0"/>
           </a:p>
@@ -8693,7 +8691,7 @@
             <a:pPr rtl="0"/>
             <a:fld id="{E7F35CA7-7D3B-4E55-AC53-9529C0CFE3EF}" type="datetime1">
               <a:rPr lang="pt-BR" smtClean="0"/>
-              <a:t>04/06/2026</a:t>
+              <a:t>07/06/2026</a:t>
             </a:fld>
             <a:endParaRPr lang="en-US" dirty="0"/>
           </a:p>
@@ -9059,7 +9057,7 @@
             <a:pPr rtl="0"/>
             <a:fld id="{7847CEE8-AA0B-431A-9FF7-33761A107460}" type="datetime1">
               <a:rPr lang="pt-BR" smtClean="0"/>
-              <a:t>04/06/2026</a:t>
+              <a:t>07/06/2026</a:t>
             </a:fld>
             <a:endParaRPr lang="en-US" dirty="0"/>
           </a:p>
@@ -9261,7 +9259,7 @@
             <a:pPr rtl="0"/>
             <a:fld id="{6EEBB24E-5DD3-4E01-A990-E7E913361932}" type="datetime1">
               <a:rPr lang="pt-BR" smtClean="0"/>
-              <a:t>04/06/2026</a:t>
+              <a:t>07/06/2026</a:t>
             </a:fld>
             <a:endParaRPr lang="en-US" dirty="0"/>
           </a:p>
@@ -9577,7 +9575,7 @@
             <a:pPr rtl="0"/>
             <a:fld id="{EB09EEDE-4F2A-4514-A141-8290D7C0C5F9}" type="datetime1">
               <a:rPr lang="pt-BR" smtClean="0"/>
-              <a:t>04/06/2026</a:t>
+              <a:t>07/06/2026</a:t>
             </a:fld>
             <a:endParaRPr lang="en-US" dirty="0"/>
           </a:p>
@@ -9834,7 +9832,7 @@
             <a:pPr rtl="0"/>
             <a:fld id="{9C80C7B8-3E83-44DB-805D-C59954C31ECE}" type="datetime1">
               <a:rPr lang="pt-BR" smtClean="0"/>
-              <a:t>04/06/2026</a:t>
+              <a:t>07/06/2026</a:t>
             </a:fld>
             <a:endParaRPr lang="en-US" dirty="0"/>
           </a:p>
@@ -10260,7 +10258,7 @@
             <a:pPr rtl="0"/>
             <a:fld id="{E09CBBAF-C71C-432D-9A69-DC53FB6B4E2D}" type="datetime1">
               <a:rPr lang="pt-BR" smtClean="0"/>
-              <a:t>04/06/2026</a:t>
+              <a:t>07/06/2026</a:t>
             </a:fld>
             <a:endParaRPr lang="en-US" dirty="0"/>
           </a:p>
@@ -10387,7 +10385,7 @@
             <a:pPr rtl="0"/>
             <a:fld id="{28BDC511-3C16-44E4-92EF-C6B950EE8EC4}" type="datetime1">
               <a:rPr lang="pt-BR" smtClean="0"/>
-              <a:t>04/06/2026</a:t>
+              <a:t>07/06/2026</a:t>
             </a:fld>
             <a:endParaRPr lang="en-US" dirty="0"/>
           </a:p>
@@ -10485,7 +10483,7 @@
             <a:pPr rtl="0"/>
             <a:fld id="{DF9FFFF1-28B2-434C-AB7A-5EAFBA182D21}" type="datetime1">
               <a:rPr lang="pt-BR" smtClean="0"/>
-              <a:t>04/06/2026</a:t>
+              <a:t>07/06/2026</a:t>
             </a:fld>
             <a:endParaRPr lang="en-US" dirty="0"/>
           </a:p>
@@ -10866,7 +10864,7 @@
             <a:pPr rtl="0"/>
             <a:fld id="{701F141C-949F-474F-9E74-3B5F20546E6B}" type="datetime1">
               <a:rPr lang="pt-BR" smtClean="0"/>
-              <a:t>04/06/2026</a:t>
+              <a:t>07/06/2026</a:t>
             </a:fld>
             <a:endParaRPr lang="en-US" dirty="0"/>
           </a:p>
@@ -11164,7 +11162,7 @@
             <a:pPr rtl="0"/>
             <a:fld id="{BD12D425-E3BA-44CA-8623-B38416E5A48E}" type="datetime1">
               <a:rPr lang="pt-BR" smtClean="0"/>
-              <a:t>04/06/2026</a:t>
+              <a:t>07/06/2026</a:t>
             </a:fld>
             <a:endParaRPr lang="en-US" dirty="0"/>
           </a:p>
@@ -11382,7 +11380,7 @@
             <a:pPr rtl="0"/>
             <a:fld id="{A94EBBE9-24C9-4A60-8E3E-CB325E0328D9}" type="datetime1">
               <a:rPr lang="pt-BR" smtClean="0"/>
-              <a:t>04/06/2026</a:t>
+              <a:t>07/06/2026</a:t>
             </a:fld>
             <a:endParaRPr lang="en-US" dirty="0"/>
           </a:p>
@@ -12569,403 +12567,6 @@
           <a:p>
             <a:r>
               <a:rPr lang="pt-BR" dirty="0"/>
-              <a:t>Redes Neurais Artificiais</a:t>
-            </a:r>
-          </a:p>
-        </p:txBody>
-      </p:sp>
-      <p:sp>
-        <p:nvSpPr>
-          <p:cNvPr id="3" name="Espaço Reservado para Conteúdo 2">
-            <a:extLst>
-              <a:ext uri="{FF2B5EF4-FFF2-40B4-BE49-F238E27FC236}">
-                <a16:creationId xmlns:a16="http://schemas.microsoft.com/office/drawing/2014/main" id="{E1647ED6-C6B8-46F3-976C-6B7EECBA62C5}"/>
-              </a:ext>
-            </a:extLst>
-          </p:cNvPr>
-          <p:cNvSpPr>
-            <a:spLocks noGrp="1"/>
-          </p:cNvSpPr>
-          <p:nvPr>
-            <p:ph idx="1"/>
-          </p:nvPr>
-        </p:nvSpPr>
-        <p:spPr>
-          <a:xfrm>
-            <a:off x="581192" y="2340864"/>
-            <a:ext cx="5764189" cy="3634486"/>
-          </a:xfrm>
-        </p:spPr>
-        <p:txBody>
-          <a:bodyPr>
-            <a:normAutofit/>
-          </a:bodyPr>
-          <a:lstStyle/>
-          <a:p>
-            <a:pPr algn="just"/>
-            <a:r>
-              <a:rPr lang="pt-BR" sz="1800" dirty="0"/>
-              <a:t>Rede </a:t>
-            </a:r>
-            <a:r>
-              <a:rPr lang="pt-BR" sz="1800" i="1" dirty="0" err="1"/>
-              <a:t>Multilayer</a:t>
-            </a:r>
-            <a:r>
-              <a:rPr lang="pt-BR" sz="1800" i="1" dirty="0"/>
-              <a:t> </a:t>
-            </a:r>
-            <a:r>
-              <a:rPr lang="pt-BR" sz="1800" i="1" dirty="0" err="1"/>
-              <a:t>Perceptron</a:t>
-            </a:r>
-            <a:r>
-              <a:rPr lang="pt-BR" sz="1800" i="1" dirty="0"/>
-              <a:t> </a:t>
-            </a:r>
-            <a:r>
-              <a:rPr lang="pt-BR" sz="1800" dirty="0"/>
-              <a:t>(MLP) para o problema de regressão;</a:t>
-            </a:r>
-          </a:p>
-          <a:p>
-            <a:pPr algn="just"/>
-            <a:r>
-              <a:rPr lang="pt-BR" sz="1800" dirty="0"/>
-              <a:t>Aplicação em problemas de previsão de séries temporais (Silva, 2017);</a:t>
-            </a:r>
-          </a:p>
-          <a:p>
-            <a:pPr algn="just"/>
-            <a:r>
-              <a:rPr lang="pt-BR" sz="1800" dirty="0"/>
-              <a:t>Classificação:</a:t>
-            </a:r>
-            <a:r>
-              <a:rPr lang="pt-BR" sz="1800" i="1" dirty="0"/>
-              <a:t> </a:t>
-            </a:r>
-            <a:r>
-              <a:rPr lang="pt-BR" sz="1800" i="1" dirty="0" err="1"/>
-              <a:t>feedforward</a:t>
-            </a:r>
-            <a:r>
-              <a:rPr lang="pt-BR" sz="1800" i="1" dirty="0"/>
-              <a:t> </a:t>
-            </a:r>
-            <a:r>
-              <a:rPr lang="pt-BR" sz="1800" dirty="0"/>
-              <a:t>e aprendizagem supervisionada;</a:t>
-            </a:r>
-          </a:p>
-          <a:p>
-            <a:pPr algn="just"/>
-            <a:r>
-              <a:rPr lang="pt-BR" sz="1800" dirty="0"/>
-              <a:t>Algoritmo de aprendizagem: </a:t>
-            </a:r>
-            <a:r>
-              <a:rPr lang="pt-BR" sz="1800" i="1" dirty="0" err="1"/>
-              <a:t>backpropagation</a:t>
-            </a:r>
-            <a:r>
-              <a:rPr lang="pt-BR" sz="1800" i="1" dirty="0"/>
-              <a:t>.</a:t>
-            </a:r>
-          </a:p>
-          <a:p>
-            <a:pPr lvl="1" algn="just"/>
-            <a:r>
-              <a:rPr lang="pt-BR" sz="1600" dirty="0"/>
-              <a:t>Busca minimizar a função de erro para se ajustar a curva dos dados.</a:t>
-            </a:r>
-          </a:p>
-          <a:p>
-            <a:endParaRPr lang="pt-BR" dirty="0"/>
-          </a:p>
-        </p:txBody>
-      </p:sp>
-      <p:sp>
-        <p:nvSpPr>
-          <p:cNvPr id="6" name="Espaço Reservado para Número de Slide 5">
-            <a:extLst>
-              <a:ext uri="{FF2B5EF4-FFF2-40B4-BE49-F238E27FC236}">
-                <a16:creationId xmlns:a16="http://schemas.microsoft.com/office/drawing/2014/main" id="{A5545136-9C6F-49EA-A1A8-596EA8B2F23E}"/>
-              </a:ext>
-            </a:extLst>
-          </p:cNvPr>
-          <p:cNvSpPr>
-            <a:spLocks noGrp="1"/>
-          </p:cNvSpPr>
-          <p:nvPr>
-            <p:ph type="sldNum" sz="quarter" idx="12"/>
-          </p:nvPr>
-        </p:nvSpPr>
-        <p:spPr/>
-        <p:txBody>
-          <a:bodyPr/>
-          <a:lstStyle/>
-          <a:p>
-            <a:pPr rtl="0"/>
-            <a:fld id="{3A98EE3D-8CD1-4C3F-BD1C-C98C9596463C}" type="slidenum">
-              <a:rPr lang="en-US" smtClean="0"/>
-              <a:t>10</a:t>
-            </a:fld>
-            <a:r>
-              <a:rPr lang="en-US" dirty="0"/>
-              <a:t> / 29</a:t>
-            </a:r>
-          </a:p>
-        </p:txBody>
-      </p:sp>
-      <p:pic>
-        <p:nvPicPr>
-          <p:cNvPr id="8" name="Imagem 7">
-            <a:extLst>
-              <a:ext uri="{FF2B5EF4-FFF2-40B4-BE49-F238E27FC236}">
-                <a16:creationId xmlns:a16="http://schemas.microsoft.com/office/drawing/2014/main" id="{E3E5E48C-4012-4A7E-A19D-5C70C51397A4}"/>
-              </a:ext>
-            </a:extLst>
-          </p:cNvPr>
-          <p:cNvPicPr/>
-          <p:nvPr/>
-        </p:nvPicPr>
-        <p:blipFill>
-          <a:blip r:embed="rId2"/>
-          <a:stretch>
-            <a:fillRect/>
-          </a:stretch>
-        </p:blipFill>
-        <p:spPr>
-          <a:xfrm>
-            <a:off x="6731172" y="2340864"/>
-            <a:ext cx="4879635" cy="2958215"/>
-          </a:xfrm>
-          <a:prstGeom prst="rect">
-            <a:avLst/>
-          </a:prstGeom>
-        </p:spPr>
-      </p:pic>
-      <p:sp>
-        <p:nvSpPr>
-          <p:cNvPr id="4" name="Espaço Reservado para Rodapé 3">
-            <a:extLst>
-              <a:ext uri="{FF2B5EF4-FFF2-40B4-BE49-F238E27FC236}">
-                <a16:creationId xmlns:a16="http://schemas.microsoft.com/office/drawing/2014/main" id="{F8A76535-B640-49E4-BC10-54DF7D0C525A}"/>
-              </a:ext>
-            </a:extLst>
-          </p:cNvPr>
-          <p:cNvSpPr>
-            <a:spLocks noGrp="1"/>
-          </p:cNvSpPr>
-          <p:nvPr>
-            <p:ph type="ftr" sz="quarter" idx="11"/>
-          </p:nvPr>
-        </p:nvSpPr>
-        <p:spPr/>
-        <p:txBody>
-          <a:bodyPr/>
-          <a:lstStyle/>
-          <a:p>
-            <a:r>
-              <a:rPr lang="en-US" dirty="0" err="1"/>
-              <a:t>Referencial</a:t>
-            </a:r>
-            <a:r>
-              <a:rPr lang="en-US" dirty="0"/>
-              <a:t> </a:t>
-            </a:r>
-            <a:r>
-              <a:rPr lang="en-US" dirty="0" err="1"/>
-              <a:t>teórico</a:t>
-            </a:r>
-            <a:r>
-              <a:rPr lang="en-US" dirty="0"/>
-              <a:t> – </a:t>
-            </a:r>
-            <a:r>
-              <a:rPr lang="en-US" dirty="0" err="1"/>
-              <a:t>trabalho</a:t>
-            </a:r>
-            <a:r>
-              <a:rPr lang="en-US" dirty="0"/>
-              <a:t> de </a:t>
-            </a:r>
-            <a:r>
-              <a:rPr lang="en-US" dirty="0" err="1"/>
-              <a:t>conclusão</a:t>
-            </a:r>
-            <a:r>
-              <a:rPr lang="en-US" dirty="0"/>
-              <a:t> de </a:t>
-            </a:r>
-            <a:r>
-              <a:rPr lang="en-US" dirty="0" err="1"/>
-              <a:t>curso</a:t>
-            </a:r>
-            <a:r>
-              <a:rPr lang="en-US" dirty="0"/>
-              <a:t> – Evandro </a:t>
-            </a:r>
-            <a:r>
-              <a:rPr lang="en-US" dirty="0" err="1"/>
-              <a:t>coelho</a:t>
-            </a:r>
-            <a:endParaRPr lang="en-US" dirty="0"/>
-          </a:p>
-        </p:txBody>
-      </p:sp>
-    </p:spTree>
-    <p:extLst>
-      <p:ext uri="{BB962C8B-B14F-4D97-AF65-F5344CB8AC3E}">
-        <p14:creationId xmlns:p14="http://schemas.microsoft.com/office/powerpoint/2010/main" val="1431518098"/>
-      </p:ext>
-    </p:extLst>
-  </p:cSld>
-  <p:clrMapOvr>
-    <a:masterClrMapping/>
-  </p:clrMapOvr>
-</p:sld>
-</file>
-
-<file path=ppt/slides/slide11.xml><?xml version="1.0" encoding="utf-8"?>
-<p:sld xmlns:a="http://schemas.openxmlformats.org/drawingml/2006/main" xmlns:r="http://schemas.openxmlformats.org/officeDocument/2006/relationships" xmlns:p="http://schemas.openxmlformats.org/presentationml/2006/main">
-  <p:cSld>
-    <p:spTree>
-      <p:nvGrpSpPr>
-        <p:cNvPr id="1" name=""/>
-        <p:cNvGrpSpPr/>
-        <p:nvPr/>
-      </p:nvGrpSpPr>
-      <p:grpSpPr>
-        <a:xfrm>
-          <a:off x="0" y="0"/>
-          <a:ext cx="0" cy="0"/>
-          <a:chOff x="0" y="0"/>
-          <a:chExt cx="0" cy="0"/>
-        </a:xfrm>
-      </p:grpSpPr>
-      <p:sp>
-        <p:nvSpPr>
-          <p:cNvPr id="2" name="Título 1">
-            <a:extLst>
-              <a:ext uri="{FF2B5EF4-FFF2-40B4-BE49-F238E27FC236}">
-                <a16:creationId xmlns:a16="http://schemas.microsoft.com/office/drawing/2014/main" id="{DD3D015B-8DFC-4502-9DAB-77D1D74CB5F4}"/>
-              </a:ext>
-            </a:extLst>
-          </p:cNvPr>
-          <p:cNvSpPr>
-            <a:spLocks noGrp="1"/>
-          </p:cNvSpPr>
-          <p:nvPr>
-            <p:ph type="title"/>
-          </p:nvPr>
-        </p:nvSpPr>
-        <p:spPr>
-          <a:xfrm>
-            <a:off x="581192" y="702156"/>
-            <a:ext cx="11029616" cy="5273194"/>
-          </a:xfrm>
-        </p:spPr>
-        <p:txBody>
-          <a:bodyPr>
-            <a:normAutofit/>
-          </a:bodyPr>
-          <a:lstStyle/>
-          <a:p>
-            <a:r>
-              <a:rPr lang="pt-BR" sz="6000" dirty="0"/>
-              <a:t>previsão</a:t>
-            </a:r>
-          </a:p>
-        </p:txBody>
-      </p:sp>
-      <p:sp>
-        <p:nvSpPr>
-          <p:cNvPr id="4" name="Espaço Reservado para Número de Slide 3">
-            <a:extLst>
-              <a:ext uri="{FF2B5EF4-FFF2-40B4-BE49-F238E27FC236}">
-                <a16:creationId xmlns:a16="http://schemas.microsoft.com/office/drawing/2014/main" id="{C8EB25D8-0628-4488-B514-DF8C2B1BC376}"/>
-              </a:ext>
-            </a:extLst>
-          </p:cNvPr>
-          <p:cNvSpPr>
-            <a:spLocks noGrp="1"/>
-          </p:cNvSpPr>
-          <p:nvPr>
-            <p:ph type="sldNum" sz="quarter" idx="12"/>
-          </p:nvPr>
-        </p:nvSpPr>
-        <p:spPr/>
-        <p:txBody>
-          <a:bodyPr/>
-          <a:lstStyle/>
-          <a:p>
-            <a:pPr rtl="0"/>
-            <a:fld id="{3A98EE3D-8CD1-4C3F-BD1C-C98C9596463C}" type="slidenum">
-              <a:rPr lang="en-US" smtClean="0"/>
-              <a:t>11</a:t>
-            </a:fld>
-            <a:r>
-              <a:rPr lang="en-US" dirty="0"/>
-              <a:t> / 29</a:t>
-            </a:r>
-          </a:p>
-        </p:txBody>
-      </p:sp>
-    </p:spTree>
-    <p:extLst>
-      <p:ext uri="{BB962C8B-B14F-4D97-AF65-F5344CB8AC3E}">
-        <p14:creationId xmlns:p14="http://schemas.microsoft.com/office/powerpoint/2010/main" val="3630092208"/>
-      </p:ext>
-    </p:extLst>
-  </p:cSld>
-  <p:clrMapOvr>
-    <a:masterClrMapping/>
-  </p:clrMapOvr>
-</p:sld>
-</file>
-
-<file path=ppt/slides/slide12.xml><?xml version="1.0" encoding="utf-8"?>
-<p:sld xmlns:a="http://schemas.openxmlformats.org/drawingml/2006/main" xmlns:r="http://schemas.openxmlformats.org/officeDocument/2006/relationships" xmlns:p="http://schemas.openxmlformats.org/presentationml/2006/main">
-  <p:cSld>
-    <p:spTree>
-      <p:nvGrpSpPr>
-        <p:cNvPr id="1" name=""/>
-        <p:cNvGrpSpPr/>
-        <p:nvPr/>
-      </p:nvGrpSpPr>
-      <p:grpSpPr>
-        <a:xfrm>
-          <a:off x="0" y="0"/>
-          <a:ext cx="0" cy="0"/>
-          <a:chOff x="0" y="0"/>
-          <a:chExt cx="0" cy="0"/>
-        </a:xfrm>
-      </p:grpSpPr>
-      <p:sp>
-        <p:nvSpPr>
-          <p:cNvPr id="2" name="Título 1">
-            <a:extLst>
-              <a:ext uri="{FF2B5EF4-FFF2-40B4-BE49-F238E27FC236}">
-                <a16:creationId xmlns:a16="http://schemas.microsoft.com/office/drawing/2014/main" id="{9D872C6C-3E07-4AC6-B68D-9AFE69A9DDB5}"/>
-              </a:ext>
-            </a:extLst>
-          </p:cNvPr>
-          <p:cNvSpPr>
-            <a:spLocks noGrp="1"/>
-          </p:cNvSpPr>
-          <p:nvPr>
-            <p:ph type="title"/>
-          </p:nvPr>
-        </p:nvSpPr>
-        <p:spPr/>
-        <p:txBody>
-          <a:bodyPr/>
-          <a:lstStyle/>
-          <a:p>
-            <a:r>
-              <a:rPr lang="pt-BR" dirty="0"/>
               <a:t>METODOLOGIA</a:t>
             </a:r>
           </a:p>
@@ -13067,7 +12668,7 @@
             <a:pPr rtl="0"/>
             <a:fld id="{3A98EE3D-8CD1-4C3F-BD1C-C98C9596463C}" type="slidenum">
               <a:rPr lang="en-US" smtClean="0"/>
-              <a:t>12</a:t>
+              <a:t>10</a:t>
             </a:fld>
             <a:r>
               <a:rPr lang="en-US" dirty="0"/>
@@ -13270,7 +12871,7 @@
 </p:sld>
 </file>
 
-<file path=ppt/slides/slide13.xml><?xml version="1.0" encoding="utf-8"?>
+<file path=ppt/slides/slide11.xml><?xml version="1.0" encoding="utf-8"?>
 <p:sld xmlns:a="http://schemas.openxmlformats.org/drawingml/2006/main" xmlns:r="http://schemas.openxmlformats.org/officeDocument/2006/relationships" xmlns:p="http://schemas.openxmlformats.org/presentationml/2006/main">
   <p:cSld>
     <p:spTree>
@@ -13375,7 +12976,7 @@
             <a:pPr rtl="0"/>
             <a:fld id="{3A98EE3D-8CD1-4C3F-BD1C-C98C9596463C}" type="slidenum">
               <a:rPr lang="en-US" smtClean="0"/>
-              <a:t>13</a:t>
+              <a:t>11</a:t>
             </a:fld>
             <a:r>
               <a:rPr lang="en-US" dirty="0"/>
@@ -13454,7 +13055,7 @@
 </p:sld>
 </file>
 
-<file path=ppt/slides/slide14.xml><?xml version="1.0" encoding="utf-8"?>
+<file path=ppt/slides/slide12.xml><?xml version="1.0" encoding="utf-8"?>
 <p:sld xmlns:a="http://schemas.openxmlformats.org/drawingml/2006/main" xmlns:r="http://schemas.openxmlformats.org/officeDocument/2006/relationships" xmlns:p="http://schemas.openxmlformats.org/presentationml/2006/main">
   <p:cSld>
     <p:spTree>
@@ -13584,7 +13185,7 @@
             <a:pPr rtl="0"/>
             <a:fld id="{3A98EE3D-8CD1-4C3F-BD1C-C98C9596463C}" type="slidenum">
               <a:rPr lang="en-US" smtClean="0"/>
-              <a:t>14</a:t>
+              <a:t>12</a:t>
             </a:fld>
             <a:r>
               <a:rPr lang="en-US" dirty="0"/>
@@ -13699,7 +13300,7 @@
 </p:sld>
 </file>
 
-<file path=ppt/slides/slide15.xml><?xml version="1.0" encoding="utf-8"?>
+<file path=ppt/slides/slide13.xml><?xml version="1.0" encoding="utf-8"?>
 <p:sld xmlns:a="http://schemas.openxmlformats.org/drawingml/2006/main" xmlns:r="http://schemas.openxmlformats.org/officeDocument/2006/relationships" xmlns:p="http://schemas.openxmlformats.org/presentationml/2006/main">
   <p:cSld>
     <p:spTree>
@@ -13893,7 +13494,7 @@
             <a:pPr rtl="0"/>
             <a:fld id="{3A98EE3D-8CD1-4C3F-BD1C-C98C9596463C}" type="slidenum">
               <a:rPr lang="en-US" smtClean="0"/>
-              <a:t>15</a:t>
+              <a:t>13</a:t>
             </a:fld>
             <a:r>
               <a:rPr lang="en-US" dirty="0"/>
@@ -14226,7 +13827,7 @@
 </p:sld>
 </file>
 
-<file path=ppt/slides/slide16.xml><?xml version="1.0" encoding="utf-8"?>
+<file path=ppt/slides/slide14.xml><?xml version="1.0" encoding="utf-8"?>
 <p:sld xmlns:a="http://schemas.openxmlformats.org/drawingml/2006/main" xmlns:r="http://schemas.openxmlformats.org/officeDocument/2006/relationships" xmlns:p="http://schemas.openxmlformats.org/presentationml/2006/main">
   <p:cSld>
     <p:spTree>
@@ -14295,7 +13896,7 @@
             <a:pPr rtl="0"/>
             <a:fld id="{3A98EE3D-8CD1-4C3F-BD1C-C98C9596463C}" type="slidenum">
               <a:rPr lang="en-US" smtClean="0"/>
-              <a:t>16</a:t>
+              <a:t>14</a:t>
             </a:fld>
             <a:r>
               <a:rPr lang="en-US" dirty="0"/>
@@ -14456,7 +14057,7 @@
 </p:sld>
 </file>
 
-<file path=ppt/slides/slide17.xml><?xml version="1.0" encoding="utf-8"?>
+<file path=ppt/slides/slide15.xml><?xml version="1.0" encoding="utf-8"?>
 <p:sld xmlns:a="http://schemas.openxmlformats.org/drawingml/2006/main" xmlns:r="http://schemas.openxmlformats.org/officeDocument/2006/relationships" xmlns:p="http://schemas.openxmlformats.org/presentationml/2006/main">
   <p:cSld>
     <p:spTree>
@@ -14582,7 +14183,7 @@
             <a:pPr rtl="0"/>
             <a:fld id="{3A98EE3D-8CD1-4C3F-BD1C-C98C9596463C}" type="slidenum">
               <a:rPr lang="en-US" smtClean="0"/>
-              <a:t>17</a:t>
+              <a:t>15</a:t>
             </a:fld>
             <a:r>
               <a:rPr lang="en-US" dirty="0"/>
@@ -15206,6 +14807,344 @@
 </p:sld>
 </file>
 
+<file path=ppt/slides/slide16.xml><?xml version="1.0" encoding="utf-8"?>
+<p:sld xmlns:a="http://schemas.openxmlformats.org/drawingml/2006/main" xmlns:r="http://schemas.openxmlformats.org/officeDocument/2006/relationships" xmlns:p="http://schemas.openxmlformats.org/presentationml/2006/main">
+  <p:cSld>
+    <p:spTree>
+      <p:nvGrpSpPr>
+        <p:cNvPr id="1" name=""/>
+        <p:cNvGrpSpPr/>
+        <p:nvPr/>
+      </p:nvGrpSpPr>
+      <p:grpSpPr>
+        <a:xfrm>
+          <a:off x="0" y="0"/>
+          <a:ext cx="0" cy="0"/>
+          <a:chOff x="0" y="0"/>
+          <a:chExt cx="0" cy="0"/>
+        </a:xfrm>
+      </p:grpSpPr>
+      <p:sp>
+        <p:nvSpPr>
+          <p:cNvPr id="2" name="Título 1">
+            <a:extLst>
+              <a:ext uri="{FF2B5EF4-FFF2-40B4-BE49-F238E27FC236}">
+                <a16:creationId xmlns:a16="http://schemas.microsoft.com/office/drawing/2014/main" id="{9D872C6C-3E07-4AC6-B68D-9AFE69A9DDB5}"/>
+              </a:ext>
+            </a:extLst>
+          </p:cNvPr>
+          <p:cNvSpPr>
+            <a:spLocks noGrp="1"/>
+          </p:cNvSpPr>
+          <p:nvPr>
+            <p:ph type="title"/>
+          </p:nvPr>
+        </p:nvSpPr>
+        <p:spPr/>
+        <p:txBody>
+          <a:bodyPr/>
+          <a:lstStyle/>
+          <a:p>
+            <a:r>
+              <a:rPr lang="pt-BR" dirty="0"/>
+              <a:t>Pré-processamento</a:t>
+            </a:r>
+          </a:p>
+        </p:txBody>
+      </p:sp>
+      <p:sp>
+        <p:nvSpPr>
+          <p:cNvPr id="6" name="Espaço Reservado para Número de Slide 5">
+            <a:extLst>
+              <a:ext uri="{FF2B5EF4-FFF2-40B4-BE49-F238E27FC236}">
+                <a16:creationId xmlns:a16="http://schemas.microsoft.com/office/drawing/2014/main" id="{A5545136-9C6F-49EA-A1A8-596EA8B2F23E}"/>
+              </a:ext>
+            </a:extLst>
+          </p:cNvPr>
+          <p:cNvSpPr>
+            <a:spLocks noGrp="1"/>
+          </p:cNvSpPr>
+          <p:nvPr>
+            <p:ph type="sldNum" sz="quarter" idx="12"/>
+          </p:nvPr>
+        </p:nvSpPr>
+        <p:spPr/>
+        <p:txBody>
+          <a:bodyPr/>
+          <a:lstStyle/>
+          <a:p>
+            <a:pPr rtl="0"/>
+            <a:fld id="{3A98EE3D-8CD1-4C3F-BD1C-C98C9596463C}" type="slidenum">
+              <a:rPr lang="en-US" smtClean="0"/>
+              <a:t>16</a:t>
+            </a:fld>
+            <a:r>
+              <a:rPr lang="en-US" dirty="0"/>
+              <a:t> / 29</a:t>
+            </a:r>
+          </a:p>
+        </p:txBody>
+      </p:sp>
+      <p:sp>
+        <p:nvSpPr>
+          <p:cNvPr id="4" name="Espaço Reservado para Rodapé 3">
+            <a:extLst>
+              <a:ext uri="{FF2B5EF4-FFF2-40B4-BE49-F238E27FC236}">
+                <a16:creationId xmlns:a16="http://schemas.microsoft.com/office/drawing/2014/main" id="{0345B467-AD42-4294-A4C2-D78EAAB24A85}"/>
+              </a:ext>
+            </a:extLst>
+          </p:cNvPr>
+          <p:cNvSpPr>
+            <a:spLocks noGrp="1"/>
+          </p:cNvSpPr>
+          <p:nvPr>
+            <p:ph type="ftr" sz="quarter" idx="11"/>
+          </p:nvPr>
+        </p:nvSpPr>
+        <p:spPr/>
+        <p:txBody>
+          <a:bodyPr/>
+          <a:lstStyle/>
+          <a:p>
+            <a:r>
+              <a:rPr lang="en-US" dirty="0"/>
+              <a:t>METODOLOGIA – </a:t>
+            </a:r>
+            <a:r>
+              <a:rPr lang="en-US" dirty="0" err="1"/>
+              <a:t>trabalho</a:t>
+            </a:r>
+            <a:r>
+              <a:rPr lang="en-US" dirty="0"/>
+              <a:t> de </a:t>
+            </a:r>
+            <a:r>
+              <a:rPr lang="en-US" dirty="0" err="1"/>
+              <a:t>conclusão</a:t>
+            </a:r>
+            <a:r>
+              <a:rPr lang="en-US" dirty="0"/>
+              <a:t> de </a:t>
+            </a:r>
+            <a:r>
+              <a:rPr lang="en-US" dirty="0" err="1"/>
+              <a:t>curso</a:t>
+            </a:r>
+            <a:r>
+              <a:rPr lang="en-US" dirty="0"/>
+              <a:t> – Evandro </a:t>
+            </a:r>
+            <a:r>
+              <a:rPr lang="en-US" dirty="0" err="1"/>
+              <a:t>coelho</a:t>
+            </a:r>
+            <a:endParaRPr lang="en-US" dirty="0"/>
+          </a:p>
+        </p:txBody>
+      </p:sp>
+    </p:spTree>
+    <p:extLst>
+      <p:ext uri="{BB962C8B-B14F-4D97-AF65-F5344CB8AC3E}">
+        <p14:creationId xmlns:p14="http://schemas.microsoft.com/office/powerpoint/2010/main" val="345397244"/>
+      </p:ext>
+    </p:extLst>
+  </p:cSld>
+  <p:clrMapOvr>
+    <a:masterClrMapping/>
+  </p:clrMapOvr>
+</p:sld>
+</file>
+
+<file path=ppt/slides/slide17.xml><?xml version="1.0" encoding="utf-8"?>
+<p:sld xmlns:a="http://schemas.openxmlformats.org/drawingml/2006/main" xmlns:r="http://schemas.openxmlformats.org/officeDocument/2006/relationships" xmlns:p="http://schemas.openxmlformats.org/presentationml/2006/main">
+  <p:cSld>
+    <p:spTree>
+      <p:nvGrpSpPr>
+        <p:cNvPr id="1" name=""/>
+        <p:cNvGrpSpPr/>
+        <p:nvPr/>
+      </p:nvGrpSpPr>
+      <p:grpSpPr>
+        <a:xfrm>
+          <a:off x="0" y="0"/>
+          <a:ext cx="0" cy="0"/>
+          <a:chOff x="0" y="0"/>
+          <a:chExt cx="0" cy="0"/>
+        </a:xfrm>
+      </p:grpSpPr>
+      <p:sp>
+        <p:nvSpPr>
+          <p:cNvPr id="2" name="Título 1">
+            <a:extLst>
+              <a:ext uri="{FF2B5EF4-FFF2-40B4-BE49-F238E27FC236}">
+                <a16:creationId xmlns:a16="http://schemas.microsoft.com/office/drawing/2014/main" id="{9D872C6C-3E07-4AC6-B68D-9AFE69A9DDB5}"/>
+              </a:ext>
+            </a:extLst>
+          </p:cNvPr>
+          <p:cNvSpPr>
+            <a:spLocks noGrp="1"/>
+          </p:cNvSpPr>
+          <p:nvPr>
+            <p:ph type="title"/>
+          </p:nvPr>
+        </p:nvSpPr>
+        <p:spPr/>
+        <p:txBody>
+          <a:bodyPr/>
+          <a:lstStyle/>
+          <a:p>
+            <a:r>
+              <a:rPr lang="pt-BR" dirty="0"/>
+              <a:t>Pré-processamento</a:t>
+            </a:r>
+          </a:p>
+        </p:txBody>
+      </p:sp>
+      <p:sp>
+        <p:nvSpPr>
+          <p:cNvPr id="6" name="Espaço Reservado para Número de Slide 5">
+            <a:extLst>
+              <a:ext uri="{FF2B5EF4-FFF2-40B4-BE49-F238E27FC236}">
+                <a16:creationId xmlns:a16="http://schemas.microsoft.com/office/drawing/2014/main" id="{A5545136-9C6F-49EA-A1A8-596EA8B2F23E}"/>
+              </a:ext>
+            </a:extLst>
+          </p:cNvPr>
+          <p:cNvSpPr>
+            <a:spLocks noGrp="1"/>
+          </p:cNvSpPr>
+          <p:nvPr>
+            <p:ph type="sldNum" sz="quarter" idx="12"/>
+          </p:nvPr>
+        </p:nvSpPr>
+        <p:spPr/>
+        <p:txBody>
+          <a:bodyPr/>
+          <a:lstStyle/>
+          <a:p>
+            <a:pPr rtl="0"/>
+            <a:fld id="{3A98EE3D-8CD1-4C3F-BD1C-C98C9596463C}" type="slidenum">
+              <a:rPr lang="en-US" smtClean="0"/>
+              <a:t>17</a:t>
+            </a:fld>
+            <a:r>
+              <a:rPr lang="en-US" dirty="0"/>
+              <a:t> / 29</a:t>
+            </a:r>
+          </a:p>
+        </p:txBody>
+      </p:sp>
+      <p:sp>
+        <p:nvSpPr>
+          <p:cNvPr id="10" name="CaixaDeTexto 9">
+            <a:extLst>
+              <a:ext uri="{FF2B5EF4-FFF2-40B4-BE49-F238E27FC236}">
+                <a16:creationId xmlns:a16="http://schemas.microsoft.com/office/drawing/2014/main" id="{AB0044E8-6423-4B7C-8B71-66B875133B9B}"/>
+              </a:ext>
+            </a:extLst>
+          </p:cNvPr>
+          <p:cNvSpPr txBox="1"/>
+          <p:nvPr/>
+        </p:nvSpPr>
+        <p:spPr>
+          <a:xfrm>
+            <a:off x="3657151" y="5871381"/>
+            <a:ext cx="4877696" cy="353943"/>
+          </a:xfrm>
+          <a:prstGeom prst="rect">
+            <a:avLst/>
+          </a:prstGeom>
+          <a:noFill/>
+        </p:spPr>
+        <p:txBody>
+          <a:bodyPr wrap="square" rtlCol="0">
+            <a:spAutoFit/>
+          </a:bodyPr>
+          <a:lstStyle/>
+          <a:p>
+            <a:r>
+              <a:rPr lang="pt-BR" sz="1700" dirty="0">
+                <a:solidFill>
+                  <a:schemeClr val="tx1">
+                    <a:lumMod val="75000"/>
+                    <a:lumOff val="25000"/>
+                  </a:schemeClr>
+                </a:solidFill>
+              </a:rPr>
+              <a:t>Correlação de Pearson entre as variáveis. Site = 40</a:t>
+            </a:r>
+          </a:p>
+        </p:txBody>
+      </p:sp>
+      <p:sp>
+        <p:nvSpPr>
+          <p:cNvPr id="3" name="Espaço Reservado para Rodapé 2">
+            <a:extLst>
+              <a:ext uri="{FF2B5EF4-FFF2-40B4-BE49-F238E27FC236}">
+                <a16:creationId xmlns:a16="http://schemas.microsoft.com/office/drawing/2014/main" id="{B15DA932-A8D5-4BF9-B08E-5AA5C2303C11}"/>
+              </a:ext>
+            </a:extLst>
+          </p:cNvPr>
+          <p:cNvSpPr>
+            <a:spLocks noGrp="1"/>
+          </p:cNvSpPr>
+          <p:nvPr>
+            <p:ph type="ftr" sz="quarter" idx="11"/>
+          </p:nvPr>
+        </p:nvSpPr>
+        <p:spPr/>
+        <p:txBody>
+          <a:bodyPr/>
+          <a:lstStyle/>
+          <a:p>
+            <a:r>
+              <a:rPr lang="en-US" dirty="0"/>
+              <a:t>METODOLOGIA – </a:t>
+            </a:r>
+            <a:r>
+              <a:rPr lang="en-US" dirty="0" err="1"/>
+              <a:t>trabalho</a:t>
+            </a:r>
+            <a:r>
+              <a:rPr lang="en-US" dirty="0"/>
+              <a:t> de </a:t>
+            </a:r>
+            <a:r>
+              <a:rPr lang="en-US" dirty="0" err="1"/>
+              <a:t>conclusão</a:t>
+            </a:r>
+            <a:r>
+              <a:rPr lang="en-US" dirty="0"/>
+              <a:t> de </a:t>
+            </a:r>
+            <a:r>
+              <a:rPr lang="en-US" dirty="0" err="1"/>
+              <a:t>curso</a:t>
+            </a:r>
+            <a:r>
+              <a:rPr lang="en-US" dirty="0"/>
+              <a:t> – Evandro </a:t>
+            </a:r>
+            <a:r>
+              <a:rPr lang="en-US" dirty="0" err="1"/>
+              <a:t>coelho</a:t>
+            </a:r>
+            <a:endParaRPr lang="en-US" dirty="0"/>
+          </a:p>
+        </p:txBody>
+      </p:sp>
+    </p:spTree>
+    <p:extLst>
+      <p:ext uri="{BB962C8B-B14F-4D97-AF65-F5344CB8AC3E}">
+        <p14:creationId xmlns:p14="http://schemas.microsoft.com/office/powerpoint/2010/main" val="196519094"/>
+      </p:ext>
+    </p:extLst>
+  </p:cSld>
+  <p:clrMapOvr>
+    <a:masterClrMapping/>
+  </p:clrMapOvr>
+</p:sld>
+</file>
+
 <file path=ppt/slides/slide18.xml><?xml version="1.0" encoding="utf-8"?>
 <p:sld xmlns:a="http://schemas.openxmlformats.org/drawingml/2006/main" xmlns:r="http://schemas.openxmlformats.org/officeDocument/2006/relationships" xmlns:p="http://schemas.openxmlformats.org/presentationml/2006/main">
   <p:cSld>
@@ -15246,7 +15185,7 @@
           <a:p>
             <a:r>
               <a:rPr lang="pt-BR" dirty="0"/>
-              <a:t>Pré-processamento</a:t>
+              <a:t>Treino (validação cruzada)</a:t>
             </a:r>
           </a:p>
         </p:txBody>
@@ -15276,623 +15215,6 @@
             <a:fld id="{3A98EE3D-8CD1-4C3F-BD1C-C98C9596463C}" type="slidenum">
               <a:rPr lang="en-US" smtClean="0"/>
               <a:t>18</a:t>
-            </a:fld>
-            <a:r>
-              <a:rPr lang="en-US" dirty="0"/>
-              <a:t> / 29</a:t>
-            </a:r>
-          </a:p>
-        </p:txBody>
-      </p:sp>
-      <p:sp>
-        <p:nvSpPr>
-          <p:cNvPr id="4" name="Espaço Reservado para Rodapé 3">
-            <a:extLst>
-              <a:ext uri="{FF2B5EF4-FFF2-40B4-BE49-F238E27FC236}">
-                <a16:creationId xmlns:a16="http://schemas.microsoft.com/office/drawing/2014/main" id="{0345B467-AD42-4294-A4C2-D78EAAB24A85}"/>
-              </a:ext>
-            </a:extLst>
-          </p:cNvPr>
-          <p:cNvSpPr>
-            <a:spLocks noGrp="1"/>
-          </p:cNvSpPr>
-          <p:nvPr>
-            <p:ph type="ftr" sz="quarter" idx="11"/>
-          </p:nvPr>
-        </p:nvSpPr>
-        <p:spPr/>
-        <p:txBody>
-          <a:bodyPr/>
-          <a:lstStyle/>
-          <a:p>
-            <a:r>
-              <a:rPr lang="en-US" dirty="0"/>
-              <a:t>METODOLOGIA – </a:t>
-            </a:r>
-            <a:r>
-              <a:rPr lang="en-US" dirty="0" err="1"/>
-              <a:t>trabalho</a:t>
-            </a:r>
-            <a:r>
-              <a:rPr lang="en-US" dirty="0"/>
-              <a:t> de </a:t>
-            </a:r>
-            <a:r>
-              <a:rPr lang="en-US" dirty="0" err="1"/>
-              <a:t>conclusão</a:t>
-            </a:r>
-            <a:r>
-              <a:rPr lang="en-US" dirty="0"/>
-              <a:t> de </a:t>
-            </a:r>
-            <a:r>
-              <a:rPr lang="en-US" dirty="0" err="1"/>
-              <a:t>curso</a:t>
-            </a:r>
-            <a:r>
-              <a:rPr lang="en-US" dirty="0"/>
-              <a:t> – Evandro </a:t>
-            </a:r>
-            <a:r>
-              <a:rPr lang="en-US" dirty="0" err="1"/>
-              <a:t>coelho</a:t>
-            </a:r>
-            <a:endParaRPr lang="en-US" dirty="0"/>
-          </a:p>
-        </p:txBody>
-      </p:sp>
-      <p:pic>
-        <p:nvPicPr>
-          <p:cNvPr id="14" name="Imagem 13">
-            <a:extLst>
-              <a:ext uri="{FF2B5EF4-FFF2-40B4-BE49-F238E27FC236}">
-                <a16:creationId xmlns:a16="http://schemas.microsoft.com/office/drawing/2014/main" id="{79BFFC54-3134-47C9-A59E-474A900053DC}"/>
-              </a:ext>
-            </a:extLst>
-          </p:cNvPr>
-          <p:cNvPicPr/>
-          <p:nvPr/>
-        </p:nvPicPr>
-        <p:blipFill>
-          <a:blip r:embed="rId2"/>
-          <a:stretch>
-            <a:fillRect/>
-          </a:stretch>
-        </p:blipFill>
-        <p:spPr>
-          <a:xfrm>
-            <a:off x="691934" y="2663168"/>
-            <a:ext cx="10808132" cy="2961778"/>
-          </a:xfrm>
-          <a:prstGeom prst="rect">
-            <a:avLst/>
-          </a:prstGeom>
-        </p:spPr>
-      </p:pic>
-    </p:spTree>
-    <p:extLst>
-      <p:ext uri="{BB962C8B-B14F-4D97-AF65-F5344CB8AC3E}">
-        <p14:creationId xmlns:p14="http://schemas.microsoft.com/office/powerpoint/2010/main" val="345397244"/>
-      </p:ext>
-    </p:extLst>
-  </p:cSld>
-  <p:clrMapOvr>
-    <a:masterClrMapping/>
-  </p:clrMapOvr>
-</p:sld>
-</file>
-
-<file path=ppt/slides/slide19.xml><?xml version="1.0" encoding="utf-8"?>
-<p:sld xmlns:a="http://schemas.openxmlformats.org/drawingml/2006/main" xmlns:r="http://schemas.openxmlformats.org/officeDocument/2006/relationships" xmlns:p="http://schemas.openxmlformats.org/presentationml/2006/main">
-  <p:cSld>
-    <p:spTree>
-      <p:nvGrpSpPr>
-        <p:cNvPr id="1" name=""/>
-        <p:cNvGrpSpPr/>
-        <p:nvPr/>
-      </p:nvGrpSpPr>
-      <p:grpSpPr>
-        <a:xfrm>
-          <a:off x="0" y="0"/>
-          <a:ext cx="0" cy="0"/>
-          <a:chOff x="0" y="0"/>
-          <a:chExt cx="0" cy="0"/>
-        </a:xfrm>
-      </p:grpSpPr>
-      <p:sp>
-        <p:nvSpPr>
-          <p:cNvPr id="2" name="Título 1">
-            <a:extLst>
-              <a:ext uri="{FF2B5EF4-FFF2-40B4-BE49-F238E27FC236}">
-                <a16:creationId xmlns:a16="http://schemas.microsoft.com/office/drawing/2014/main" id="{9D872C6C-3E07-4AC6-B68D-9AFE69A9DDB5}"/>
-              </a:ext>
-            </a:extLst>
-          </p:cNvPr>
-          <p:cNvSpPr>
-            <a:spLocks noGrp="1"/>
-          </p:cNvSpPr>
-          <p:nvPr>
-            <p:ph type="title"/>
-          </p:nvPr>
-        </p:nvSpPr>
-        <p:spPr/>
-        <p:txBody>
-          <a:bodyPr/>
-          <a:lstStyle/>
-          <a:p>
-            <a:r>
-              <a:rPr lang="pt-BR" dirty="0"/>
-              <a:t>Pré-processamento</a:t>
-            </a:r>
-          </a:p>
-        </p:txBody>
-      </p:sp>
-      <p:sp>
-        <p:nvSpPr>
-          <p:cNvPr id="6" name="Espaço Reservado para Número de Slide 5">
-            <a:extLst>
-              <a:ext uri="{FF2B5EF4-FFF2-40B4-BE49-F238E27FC236}">
-                <a16:creationId xmlns:a16="http://schemas.microsoft.com/office/drawing/2014/main" id="{A5545136-9C6F-49EA-A1A8-596EA8B2F23E}"/>
-              </a:ext>
-            </a:extLst>
-          </p:cNvPr>
-          <p:cNvSpPr>
-            <a:spLocks noGrp="1"/>
-          </p:cNvSpPr>
-          <p:nvPr>
-            <p:ph type="sldNum" sz="quarter" idx="12"/>
-          </p:nvPr>
-        </p:nvSpPr>
-        <p:spPr/>
-        <p:txBody>
-          <a:bodyPr/>
-          <a:lstStyle/>
-          <a:p>
-            <a:pPr rtl="0"/>
-            <a:fld id="{3A98EE3D-8CD1-4C3F-BD1C-C98C9596463C}" type="slidenum">
-              <a:rPr lang="en-US" smtClean="0"/>
-              <a:t>19</a:t>
-            </a:fld>
-            <a:r>
-              <a:rPr lang="en-US" dirty="0"/>
-              <a:t> / 29</a:t>
-            </a:r>
-          </a:p>
-        </p:txBody>
-      </p:sp>
-      <p:pic>
-        <p:nvPicPr>
-          <p:cNvPr id="9" name="Imagem 8">
-            <a:extLst>
-              <a:ext uri="{FF2B5EF4-FFF2-40B4-BE49-F238E27FC236}">
-                <a16:creationId xmlns:a16="http://schemas.microsoft.com/office/drawing/2014/main" id="{6B78FE2E-A06D-4D61-827B-B0CA6AE7E149}"/>
-              </a:ext>
-            </a:extLst>
-          </p:cNvPr>
-          <p:cNvPicPr/>
-          <p:nvPr/>
-        </p:nvPicPr>
-        <p:blipFill>
-          <a:blip r:embed="rId2"/>
-          <a:stretch>
-            <a:fillRect/>
-          </a:stretch>
-        </p:blipFill>
-        <p:spPr>
-          <a:xfrm>
-            <a:off x="3551384" y="1890876"/>
-            <a:ext cx="5089231" cy="3980505"/>
-          </a:xfrm>
-          <a:prstGeom prst="rect">
-            <a:avLst/>
-          </a:prstGeom>
-        </p:spPr>
-      </p:pic>
-      <p:sp>
-        <p:nvSpPr>
-          <p:cNvPr id="10" name="CaixaDeTexto 9">
-            <a:extLst>
-              <a:ext uri="{FF2B5EF4-FFF2-40B4-BE49-F238E27FC236}">
-                <a16:creationId xmlns:a16="http://schemas.microsoft.com/office/drawing/2014/main" id="{AB0044E8-6423-4B7C-8B71-66B875133B9B}"/>
-              </a:ext>
-            </a:extLst>
-          </p:cNvPr>
-          <p:cNvSpPr txBox="1"/>
-          <p:nvPr/>
-        </p:nvSpPr>
-        <p:spPr>
-          <a:xfrm>
-            <a:off x="3657151" y="5871381"/>
-            <a:ext cx="4877696" cy="353943"/>
-          </a:xfrm>
-          <a:prstGeom prst="rect">
-            <a:avLst/>
-          </a:prstGeom>
-          <a:noFill/>
-        </p:spPr>
-        <p:txBody>
-          <a:bodyPr wrap="square" rtlCol="0">
-            <a:spAutoFit/>
-          </a:bodyPr>
-          <a:lstStyle/>
-          <a:p>
-            <a:r>
-              <a:rPr lang="pt-BR" sz="1700" dirty="0">
-                <a:solidFill>
-                  <a:schemeClr val="tx1">
-                    <a:lumMod val="75000"/>
-                    <a:lumOff val="25000"/>
-                  </a:schemeClr>
-                </a:solidFill>
-              </a:rPr>
-              <a:t>Correlação de Pearson entre as variáveis. Site = 40</a:t>
-            </a:r>
-          </a:p>
-        </p:txBody>
-      </p:sp>
-      <p:sp>
-        <p:nvSpPr>
-          <p:cNvPr id="3" name="Espaço Reservado para Rodapé 2">
-            <a:extLst>
-              <a:ext uri="{FF2B5EF4-FFF2-40B4-BE49-F238E27FC236}">
-                <a16:creationId xmlns:a16="http://schemas.microsoft.com/office/drawing/2014/main" id="{B15DA932-A8D5-4BF9-B08E-5AA5C2303C11}"/>
-              </a:ext>
-            </a:extLst>
-          </p:cNvPr>
-          <p:cNvSpPr>
-            <a:spLocks noGrp="1"/>
-          </p:cNvSpPr>
-          <p:nvPr>
-            <p:ph type="ftr" sz="quarter" idx="11"/>
-          </p:nvPr>
-        </p:nvSpPr>
-        <p:spPr/>
-        <p:txBody>
-          <a:bodyPr/>
-          <a:lstStyle/>
-          <a:p>
-            <a:r>
-              <a:rPr lang="en-US" dirty="0"/>
-              <a:t>METODOLOGIA – </a:t>
-            </a:r>
-            <a:r>
-              <a:rPr lang="en-US" dirty="0" err="1"/>
-              <a:t>trabalho</a:t>
-            </a:r>
-            <a:r>
-              <a:rPr lang="en-US" dirty="0"/>
-              <a:t> de </a:t>
-            </a:r>
-            <a:r>
-              <a:rPr lang="en-US" dirty="0" err="1"/>
-              <a:t>conclusão</a:t>
-            </a:r>
-            <a:r>
-              <a:rPr lang="en-US" dirty="0"/>
-              <a:t> de </a:t>
-            </a:r>
-            <a:r>
-              <a:rPr lang="en-US" dirty="0" err="1"/>
-              <a:t>curso</a:t>
-            </a:r>
-            <a:r>
-              <a:rPr lang="en-US" dirty="0"/>
-              <a:t> – Evandro </a:t>
-            </a:r>
-            <a:r>
-              <a:rPr lang="en-US" dirty="0" err="1"/>
-              <a:t>coelho</a:t>
-            </a:r>
-            <a:endParaRPr lang="en-US" dirty="0"/>
-          </a:p>
-        </p:txBody>
-      </p:sp>
-    </p:spTree>
-    <p:extLst>
-      <p:ext uri="{BB962C8B-B14F-4D97-AF65-F5344CB8AC3E}">
-        <p14:creationId xmlns:p14="http://schemas.microsoft.com/office/powerpoint/2010/main" val="196519094"/>
-      </p:ext>
-    </p:extLst>
-  </p:cSld>
-  <p:clrMapOvr>
-    <a:masterClrMapping/>
-  </p:clrMapOvr>
-</p:sld>
-</file>
-
-<file path=ppt/slides/slide2.xml><?xml version="1.0" encoding="utf-8"?>
-<p:sld xmlns:a="http://schemas.openxmlformats.org/drawingml/2006/main" xmlns:r="http://schemas.openxmlformats.org/officeDocument/2006/relationships" xmlns:p="http://schemas.openxmlformats.org/presentationml/2006/main">
-  <p:cSld>
-    <p:spTree>
-      <p:nvGrpSpPr>
-        <p:cNvPr id="1" name=""/>
-        <p:cNvGrpSpPr/>
-        <p:nvPr/>
-      </p:nvGrpSpPr>
-      <p:grpSpPr>
-        <a:xfrm>
-          <a:off x="0" y="0"/>
-          <a:ext cx="0" cy="0"/>
-          <a:chOff x="0" y="0"/>
-          <a:chExt cx="0" cy="0"/>
-        </a:xfrm>
-      </p:grpSpPr>
-      <p:sp>
-        <p:nvSpPr>
-          <p:cNvPr id="2" name="Título 1">
-            <a:extLst>
-              <a:ext uri="{FF2B5EF4-FFF2-40B4-BE49-F238E27FC236}">
-                <a16:creationId xmlns:a16="http://schemas.microsoft.com/office/drawing/2014/main" id="{9D872C6C-3E07-4AC6-B68D-9AFE69A9DDB5}"/>
-              </a:ext>
-            </a:extLst>
-          </p:cNvPr>
-          <p:cNvSpPr>
-            <a:spLocks noGrp="1"/>
-          </p:cNvSpPr>
-          <p:nvPr>
-            <p:ph type="title"/>
-          </p:nvPr>
-        </p:nvSpPr>
-        <p:spPr/>
-        <p:txBody>
-          <a:bodyPr/>
-          <a:lstStyle/>
-          <a:p>
-            <a:r>
-              <a:rPr lang="pt-BR" dirty="0"/>
-              <a:t>SUMÁRIO</a:t>
-            </a:r>
-          </a:p>
-        </p:txBody>
-      </p:sp>
-      <p:sp>
-        <p:nvSpPr>
-          <p:cNvPr id="3" name="Espaço Reservado para Conteúdo 2">
-            <a:extLst>
-              <a:ext uri="{FF2B5EF4-FFF2-40B4-BE49-F238E27FC236}">
-                <a16:creationId xmlns:a16="http://schemas.microsoft.com/office/drawing/2014/main" id="{E1647ED6-C6B8-46F3-976C-6B7EECBA62C5}"/>
-              </a:ext>
-            </a:extLst>
-          </p:cNvPr>
-          <p:cNvSpPr>
-            <a:spLocks noGrp="1"/>
-          </p:cNvSpPr>
-          <p:nvPr>
-            <p:ph idx="1"/>
-          </p:nvPr>
-        </p:nvSpPr>
-        <p:spPr/>
-        <p:txBody>
-          <a:bodyPr>
-            <a:normAutofit fontScale="85000" lnSpcReduction="20000"/>
-          </a:bodyPr>
-          <a:lstStyle/>
-          <a:p>
-            <a:r>
-              <a:rPr lang="pt-BR" sz="2600" dirty="0"/>
-              <a:t>Introdução;</a:t>
-            </a:r>
-          </a:p>
-          <a:p>
-            <a:r>
-              <a:rPr lang="pt-BR" sz="2600" dirty="0"/>
-              <a:t>Consumo Energético;</a:t>
-            </a:r>
-          </a:p>
-          <a:p>
-            <a:r>
-              <a:rPr lang="pt-BR" sz="2600" dirty="0"/>
-              <a:t>Gestão de Faturas;</a:t>
-            </a:r>
-          </a:p>
-          <a:p>
-            <a:r>
-              <a:rPr lang="pt-BR" sz="2600" dirty="0"/>
-              <a:t>Previsão de Dados;</a:t>
-            </a:r>
-          </a:p>
-          <a:p>
-            <a:r>
-              <a:rPr lang="pt-BR" sz="2600" dirty="0"/>
-              <a:t>Redes Neurais Artificiais;</a:t>
-            </a:r>
-          </a:p>
-          <a:p>
-            <a:r>
-              <a:rPr lang="pt-BR" sz="2600" dirty="0"/>
-              <a:t>Metodologia;</a:t>
-            </a:r>
-          </a:p>
-          <a:p>
-            <a:r>
-              <a:rPr lang="pt-BR" sz="2600" dirty="0"/>
-              <a:t>Resultados;</a:t>
-            </a:r>
-          </a:p>
-          <a:p>
-            <a:r>
-              <a:rPr lang="pt-BR" sz="2600" dirty="0"/>
-              <a:t>Conclusões.</a:t>
-            </a:r>
-          </a:p>
-          <a:p>
-            <a:endParaRPr lang="pt-BR" dirty="0"/>
-          </a:p>
-        </p:txBody>
-      </p:sp>
-      <p:sp>
-        <p:nvSpPr>
-          <p:cNvPr id="6" name="Espaço Reservado para Número de Slide 5">
-            <a:extLst>
-              <a:ext uri="{FF2B5EF4-FFF2-40B4-BE49-F238E27FC236}">
-                <a16:creationId xmlns:a16="http://schemas.microsoft.com/office/drawing/2014/main" id="{A5545136-9C6F-49EA-A1A8-596EA8B2F23E}"/>
-              </a:ext>
-            </a:extLst>
-          </p:cNvPr>
-          <p:cNvSpPr>
-            <a:spLocks noGrp="1"/>
-          </p:cNvSpPr>
-          <p:nvPr>
-            <p:ph type="sldNum" sz="quarter" idx="12"/>
-          </p:nvPr>
-        </p:nvSpPr>
-        <p:spPr/>
-        <p:txBody>
-          <a:bodyPr/>
-          <a:lstStyle/>
-          <a:p>
-            <a:pPr rtl="0"/>
-            <a:fld id="{3A98EE3D-8CD1-4C3F-BD1C-C98C9596463C}" type="slidenum">
-              <a:rPr lang="en-US" smtClean="0"/>
-              <a:t>2</a:t>
-            </a:fld>
-            <a:r>
-              <a:rPr lang="en-US" dirty="0"/>
-              <a:t> / 29</a:t>
-            </a:r>
-          </a:p>
-        </p:txBody>
-      </p:sp>
-      <p:sp>
-        <p:nvSpPr>
-          <p:cNvPr id="4" name="Espaço Reservado para Rodapé 3">
-            <a:extLst>
-              <a:ext uri="{FF2B5EF4-FFF2-40B4-BE49-F238E27FC236}">
-                <a16:creationId xmlns:a16="http://schemas.microsoft.com/office/drawing/2014/main" id="{C556F221-032C-439E-A5D2-D7AAA67DCF9F}"/>
-              </a:ext>
-            </a:extLst>
-          </p:cNvPr>
-          <p:cNvSpPr>
-            <a:spLocks noGrp="1"/>
-          </p:cNvSpPr>
-          <p:nvPr>
-            <p:ph type="ftr" sz="quarter" idx="11"/>
-          </p:nvPr>
-        </p:nvSpPr>
-        <p:spPr/>
-        <p:txBody>
-          <a:bodyPr/>
-          <a:lstStyle/>
-          <a:p>
-            <a:r>
-              <a:rPr lang="en-US" dirty="0"/>
-              <a:t>SUMÁRIO – </a:t>
-            </a:r>
-            <a:r>
-              <a:rPr lang="en-US" dirty="0" err="1"/>
-              <a:t>trabalho</a:t>
-            </a:r>
-            <a:r>
-              <a:rPr lang="en-US" dirty="0"/>
-              <a:t> de </a:t>
-            </a:r>
-            <a:r>
-              <a:rPr lang="en-US" dirty="0" err="1"/>
-              <a:t>conclusão</a:t>
-            </a:r>
-            <a:r>
-              <a:rPr lang="en-US" dirty="0"/>
-              <a:t> de </a:t>
-            </a:r>
-            <a:r>
-              <a:rPr lang="en-US" dirty="0" err="1"/>
-              <a:t>curso</a:t>
-            </a:r>
-            <a:r>
-              <a:rPr lang="en-US" dirty="0"/>
-              <a:t> – Evandro </a:t>
-            </a:r>
-            <a:r>
-              <a:rPr lang="en-US" dirty="0" err="1"/>
-              <a:t>coelho</a:t>
-            </a:r>
-            <a:endParaRPr lang="en-US" dirty="0"/>
-          </a:p>
-        </p:txBody>
-      </p:sp>
-    </p:spTree>
-    <p:extLst>
-      <p:ext uri="{BB962C8B-B14F-4D97-AF65-F5344CB8AC3E}">
-        <p14:creationId xmlns:p14="http://schemas.microsoft.com/office/powerpoint/2010/main" val="3720162711"/>
-      </p:ext>
-    </p:extLst>
-  </p:cSld>
-  <p:clrMapOvr>
-    <a:masterClrMapping/>
-  </p:clrMapOvr>
-</p:sld>
-</file>
-
-<file path=ppt/slides/slide20.xml><?xml version="1.0" encoding="utf-8"?>
-<p:sld xmlns:a="http://schemas.openxmlformats.org/drawingml/2006/main" xmlns:r="http://schemas.openxmlformats.org/officeDocument/2006/relationships" xmlns:p="http://schemas.openxmlformats.org/presentationml/2006/main">
-  <p:cSld>
-    <p:spTree>
-      <p:nvGrpSpPr>
-        <p:cNvPr id="1" name=""/>
-        <p:cNvGrpSpPr/>
-        <p:nvPr/>
-      </p:nvGrpSpPr>
-      <p:grpSpPr>
-        <a:xfrm>
-          <a:off x="0" y="0"/>
-          <a:ext cx="0" cy="0"/>
-          <a:chOff x="0" y="0"/>
-          <a:chExt cx="0" cy="0"/>
-        </a:xfrm>
-      </p:grpSpPr>
-      <p:sp>
-        <p:nvSpPr>
-          <p:cNvPr id="2" name="Título 1">
-            <a:extLst>
-              <a:ext uri="{FF2B5EF4-FFF2-40B4-BE49-F238E27FC236}">
-                <a16:creationId xmlns:a16="http://schemas.microsoft.com/office/drawing/2014/main" id="{9D872C6C-3E07-4AC6-B68D-9AFE69A9DDB5}"/>
-              </a:ext>
-            </a:extLst>
-          </p:cNvPr>
-          <p:cNvSpPr>
-            <a:spLocks noGrp="1"/>
-          </p:cNvSpPr>
-          <p:nvPr>
-            <p:ph type="title"/>
-          </p:nvPr>
-        </p:nvSpPr>
-        <p:spPr/>
-        <p:txBody>
-          <a:bodyPr/>
-          <a:lstStyle/>
-          <a:p>
-            <a:r>
-              <a:rPr lang="pt-BR" dirty="0"/>
-              <a:t>Treino (validação cruzada)</a:t>
-            </a:r>
-          </a:p>
-        </p:txBody>
-      </p:sp>
-      <p:sp>
-        <p:nvSpPr>
-          <p:cNvPr id="6" name="Espaço Reservado para Número de Slide 5">
-            <a:extLst>
-              <a:ext uri="{FF2B5EF4-FFF2-40B4-BE49-F238E27FC236}">
-                <a16:creationId xmlns:a16="http://schemas.microsoft.com/office/drawing/2014/main" id="{A5545136-9C6F-49EA-A1A8-596EA8B2F23E}"/>
-              </a:ext>
-            </a:extLst>
-          </p:cNvPr>
-          <p:cNvSpPr>
-            <a:spLocks noGrp="1"/>
-          </p:cNvSpPr>
-          <p:nvPr>
-            <p:ph type="sldNum" sz="quarter" idx="12"/>
-          </p:nvPr>
-        </p:nvSpPr>
-        <p:spPr/>
-        <p:txBody>
-          <a:bodyPr/>
-          <a:lstStyle/>
-          <a:p>
-            <a:pPr rtl="0"/>
-            <a:fld id="{3A98EE3D-8CD1-4C3F-BD1C-C98C9596463C}" type="slidenum">
-              <a:rPr lang="en-US" smtClean="0"/>
-              <a:t>20</a:t>
             </a:fld>
             <a:r>
               <a:rPr lang="en-US" dirty="0"/>
@@ -16324,7 +15646,7 @@
 </p:sld>
 </file>
 
-<file path=ppt/slides/slide21.xml><?xml version="1.0" encoding="utf-8"?>
+<file path=ppt/slides/slide19.xml><?xml version="1.0" encoding="utf-8"?>
 <p:sld xmlns:a="http://schemas.openxmlformats.org/drawingml/2006/main" xmlns:r="http://schemas.openxmlformats.org/officeDocument/2006/relationships" xmlns:p="http://schemas.openxmlformats.org/presentationml/2006/main">
   <p:cSld>
     <p:spTree>
@@ -16428,7 +15750,7 @@
             <a:pPr rtl="0"/>
             <a:fld id="{3A98EE3D-8CD1-4C3F-BD1C-C98C9596463C}" type="slidenum">
               <a:rPr lang="en-US" smtClean="0"/>
-              <a:t>21</a:t>
+              <a:t>19</a:t>
             </a:fld>
             <a:r>
               <a:rPr lang="en-US" dirty="0"/>
@@ -16946,6 +16268,516 @@
 </p:sld>
 </file>
 
+<file path=ppt/slides/slide2.xml><?xml version="1.0" encoding="utf-8"?>
+<p:sld xmlns:a="http://schemas.openxmlformats.org/drawingml/2006/main" xmlns:r="http://schemas.openxmlformats.org/officeDocument/2006/relationships" xmlns:p="http://schemas.openxmlformats.org/presentationml/2006/main">
+  <p:cSld>
+    <p:spTree>
+      <p:nvGrpSpPr>
+        <p:cNvPr id="1" name=""/>
+        <p:cNvGrpSpPr/>
+        <p:nvPr/>
+      </p:nvGrpSpPr>
+      <p:grpSpPr>
+        <a:xfrm>
+          <a:off x="0" y="0"/>
+          <a:ext cx="0" cy="0"/>
+          <a:chOff x="0" y="0"/>
+          <a:chExt cx="0" cy="0"/>
+        </a:xfrm>
+      </p:grpSpPr>
+      <p:sp>
+        <p:nvSpPr>
+          <p:cNvPr id="2" name="Título 1">
+            <a:extLst>
+              <a:ext uri="{FF2B5EF4-FFF2-40B4-BE49-F238E27FC236}">
+                <a16:creationId xmlns:a16="http://schemas.microsoft.com/office/drawing/2014/main" id="{9D872C6C-3E07-4AC6-B68D-9AFE69A9DDB5}"/>
+              </a:ext>
+            </a:extLst>
+          </p:cNvPr>
+          <p:cNvSpPr>
+            <a:spLocks noGrp="1"/>
+          </p:cNvSpPr>
+          <p:nvPr>
+            <p:ph type="title"/>
+          </p:nvPr>
+        </p:nvSpPr>
+        <p:spPr/>
+        <p:txBody>
+          <a:bodyPr/>
+          <a:lstStyle/>
+          <a:p>
+            <a:r>
+              <a:rPr lang="pt-BR" dirty="0"/>
+              <a:t>SUMÁRIO</a:t>
+            </a:r>
+          </a:p>
+        </p:txBody>
+      </p:sp>
+      <p:sp>
+        <p:nvSpPr>
+          <p:cNvPr id="3" name="Espaço Reservado para Conteúdo 2">
+            <a:extLst>
+              <a:ext uri="{FF2B5EF4-FFF2-40B4-BE49-F238E27FC236}">
+                <a16:creationId xmlns:a16="http://schemas.microsoft.com/office/drawing/2014/main" id="{E1647ED6-C6B8-46F3-976C-6B7EECBA62C5}"/>
+              </a:ext>
+            </a:extLst>
+          </p:cNvPr>
+          <p:cNvSpPr>
+            <a:spLocks noGrp="1"/>
+          </p:cNvSpPr>
+          <p:nvPr>
+            <p:ph idx="1"/>
+          </p:nvPr>
+        </p:nvSpPr>
+        <p:spPr/>
+        <p:txBody>
+          <a:bodyPr>
+            <a:normAutofit fontScale="92500" lnSpcReduction="10000"/>
+          </a:bodyPr>
+          <a:lstStyle/>
+          <a:p>
+            <a:r>
+              <a:rPr lang="pt-BR" sz="2600" dirty="0"/>
+              <a:t>Introdução;</a:t>
+            </a:r>
+          </a:p>
+          <a:p>
+            <a:r>
+              <a:rPr lang="pt-BR" sz="2600" dirty="0"/>
+              <a:t>O Problema Proposto;</a:t>
+            </a:r>
+          </a:p>
+          <a:p>
+            <a:r>
+              <a:rPr lang="pt-BR" sz="2600" dirty="0"/>
+              <a:t>Objetivos;</a:t>
+            </a:r>
+          </a:p>
+          <a:p>
+            <a:r>
+              <a:rPr lang="pt-BR" sz="2600" dirty="0"/>
+              <a:t>Coleta de Dados;</a:t>
+            </a:r>
+          </a:p>
+          <a:p>
+            <a:r>
+              <a:rPr lang="pt-BR" sz="2600" dirty="0"/>
+              <a:t>Processamento de Dados;</a:t>
+            </a:r>
+          </a:p>
+          <a:p>
+            <a:r>
+              <a:rPr lang="pt-BR" sz="2600" dirty="0"/>
+              <a:t>Modelos;</a:t>
+            </a:r>
+          </a:p>
+          <a:p>
+            <a:r>
+              <a:rPr lang="pt-BR" sz="2600" dirty="0"/>
+              <a:t>Resultados.</a:t>
+            </a:r>
+          </a:p>
+        </p:txBody>
+      </p:sp>
+      <p:sp>
+        <p:nvSpPr>
+          <p:cNvPr id="6" name="Espaço Reservado para Número de Slide 5">
+            <a:extLst>
+              <a:ext uri="{FF2B5EF4-FFF2-40B4-BE49-F238E27FC236}">
+                <a16:creationId xmlns:a16="http://schemas.microsoft.com/office/drawing/2014/main" id="{A5545136-9C6F-49EA-A1A8-596EA8B2F23E}"/>
+              </a:ext>
+            </a:extLst>
+          </p:cNvPr>
+          <p:cNvSpPr>
+            <a:spLocks noGrp="1"/>
+          </p:cNvSpPr>
+          <p:nvPr>
+            <p:ph type="sldNum" sz="quarter" idx="12"/>
+          </p:nvPr>
+        </p:nvSpPr>
+        <p:spPr/>
+        <p:txBody>
+          <a:bodyPr/>
+          <a:lstStyle/>
+          <a:p>
+            <a:pPr rtl="0"/>
+            <a:fld id="{3A98EE3D-8CD1-4C3F-BD1C-C98C9596463C}" type="slidenum">
+              <a:rPr lang="en-US" smtClean="0"/>
+              <a:t>2</a:t>
+            </a:fld>
+            <a:r>
+              <a:rPr lang="en-US" dirty="0"/>
+              <a:t> / 29</a:t>
+            </a:r>
+          </a:p>
+        </p:txBody>
+      </p:sp>
+      <p:sp>
+        <p:nvSpPr>
+          <p:cNvPr id="4" name="Espaço Reservado para Rodapé 3">
+            <a:extLst>
+              <a:ext uri="{FF2B5EF4-FFF2-40B4-BE49-F238E27FC236}">
+                <a16:creationId xmlns:a16="http://schemas.microsoft.com/office/drawing/2014/main" id="{C556F221-032C-439E-A5D2-D7AAA67DCF9F}"/>
+              </a:ext>
+            </a:extLst>
+          </p:cNvPr>
+          <p:cNvSpPr>
+            <a:spLocks noGrp="1"/>
+          </p:cNvSpPr>
+          <p:nvPr>
+            <p:ph type="ftr" sz="quarter" idx="11"/>
+          </p:nvPr>
+        </p:nvSpPr>
+        <p:spPr/>
+        <p:txBody>
+          <a:bodyPr/>
+          <a:lstStyle/>
+          <a:p>
+            <a:r>
+              <a:rPr lang="en-US" dirty="0"/>
+              <a:t>SUMÁRIO – </a:t>
+            </a:r>
+            <a:r>
+              <a:rPr lang="en-US" dirty="0" err="1"/>
+              <a:t>trabalho</a:t>
+            </a:r>
+            <a:r>
+              <a:rPr lang="en-US" dirty="0"/>
+              <a:t> de </a:t>
+            </a:r>
+            <a:r>
+              <a:rPr lang="en-US" dirty="0" err="1"/>
+              <a:t>conclusão</a:t>
+            </a:r>
+            <a:r>
+              <a:rPr lang="en-US" dirty="0"/>
+              <a:t> de </a:t>
+            </a:r>
+            <a:r>
+              <a:rPr lang="en-US" dirty="0" err="1"/>
+              <a:t>curso</a:t>
+            </a:r>
+            <a:r>
+              <a:rPr lang="en-US" dirty="0"/>
+              <a:t> – Evandro </a:t>
+            </a:r>
+            <a:r>
+              <a:rPr lang="en-US" dirty="0" err="1"/>
+              <a:t>coelho</a:t>
+            </a:r>
+            <a:endParaRPr lang="en-US" dirty="0"/>
+          </a:p>
+        </p:txBody>
+      </p:sp>
+    </p:spTree>
+    <p:extLst>
+      <p:ext uri="{BB962C8B-B14F-4D97-AF65-F5344CB8AC3E}">
+        <p14:creationId xmlns:p14="http://schemas.microsoft.com/office/powerpoint/2010/main" val="3720162711"/>
+      </p:ext>
+    </p:extLst>
+  </p:cSld>
+  <p:clrMapOvr>
+    <a:masterClrMapping/>
+  </p:clrMapOvr>
+</p:sld>
+</file>
+
+<file path=ppt/slides/slide20.xml><?xml version="1.0" encoding="utf-8"?>
+<p:sld xmlns:a="http://schemas.openxmlformats.org/drawingml/2006/main" xmlns:r="http://schemas.openxmlformats.org/officeDocument/2006/relationships" xmlns:p="http://schemas.openxmlformats.org/presentationml/2006/main">
+  <p:cSld>
+    <p:spTree>
+      <p:nvGrpSpPr>
+        <p:cNvPr id="1" name=""/>
+        <p:cNvGrpSpPr/>
+        <p:nvPr/>
+      </p:nvGrpSpPr>
+      <p:grpSpPr>
+        <a:xfrm>
+          <a:off x="0" y="0"/>
+          <a:ext cx="0" cy="0"/>
+          <a:chOff x="0" y="0"/>
+          <a:chExt cx="0" cy="0"/>
+        </a:xfrm>
+      </p:grpSpPr>
+      <p:sp>
+        <p:nvSpPr>
+          <p:cNvPr id="2" name="Título 1">
+            <a:extLst>
+              <a:ext uri="{FF2B5EF4-FFF2-40B4-BE49-F238E27FC236}">
+                <a16:creationId xmlns:a16="http://schemas.microsoft.com/office/drawing/2014/main" id="{9D872C6C-3E07-4AC6-B68D-9AFE69A9DDB5}"/>
+              </a:ext>
+            </a:extLst>
+          </p:cNvPr>
+          <p:cNvSpPr>
+            <a:spLocks noGrp="1"/>
+          </p:cNvSpPr>
+          <p:nvPr>
+            <p:ph type="title"/>
+          </p:nvPr>
+        </p:nvSpPr>
+        <p:spPr/>
+        <p:txBody>
+          <a:bodyPr/>
+          <a:lstStyle/>
+          <a:p>
+            <a:r>
+              <a:rPr lang="pt-BR" dirty="0"/>
+              <a:t>Treino (validação cruzada)</a:t>
+            </a:r>
+          </a:p>
+        </p:txBody>
+      </p:sp>
+      <p:sp>
+        <p:nvSpPr>
+          <p:cNvPr id="6" name="Espaço Reservado para Número de Slide 5">
+            <a:extLst>
+              <a:ext uri="{FF2B5EF4-FFF2-40B4-BE49-F238E27FC236}">
+                <a16:creationId xmlns:a16="http://schemas.microsoft.com/office/drawing/2014/main" id="{A5545136-9C6F-49EA-A1A8-596EA8B2F23E}"/>
+              </a:ext>
+            </a:extLst>
+          </p:cNvPr>
+          <p:cNvSpPr>
+            <a:spLocks noGrp="1"/>
+          </p:cNvSpPr>
+          <p:nvPr>
+            <p:ph type="sldNum" sz="quarter" idx="12"/>
+          </p:nvPr>
+        </p:nvSpPr>
+        <p:spPr/>
+        <p:txBody>
+          <a:bodyPr/>
+          <a:lstStyle/>
+          <a:p>
+            <a:pPr rtl="0"/>
+            <a:fld id="{3A98EE3D-8CD1-4C3F-BD1C-C98C9596463C}" type="slidenum">
+              <a:rPr lang="en-US" smtClean="0"/>
+              <a:t>20</a:t>
+            </a:fld>
+            <a:r>
+              <a:rPr lang="en-US" dirty="0"/>
+              <a:t> / 29</a:t>
+            </a:r>
+          </a:p>
+        </p:txBody>
+      </p:sp>
+      <p:sp>
+        <p:nvSpPr>
+          <p:cNvPr id="3" name="Espaço Reservado para Rodapé 2">
+            <a:extLst>
+              <a:ext uri="{FF2B5EF4-FFF2-40B4-BE49-F238E27FC236}">
+                <a16:creationId xmlns:a16="http://schemas.microsoft.com/office/drawing/2014/main" id="{037C520E-3BFC-403D-92D8-956C3EB8ABDA}"/>
+              </a:ext>
+            </a:extLst>
+          </p:cNvPr>
+          <p:cNvSpPr>
+            <a:spLocks noGrp="1"/>
+          </p:cNvSpPr>
+          <p:nvPr>
+            <p:ph type="ftr" sz="quarter" idx="11"/>
+          </p:nvPr>
+        </p:nvSpPr>
+        <p:spPr/>
+        <p:txBody>
+          <a:bodyPr/>
+          <a:lstStyle/>
+          <a:p>
+            <a:r>
+              <a:rPr lang="en-US" dirty="0"/>
+              <a:t>METODOLOGIA – </a:t>
+            </a:r>
+            <a:r>
+              <a:rPr lang="en-US" dirty="0" err="1"/>
+              <a:t>trabalho</a:t>
+            </a:r>
+            <a:r>
+              <a:rPr lang="en-US" dirty="0"/>
+              <a:t> de </a:t>
+            </a:r>
+            <a:r>
+              <a:rPr lang="en-US" dirty="0" err="1"/>
+              <a:t>conclusão</a:t>
+            </a:r>
+            <a:r>
+              <a:rPr lang="en-US" dirty="0"/>
+              <a:t> de </a:t>
+            </a:r>
+            <a:r>
+              <a:rPr lang="en-US" dirty="0" err="1"/>
+              <a:t>curso</a:t>
+            </a:r>
+            <a:r>
+              <a:rPr lang="en-US" dirty="0"/>
+              <a:t> – Evandro </a:t>
+            </a:r>
+            <a:r>
+              <a:rPr lang="en-US" dirty="0" err="1"/>
+              <a:t>coelho</a:t>
+            </a:r>
+            <a:endParaRPr lang="en-US" dirty="0"/>
+          </a:p>
+        </p:txBody>
+      </p:sp>
+    </p:spTree>
+    <p:extLst>
+      <p:ext uri="{BB962C8B-B14F-4D97-AF65-F5344CB8AC3E}">
+        <p14:creationId xmlns:p14="http://schemas.microsoft.com/office/powerpoint/2010/main" val="3481449382"/>
+      </p:ext>
+    </p:extLst>
+  </p:cSld>
+  <p:clrMapOvr>
+    <a:masterClrMapping/>
+  </p:clrMapOvr>
+</p:sld>
+</file>
+
+<file path=ppt/slides/slide21.xml><?xml version="1.0" encoding="utf-8"?>
+<p:sld xmlns:a="http://schemas.openxmlformats.org/drawingml/2006/main" xmlns:r="http://schemas.openxmlformats.org/officeDocument/2006/relationships" xmlns:p="http://schemas.openxmlformats.org/presentationml/2006/main">
+  <p:cSld>
+    <p:spTree>
+      <p:nvGrpSpPr>
+        <p:cNvPr id="1" name=""/>
+        <p:cNvGrpSpPr/>
+        <p:nvPr/>
+      </p:nvGrpSpPr>
+      <p:grpSpPr>
+        <a:xfrm>
+          <a:off x="0" y="0"/>
+          <a:ext cx="0" cy="0"/>
+          <a:chOff x="0" y="0"/>
+          <a:chExt cx="0" cy="0"/>
+        </a:xfrm>
+      </p:grpSpPr>
+      <p:sp>
+        <p:nvSpPr>
+          <p:cNvPr id="2" name="Título 1">
+            <a:extLst>
+              <a:ext uri="{FF2B5EF4-FFF2-40B4-BE49-F238E27FC236}">
+                <a16:creationId xmlns:a16="http://schemas.microsoft.com/office/drawing/2014/main" id="{9D872C6C-3E07-4AC6-B68D-9AFE69A9DDB5}"/>
+              </a:ext>
+            </a:extLst>
+          </p:cNvPr>
+          <p:cNvSpPr>
+            <a:spLocks noGrp="1"/>
+          </p:cNvSpPr>
+          <p:nvPr>
+            <p:ph type="title"/>
+          </p:nvPr>
+        </p:nvSpPr>
+        <p:spPr/>
+        <p:txBody>
+          <a:bodyPr/>
+          <a:lstStyle/>
+          <a:p>
+            <a:r>
+              <a:rPr lang="pt-BR" dirty="0"/>
+              <a:t>Treino (validação cruzada)</a:t>
+            </a:r>
+          </a:p>
+        </p:txBody>
+      </p:sp>
+      <p:sp>
+        <p:nvSpPr>
+          <p:cNvPr id="6" name="Espaço Reservado para Número de Slide 5">
+            <a:extLst>
+              <a:ext uri="{FF2B5EF4-FFF2-40B4-BE49-F238E27FC236}">
+                <a16:creationId xmlns:a16="http://schemas.microsoft.com/office/drawing/2014/main" id="{A5545136-9C6F-49EA-A1A8-596EA8B2F23E}"/>
+              </a:ext>
+            </a:extLst>
+          </p:cNvPr>
+          <p:cNvSpPr>
+            <a:spLocks noGrp="1"/>
+          </p:cNvSpPr>
+          <p:nvPr>
+            <p:ph type="sldNum" sz="quarter" idx="12"/>
+          </p:nvPr>
+        </p:nvSpPr>
+        <p:spPr/>
+        <p:txBody>
+          <a:bodyPr/>
+          <a:lstStyle/>
+          <a:p>
+            <a:pPr rtl="0"/>
+            <a:fld id="{3A98EE3D-8CD1-4C3F-BD1C-C98C9596463C}" type="slidenum">
+              <a:rPr lang="en-US" smtClean="0"/>
+              <a:t>21</a:t>
+            </a:fld>
+            <a:r>
+              <a:rPr lang="en-US" dirty="0"/>
+              <a:t> / 29</a:t>
+            </a:r>
+          </a:p>
+        </p:txBody>
+      </p:sp>
+      <p:sp>
+        <p:nvSpPr>
+          <p:cNvPr id="3" name="Espaço Reservado para Rodapé 2">
+            <a:extLst>
+              <a:ext uri="{FF2B5EF4-FFF2-40B4-BE49-F238E27FC236}">
+                <a16:creationId xmlns:a16="http://schemas.microsoft.com/office/drawing/2014/main" id="{037C520E-3BFC-403D-92D8-956C3EB8ABDA}"/>
+              </a:ext>
+            </a:extLst>
+          </p:cNvPr>
+          <p:cNvSpPr>
+            <a:spLocks noGrp="1"/>
+          </p:cNvSpPr>
+          <p:nvPr>
+            <p:ph type="ftr" sz="quarter" idx="11"/>
+          </p:nvPr>
+        </p:nvSpPr>
+        <p:spPr/>
+        <p:txBody>
+          <a:bodyPr/>
+          <a:lstStyle/>
+          <a:p>
+            <a:r>
+              <a:rPr lang="en-US" dirty="0"/>
+              <a:t>METODOLOGIA – </a:t>
+            </a:r>
+            <a:r>
+              <a:rPr lang="en-US" dirty="0" err="1"/>
+              <a:t>trabalho</a:t>
+            </a:r>
+            <a:r>
+              <a:rPr lang="en-US" dirty="0"/>
+              <a:t> de </a:t>
+            </a:r>
+            <a:r>
+              <a:rPr lang="en-US" dirty="0" err="1"/>
+              <a:t>conclusão</a:t>
+            </a:r>
+            <a:r>
+              <a:rPr lang="en-US" dirty="0"/>
+              <a:t> de </a:t>
+            </a:r>
+            <a:r>
+              <a:rPr lang="en-US" dirty="0" err="1"/>
+              <a:t>curso</a:t>
+            </a:r>
+            <a:r>
+              <a:rPr lang="en-US" dirty="0"/>
+              <a:t> – Evandro </a:t>
+            </a:r>
+            <a:r>
+              <a:rPr lang="en-US" dirty="0" err="1"/>
+              <a:t>coelho</a:t>
+            </a:r>
+            <a:endParaRPr lang="en-US" dirty="0"/>
+          </a:p>
+        </p:txBody>
+      </p:sp>
+    </p:spTree>
+    <p:extLst>
+      <p:ext uri="{BB962C8B-B14F-4D97-AF65-F5344CB8AC3E}">
+        <p14:creationId xmlns:p14="http://schemas.microsoft.com/office/powerpoint/2010/main" val="3748601769"/>
+      </p:ext>
+    </p:extLst>
+  </p:cSld>
+  <p:clrMapOvr>
+    <a:masterClrMapping/>
+  </p:clrMapOvr>
+</p:sld>
+</file>
+
 <file path=ppt/slides/slide22.xml><?xml version="1.0" encoding="utf-8"?>
 <p:sld xmlns:a="http://schemas.openxmlformats.org/drawingml/2006/main" xmlns:r="http://schemas.openxmlformats.org/officeDocument/2006/relationships" xmlns:p="http://schemas.openxmlformats.org/presentationml/2006/main">
   <p:cSld>
@@ -17024,431 +16856,6 @@
           </a:p>
         </p:txBody>
       </p:sp>
-      <p:pic>
-        <p:nvPicPr>
-          <p:cNvPr id="8" name="Imagem 7">
-            <a:extLst>
-              <a:ext uri="{FF2B5EF4-FFF2-40B4-BE49-F238E27FC236}">
-                <a16:creationId xmlns:a16="http://schemas.microsoft.com/office/drawing/2014/main" id="{76CBBAF2-08EC-4CC8-8267-56FC8DA9F35D}"/>
-              </a:ext>
-            </a:extLst>
-          </p:cNvPr>
-          <p:cNvPicPr>
-            <a:picLocks noChangeAspect="1"/>
-          </p:cNvPicPr>
-          <p:nvPr/>
-        </p:nvPicPr>
-        <p:blipFill>
-          <a:blip r:embed="rId2"/>
-          <a:stretch>
-            <a:fillRect/>
-          </a:stretch>
-        </p:blipFill>
-        <p:spPr>
-          <a:xfrm>
-            <a:off x="2389452" y="1890876"/>
-            <a:ext cx="7021247" cy="4533038"/>
-          </a:xfrm>
-          <a:prstGeom prst="rect">
-            <a:avLst/>
-          </a:prstGeom>
-        </p:spPr>
-      </p:pic>
-      <p:sp>
-        <p:nvSpPr>
-          <p:cNvPr id="3" name="Espaço Reservado para Rodapé 2">
-            <a:extLst>
-              <a:ext uri="{FF2B5EF4-FFF2-40B4-BE49-F238E27FC236}">
-                <a16:creationId xmlns:a16="http://schemas.microsoft.com/office/drawing/2014/main" id="{037C520E-3BFC-403D-92D8-956C3EB8ABDA}"/>
-              </a:ext>
-            </a:extLst>
-          </p:cNvPr>
-          <p:cNvSpPr>
-            <a:spLocks noGrp="1"/>
-          </p:cNvSpPr>
-          <p:nvPr>
-            <p:ph type="ftr" sz="quarter" idx="11"/>
-          </p:nvPr>
-        </p:nvSpPr>
-        <p:spPr/>
-        <p:txBody>
-          <a:bodyPr/>
-          <a:lstStyle/>
-          <a:p>
-            <a:r>
-              <a:rPr lang="en-US" dirty="0"/>
-              <a:t>METODOLOGIA – </a:t>
-            </a:r>
-            <a:r>
-              <a:rPr lang="en-US" dirty="0" err="1"/>
-              <a:t>trabalho</a:t>
-            </a:r>
-            <a:r>
-              <a:rPr lang="en-US" dirty="0"/>
-              <a:t> de </a:t>
-            </a:r>
-            <a:r>
-              <a:rPr lang="en-US" dirty="0" err="1"/>
-              <a:t>conclusão</a:t>
-            </a:r>
-            <a:r>
-              <a:rPr lang="en-US" dirty="0"/>
-              <a:t> de </a:t>
-            </a:r>
-            <a:r>
-              <a:rPr lang="en-US" dirty="0" err="1"/>
-              <a:t>curso</a:t>
-            </a:r>
-            <a:r>
-              <a:rPr lang="en-US" dirty="0"/>
-              <a:t> – Evandro </a:t>
-            </a:r>
-            <a:r>
-              <a:rPr lang="en-US" dirty="0" err="1"/>
-              <a:t>coelho</a:t>
-            </a:r>
-            <a:endParaRPr lang="en-US" dirty="0"/>
-          </a:p>
-        </p:txBody>
-      </p:sp>
-    </p:spTree>
-    <p:extLst>
-      <p:ext uri="{BB962C8B-B14F-4D97-AF65-F5344CB8AC3E}">
-        <p14:creationId xmlns:p14="http://schemas.microsoft.com/office/powerpoint/2010/main" val="3481449382"/>
-      </p:ext>
-    </p:extLst>
-  </p:cSld>
-  <p:clrMapOvr>
-    <a:masterClrMapping/>
-  </p:clrMapOvr>
-</p:sld>
-</file>
-
-<file path=ppt/slides/slide23.xml><?xml version="1.0" encoding="utf-8"?>
-<p:sld xmlns:a="http://schemas.openxmlformats.org/drawingml/2006/main" xmlns:r="http://schemas.openxmlformats.org/officeDocument/2006/relationships" xmlns:p="http://schemas.openxmlformats.org/presentationml/2006/main">
-  <p:cSld>
-    <p:spTree>
-      <p:nvGrpSpPr>
-        <p:cNvPr id="1" name=""/>
-        <p:cNvGrpSpPr/>
-        <p:nvPr/>
-      </p:nvGrpSpPr>
-      <p:grpSpPr>
-        <a:xfrm>
-          <a:off x="0" y="0"/>
-          <a:ext cx="0" cy="0"/>
-          <a:chOff x="0" y="0"/>
-          <a:chExt cx="0" cy="0"/>
-        </a:xfrm>
-      </p:grpSpPr>
-      <p:sp>
-        <p:nvSpPr>
-          <p:cNvPr id="2" name="Título 1">
-            <a:extLst>
-              <a:ext uri="{FF2B5EF4-FFF2-40B4-BE49-F238E27FC236}">
-                <a16:creationId xmlns:a16="http://schemas.microsoft.com/office/drawing/2014/main" id="{9D872C6C-3E07-4AC6-B68D-9AFE69A9DDB5}"/>
-              </a:ext>
-            </a:extLst>
-          </p:cNvPr>
-          <p:cNvSpPr>
-            <a:spLocks noGrp="1"/>
-          </p:cNvSpPr>
-          <p:nvPr>
-            <p:ph type="title"/>
-          </p:nvPr>
-        </p:nvSpPr>
-        <p:spPr/>
-        <p:txBody>
-          <a:bodyPr/>
-          <a:lstStyle/>
-          <a:p>
-            <a:r>
-              <a:rPr lang="pt-BR" dirty="0"/>
-              <a:t>Treino (validação cruzada)</a:t>
-            </a:r>
-          </a:p>
-        </p:txBody>
-      </p:sp>
-      <p:sp>
-        <p:nvSpPr>
-          <p:cNvPr id="6" name="Espaço Reservado para Número de Slide 5">
-            <a:extLst>
-              <a:ext uri="{FF2B5EF4-FFF2-40B4-BE49-F238E27FC236}">
-                <a16:creationId xmlns:a16="http://schemas.microsoft.com/office/drawing/2014/main" id="{A5545136-9C6F-49EA-A1A8-596EA8B2F23E}"/>
-              </a:ext>
-            </a:extLst>
-          </p:cNvPr>
-          <p:cNvSpPr>
-            <a:spLocks noGrp="1"/>
-          </p:cNvSpPr>
-          <p:nvPr>
-            <p:ph type="sldNum" sz="quarter" idx="12"/>
-          </p:nvPr>
-        </p:nvSpPr>
-        <p:spPr/>
-        <p:txBody>
-          <a:bodyPr/>
-          <a:lstStyle/>
-          <a:p>
-            <a:pPr rtl="0"/>
-            <a:fld id="{3A98EE3D-8CD1-4C3F-BD1C-C98C9596463C}" type="slidenum">
-              <a:rPr lang="en-US" smtClean="0"/>
-              <a:t>23</a:t>
-            </a:fld>
-            <a:r>
-              <a:rPr lang="en-US" dirty="0"/>
-              <a:t> / 29</a:t>
-            </a:r>
-          </a:p>
-        </p:txBody>
-      </p:sp>
-      <p:pic>
-        <p:nvPicPr>
-          <p:cNvPr id="4" name="Imagem 3">
-            <a:extLst>
-              <a:ext uri="{FF2B5EF4-FFF2-40B4-BE49-F238E27FC236}">
-                <a16:creationId xmlns:a16="http://schemas.microsoft.com/office/drawing/2014/main" id="{574EEE2B-F426-41C7-B8A5-A209EDCCD2E6}"/>
-              </a:ext>
-            </a:extLst>
-          </p:cNvPr>
-          <p:cNvPicPr>
-            <a:picLocks noChangeAspect="1"/>
-          </p:cNvPicPr>
-          <p:nvPr/>
-        </p:nvPicPr>
-        <p:blipFill>
-          <a:blip r:embed="rId2"/>
-          <a:stretch>
-            <a:fillRect/>
-          </a:stretch>
-        </p:blipFill>
-        <p:spPr>
-          <a:xfrm>
-            <a:off x="4662570" y="1890876"/>
-            <a:ext cx="7529430" cy="4559769"/>
-          </a:xfrm>
-          <a:prstGeom prst="rect">
-            <a:avLst/>
-          </a:prstGeom>
-        </p:spPr>
-      </p:pic>
-      <p:pic>
-        <p:nvPicPr>
-          <p:cNvPr id="8" name="Imagem 7">
-            <a:extLst>
-              <a:ext uri="{FF2B5EF4-FFF2-40B4-BE49-F238E27FC236}">
-                <a16:creationId xmlns:a16="http://schemas.microsoft.com/office/drawing/2014/main" id="{76CBBAF2-08EC-4CC8-8267-56FC8DA9F35D}"/>
-              </a:ext>
-            </a:extLst>
-          </p:cNvPr>
-          <p:cNvPicPr>
-            <a:picLocks noChangeAspect="1"/>
-          </p:cNvPicPr>
-          <p:nvPr/>
-        </p:nvPicPr>
-        <p:blipFill>
-          <a:blip r:embed="rId3"/>
-          <a:stretch>
-            <a:fillRect/>
-          </a:stretch>
-        </p:blipFill>
-        <p:spPr>
-          <a:xfrm>
-            <a:off x="246659" y="2447926"/>
-            <a:ext cx="4588281" cy="2962274"/>
-          </a:xfrm>
-          <a:prstGeom prst="rect">
-            <a:avLst/>
-          </a:prstGeom>
-        </p:spPr>
-      </p:pic>
-      <p:sp>
-        <p:nvSpPr>
-          <p:cNvPr id="3" name="Espaço Reservado para Rodapé 2">
-            <a:extLst>
-              <a:ext uri="{FF2B5EF4-FFF2-40B4-BE49-F238E27FC236}">
-                <a16:creationId xmlns:a16="http://schemas.microsoft.com/office/drawing/2014/main" id="{037C520E-3BFC-403D-92D8-956C3EB8ABDA}"/>
-              </a:ext>
-            </a:extLst>
-          </p:cNvPr>
-          <p:cNvSpPr>
-            <a:spLocks noGrp="1"/>
-          </p:cNvSpPr>
-          <p:nvPr>
-            <p:ph type="ftr" sz="quarter" idx="11"/>
-          </p:nvPr>
-        </p:nvSpPr>
-        <p:spPr/>
-        <p:txBody>
-          <a:bodyPr/>
-          <a:lstStyle/>
-          <a:p>
-            <a:r>
-              <a:rPr lang="en-US" dirty="0"/>
-              <a:t>METODOLOGIA – </a:t>
-            </a:r>
-            <a:r>
-              <a:rPr lang="en-US" dirty="0" err="1"/>
-              <a:t>trabalho</a:t>
-            </a:r>
-            <a:r>
-              <a:rPr lang="en-US" dirty="0"/>
-              <a:t> de </a:t>
-            </a:r>
-            <a:r>
-              <a:rPr lang="en-US" dirty="0" err="1"/>
-              <a:t>conclusão</a:t>
-            </a:r>
-            <a:r>
-              <a:rPr lang="en-US" dirty="0"/>
-              <a:t> de </a:t>
-            </a:r>
-            <a:r>
-              <a:rPr lang="en-US" dirty="0" err="1"/>
-              <a:t>curso</a:t>
-            </a:r>
-            <a:r>
-              <a:rPr lang="en-US" dirty="0"/>
-              <a:t> – Evandro </a:t>
-            </a:r>
-            <a:r>
-              <a:rPr lang="en-US" dirty="0" err="1"/>
-              <a:t>coelho</a:t>
-            </a:r>
-            <a:endParaRPr lang="en-US" dirty="0"/>
-          </a:p>
-        </p:txBody>
-      </p:sp>
-    </p:spTree>
-    <p:extLst>
-      <p:ext uri="{BB962C8B-B14F-4D97-AF65-F5344CB8AC3E}">
-        <p14:creationId xmlns:p14="http://schemas.microsoft.com/office/powerpoint/2010/main" val="3748601769"/>
-      </p:ext>
-    </p:extLst>
-  </p:cSld>
-  <p:clrMapOvr>
-    <a:masterClrMapping/>
-  </p:clrMapOvr>
-</p:sld>
-</file>
-
-<file path=ppt/slides/slide24.xml><?xml version="1.0" encoding="utf-8"?>
-<p:sld xmlns:a="http://schemas.openxmlformats.org/drawingml/2006/main" xmlns:r="http://schemas.openxmlformats.org/officeDocument/2006/relationships" xmlns:p="http://schemas.openxmlformats.org/presentationml/2006/main">
-  <p:cSld>
-    <p:spTree>
-      <p:nvGrpSpPr>
-        <p:cNvPr id="1" name=""/>
-        <p:cNvGrpSpPr/>
-        <p:nvPr/>
-      </p:nvGrpSpPr>
-      <p:grpSpPr>
-        <a:xfrm>
-          <a:off x="0" y="0"/>
-          <a:ext cx="0" cy="0"/>
-          <a:chOff x="0" y="0"/>
-          <a:chExt cx="0" cy="0"/>
-        </a:xfrm>
-      </p:grpSpPr>
-      <p:sp>
-        <p:nvSpPr>
-          <p:cNvPr id="2" name="Título 1">
-            <a:extLst>
-              <a:ext uri="{FF2B5EF4-FFF2-40B4-BE49-F238E27FC236}">
-                <a16:creationId xmlns:a16="http://schemas.microsoft.com/office/drawing/2014/main" id="{9D872C6C-3E07-4AC6-B68D-9AFE69A9DDB5}"/>
-              </a:ext>
-            </a:extLst>
-          </p:cNvPr>
-          <p:cNvSpPr>
-            <a:spLocks noGrp="1"/>
-          </p:cNvSpPr>
-          <p:nvPr>
-            <p:ph type="title"/>
-          </p:nvPr>
-        </p:nvSpPr>
-        <p:spPr/>
-        <p:txBody>
-          <a:bodyPr/>
-          <a:lstStyle/>
-          <a:p>
-            <a:r>
-              <a:rPr lang="pt-BR" dirty="0"/>
-              <a:t>Treino (validação cruzada)</a:t>
-            </a:r>
-          </a:p>
-        </p:txBody>
-      </p:sp>
-      <p:sp>
-        <p:nvSpPr>
-          <p:cNvPr id="6" name="Espaço Reservado para Número de Slide 5">
-            <a:extLst>
-              <a:ext uri="{FF2B5EF4-FFF2-40B4-BE49-F238E27FC236}">
-                <a16:creationId xmlns:a16="http://schemas.microsoft.com/office/drawing/2014/main" id="{A5545136-9C6F-49EA-A1A8-596EA8B2F23E}"/>
-              </a:ext>
-            </a:extLst>
-          </p:cNvPr>
-          <p:cNvSpPr>
-            <a:spLocks noGrp="1"/>
-          </p:cNvSpPr>
-          <p:nvPr>
-            <p:ph type="sldNum" sz="quarter" idx="12"/>
-          </p:nvPr>
-        </p:nvSpPr>
-        <p:spPr/>
-        <p:txBody>
-          <a:bodyPr/>
-          <a:lstStyle/>
-          <a:p>
-            <a:pPr rtl="0"/>
-            <a:fld id="{3A98EE3D-8CD1-4C3F-BD1C-C98C9596463C}" type="slidenum">
-              <a:rPr lang="en-US" smtClean="0"/>
-              <a:t>24</a:t>
-            </a:fld>
-            <a:r>
-              <a:rPr lang="en-US" dirty="0"/>
-              <a:t> / 29</a:t>
-            </a:r>
-          </a:p>
-        </p:txBody>
-      </p:sp>
-      <p:pic>
-        <p:nvPicPr>
-          <p:cNvPr id="8" name="Imagem 7">
-            <a:extLst>
-              <a:ext uri="{FF2B5EF4-FFF2-40B4-BE49-F238E27FC236}">
-                <a16:creationId xmlns:a16="http://schemas.microsoft.com/office/drawing/2014/main" id="{DDD3FF12-269B-46AB-A2C1-C5F08B33F975}"/>
-              </a:ext>
-            </a:extLst>
-          </p:cNvPr>
-          <p:cNvPicPr/>
-          <p:nvPr/>
-        </p:nvPicPr>
-        <p:blipFill>
-          <a:blip r:embed="rId2" cstate="print">
-            <a:extLst>
-              <a:ext uri="{28A0092B-C50C-407E-A947-70E740481C1C}">
-                <a14:useLocalDpi xmlns:a14="http://schemas.microsoft.com/office/drawing/2010/main" val="0"/>
-              </a:ext>
-            </a:extLst>
-          </a:blip>
-          <a:srcRect/>
-          <a:stretch>
-            <a:fillRect/>
-          </a:stretch>
-        </p:blipFill>
-        <p:spPr bwMode="auto">
-          <a:xfrm>
-            <a:off x="1130081" y="2060542"/>
-            <a:ext cx="9931838" cy="3720498"/>
-          </a:xfrm>
-          <a:prstGeom prst="rect">
-            <a:avLst/>
-          </a:prstGeom>
-          <a:noFill/>
-          <a:ln>
-            <a:noFill/>
-          </a:ln>
-        </p:spPr>
-      </p:pic>
       <p:sp>
         <p:nvSpPr>
           <p:cNvPr id="9" name="CaixaDeTexto 8">
@@ -17583,7 +16990,7 @@
 </p:sld>
 </file>
 
-<file path=ppt/slides/slide25.xml><?xml version="1.0" encoding="utf-8"?>
+<file path=ppt/slides/slide23.xml><?xml version="1.0" encoding="utf-8"?>
 <p:sld xmlns:a="http://schemas.openxmlformats.org/drawingml/2006/main" xmlns:r="http://schemas.openxmlformats.org/officeDocument/2006/relationships" xmlns:p="http://schemas.openxmlformats.org/presentationml/2006/main">
   <p:cSld>
     <p:spTree>
@@ -17810,7 +17217,7 @@
             <a:pPr rtl="0"/>
             <a:fld id="{3A98EE3D-8CD1-4C3F-BD1C-C98C9596463C}" type="slidenum">
               <a:rPr lang="en-US" smtClean="0"/>
-              <a:t>25</a:t>
+              <a:t>23</a:t>
             </a:fld>
             <a:r>
               <a:rPr lang="en-US" dirty="0"/>
@@ -18075,45 +17482,6 @@
           </a:p>
         </p:txBody>
       </p:sp>
-      <p:pic>
-        <p:nvPicPr>
-          <p:cNvPr id="10" name="Imagem 9">
-            <a:extLst>
-              <a:ext uri="{FF2B5EF4-FFF2-40B4-BE49-F238E27FC236}">
-                <a16:creationId xmlns:a16="http://schemas.microsoft.com/office/drawing/2014/main" id="{F2022E1C-4689-4C67-AB38-9CC2A51BC38C}"/>
-              </a:ext>
-            </a:extLst>
-          </p:cNvPr>
-          <p:cNvPicPr/>
-          <p:nvPr/>
-        </p:nvPicPr>
-        <p:blipFill>
-          <a:blip r:embed="rId3" cstate="print">
-            <a:extLst>
-              <a:ext uri="{28A0092B-C50C-407E-A947-70E740481C1C}">
-                <a14:useLocalDpi xmlns:a14="http://schemas.microsoft.com/office/drawing/2010/main" val="0"/>
-              </a:ext>
-            </a:extLst>
-          </a:blip>
-          <a:srcRect/>
-          <a:stretch>
-            <a:fillRect/>
-          </a:stretch>
-        </p:blipFill>
-        <p:spPr bwMode="auto">
-          <a:xfrm>
-            <a:off x="6001267" y="2011630"/>
-            <a:ext cx="5412740" cy="4291529"/>
-          </a:xfrm>
-          <a:prstGeom prst="rect">
-            <a:avLst/>
-          </a:prstGeom>
-          <a:noFill/>
-          <a:ln>
-            <a:noFill/>
-          </a:ln>
-        </p:spPr>
-      </p:pic>
       <p:sp>
         <p:nvSpPr>
           <p:cNvPr id="4" name="Espaço Reservado para Rodapé 3">
@@ -18184,7 +17552,7 @@
 </p:sld>
 </file>
 
-<file path=ppt/slides/slide26.xml><?xml version="1.0" encoding="utf-8"?>
+<file path=ppt/slides/slide24.xml><?xml version="1.0" encoding="utf-8"?>
 <p:sld xmlns:a="http://schemas.openxmlformats.org/drawingml/2006/main" xmlns:r="http://schemas.openxmlformats.org/officeDocument/2006/relationships" xmlns:p="http://schemas.openxmlformats.org/presentationml/2006/main">
   <p:cSld>
     <p:spTree>
@@ -18253,7 +17621,7 @@
             <a:pPr rtl="0"/>
             <a:fld id="{3A98EE3D-8CD1-4C3F-BD1C-C98C9596463C}" type="slidenum">
               <a:rPr lang="en-US" smtClean="0"/>
-              <a:t>26</a:t>
+              <a:t>24</a:t>
             </a:fld>
             <a:r>
               <a:rPr lang="en-US" dirty="0"/>
@@ -18262,45 +17630,6 @@
           </a:p>
         </p:txBody>
       </p:sp>
-      <p:pic>
-        <p:nvPicPr>
-          <p:cNvPr id="8" name="Imagem 7">
-            <a:extLst>
-              <a:ext uri="{FF2B5EF4-FFF2-40B4-BE49-F238E27FC236}">
-                <a16:creationId xmlns:a16="http://schemas.microsoft.com/office/drawing/2014/main" id="{8ACA68FD-126E-462A-8DAE-E755A09DA609}"/>
-              </a:ext>
-            </a:extLst>
-          </p:cNvPr>
-          <p:cNvPicPr/>
-          <p:nvPr/>
-        </p:nvPicPr>
-        <p:blipFill>
-          <a:blip r:embed="rId2" cstate="print">
-            <a:extLst>
-              <a:ext uri="{28A0092B-C50C-407E-A947-70E740481C1C}">
-                <a14:useLocalDpi xmlns:a14="http://schemas.microsoft.com/office/drawing/2010/main" val="0"/>
-              </a:ext>
-            </a:extLst>
-          </a:blip>
-          <a:srcRect/>
-          <a:stretch>
-            <a:fillRect/>
-          </a:stretch>
-        </p:blipFill>
-        <p:spPr bwMode="auto">
-          <a:xfrm>
-            <a:off x="2226310" y="1959073"/>
-            <a:ext cx="7739380" cy="4196771"/>
-          </a:xfrm>
-          <a:prstGeom prst="rect">
-            <a:avLst/>
-          </a:prstGeom>
-          <a:noFill/>
-          <a:ln>
-            <a:noFill/>
-          </a:ln>
-        </p:spPr>
-      </p:pic>
       <p:sp>
         <p:nvSpPr>
           <p:cNvPr id="3" name="Espaço Reservado para Rodapé 2">
@@ -18362,6 +17691,350 @@
     <p:extLst>
       <p:ext uri="{BB962C8B-B14F-4D97-AF65-F5344CB8AC3E}">
         <p14:creationId xmlns:p14="http://schemas.microsoft.com/office/powerpoint/2010/main" val="3521615785"/>
+      </p:ext>
+    </p:extLst>
+  </p:cSld>
+  <p:clrMapOvr>
+    <a:masterClrMapping/>
+  </p:clrMapOvr>
+</p:sld>
+</file>
+
+<file path=ppt/slides/slide25.xml><?xml version="1.0" encoding="utf-8"?>
+<p:sld xmlns:a="http://schemas.openxmlformats.org/drawingml/2006/main" xmlns:r="http://schemas.openxmlformats.org/officeDocument/2006/relationships" xmlns:p="http://schemas.openxmlformats.org/presentationml/2006/main">
+  <p:cSld>
+    <p:spTree>
+      <p:nvGrpSpPr>
+        <p:cNvPr id="1" name=""/>
+        <p:cNvGrpSpPr/>
+        <p:nvPr/>
+      </p:nvGrpSpPr>
+      <p:grpSpPr>
+        <a:xfrm>
+          <a:off x="0" y="0"/>
+          <a:ext cx="0" cy="0"/>
+          <a:chOff x="0" y="0"/>
+          <a:chExt cx="0" cy="0"/>
+        </a:xfrm>
+      </p:grpSpPr>
+      <p:sp>
+        <p:nvSpPr>
+          <p:cNvPr id="2" name="Título 1">
+            <a:extLst>
+              <a:ext uri="{FF2B5EF4-FFF2-40B4-BE49-F238E27FC236}">
+                <a16:creationId xmlns:a16="http://schemas.microsoft.com/office/drawing/2014/main" id="{9D872C6C-3E07-4AC6-B68D-9AFE69A9DDB5}"/>
+              </a:ext>
+            </a:extLst>
+          </p:cNvPr>
+          <p:cNvSpPr>
+            <a:spLocks noGrp="1"/>
+          </p:cNvSpPr>
+          <p:nvPr>
+            <p:ph type="title"/>
+          </p:nvPr>
+        </p:nvSpPr>
+        <p:spPr/>
+        <p:txBody>
+          <a:bodyPr/>
+          <a:lstStyle/>
+          <a:p>
+            <a:r>
+              <a:rPr lang="pt-BR" dirty="0"/>
+              <a:t>Conclusões</a:t>
+            </a:r>
+          </a:p>
+        </p:txBody>
+      </p:sp>
+      <p:sp>
+        <p:nvSpPr>
+          <p:cNvPr id="3" name="Espaço Reservado para Conteúdo 2">
+            <a:extLst>
+              <a:ext uri="{FF2B5EF4-FFF2-40B4-BE49-F238E27FC236}">
+                <a16:creationId xmlns:a16="http://schemas.microsoft.com/office/drawing/2014/main" id="{E1647ED6-C6B8-46F3-976C-6B7EECBA62C5}"/>
+              </a:ext>
+            </a:extLst>
+          </p:cNvPr>
+          <p:cNvSpPr>
+            <a:spLocks noGrp="1"/>
+          </p:cNvSpPr>
+          <p:nvPr>
+            <p:ph idx="1"/>
+          </p:nvPr>
+        </p:nvSpPr>
+        <p:spPr/>
+        <p:txBody>
+          <a:bodyPr>
+            <a:normAutofit/>
+          </a:bodyPr>
+          <a:lstStyle/>
+          <a:p>
+            <a:endParaRPr lang="pt-BR" dirty="0"/>
+          </a:p>
+        </p:txBody>
+      </p:sp>
+      <p:sp>
+        <p:nvSpPr>
+          <p:cNvPr id="6" name="Espaço Reservado para Número de Slide 5">
+            <a:extLst>
+              <a:ext uri="{FF2B5EF4-FFF2-40B4-BE49-F238E27FC236}">
+                <a16:creationId xmlns:a16="http://schemas.microsoft.com/office/drawing/2014/main" id="{A5545136-9C6F-49EA-A1A8-596EA8B2F23E}"/>
+              </a:ext>
+            </a:extLst>
+          </p:cNvPr>
+          <p:cNvSpPr>
+            <a:spLocks noGrp="1"/>
+          </p:cNvSpPr>
+          <p:nvPr>
+            <p:ph type="sldNum" sz="quarter" idx="12"/>
+          </p:nvPr>
+        </p:nvSpPr>
+        <p:spPr/>
+        <p:txBody>
+          <a:bodyPr/>
+          <a:lstStyle/>
+          <a:p>
+            <a:pPr rtl="0"/>
+            <a:fld id="{3A98EE3D-8CD1-4C3F-BD1C-C98C9596463C}" type="slidenum">
+              <a:rPr lang="en-US" smtClean="0"/>
+              <a:t>25</a:t>
+            </a:fld>
+            <a:r>
+              <a:rPr lang="en-US" dirty="0"/>
+              <a:t> / 29</a:t>
+            </a:r>
+          </a:p>
+        </p:txBody>
+      </p:sp>
+      <p:sp>
+        <p:nvSpPr>
+          <p:cNvPr id="4" name="Espaço Reservado para Rodapé 3">
+            <a:extLst>
+              <a:ext uri="{FF2B5EF4-FFF2-40B4-BE49-F238E27FC236}">
+                <a16:creationId xmlns:a16="http://schemas.microsoft.com/office/drawing/2014/main" id="{E66DE0F3-E3AA-49D8-89BE-7B6659EF1551}"/>
+              </a:ext>
+            </a:extLst>
+          </p:cNvPr>
+          <p:cNvSpPr>
+            <a:spLocks noGrp="1"/>
+          </p:cNvSpPr>
+          <p:nvPr>
+            <p:ph type="ftr" sz="quarter" idx="11"/>
+          </p:nvPr>
+        </p:nvSpPr>
+        <p:spPr/>
+        <p:txBody>
+          <a:bodyPr/>
+          <a:lstStyle/>
+          <a:p>
+            <a:r>
+              <a:rPr lang="en-US" dirty="0"/>
+              <a:t>CONCLUSÕES – </a:t>
+            </a:r>
+            <a:r>
+              <a:rPr lang="en-US" dirty="0" err="1"/>
+              <a:t>trabalho</a:t>
+            </a:r>
+            <a:r>
+              <a:rPr lang="en-US" dirty="0"/>
+              <a:t> de </a:t>
+            </a:r>
+            <a:r>
+              <a:rPr lang="en-US" dirty="0" err="1"/>
+              <a:t>conclusão</a:t>
+            </a:r>
+            <a:r>
+              <a:rPr lang="en-US" dirty="0"/>
+              <a:t> de </a:t>
+            </a:r>
+            <a:r>
+              <a:rPr lang="en-US" dirty="0" err="1"/>
+              <a:t>curso</a:t>
+            </a:r>
+            <a:r>
+              <a:rPr lang="en-US" dirty="0"/>
+              <a:t> – Evandro </a:t>
+            </a:r>
+            <a:r>
+              <a:rPr lang="en-US" dirty="0" err="1"/>
+              <a:t>coelho</a:t>
+            </a:r>
+            <a:endParaRPr lang="en-US" dirty="0"/>
+          </a:p>
+        </p:txBody>
+      </p:sp>
+    </p:spTree>
+    <p:extLst>
+      <p:ext uri="{BB962C8B-B14F-4D97-AF65-F5344CB8AC3E}">
+        <p14:creationId xmlns:p14="http://schemas.microsoft.com/office/powerpoint/2010/main" val="992450659"/>
+      </p:ext>
+    </p:extLst>
+  </p:cSld>
+  <p:clrMapOvr>
+    <a:masterClrMapping/>
+  </p:clrMapOvr>
+</p:sld>
+</file>
+
+<file path=ppt/slides/slide26.xml><?xml version="1.0" encoding="utf-8"?>
+<p:sld xmlns:a="http://schemas.openxmlformats.org/drawingml/2006/main" xmlns:r="http://schemas.openxmlformats.org/officeDocument/2006/relationships" xmlns:p="http://schemas.openxmlformats.org/presentationml/2006/main">
+  <p:cSld>
+    <p:spTree>
+      <p:nvGrpSpPr>
+        <p:cNvPr id="1" name=""/>
+        <p:cNvGrpSpPr/>
+        <p:nvPr/>
+      </p:nvGrpSpPr>
+      <p:grpSpPr>
+        <a:xfrm>
+          <a:off x="0" y="0"/>
+          <a:ext cx="0" cy="0"/>
+          <a:chOff x="0" y="0"/>
+          <a:chExt cx="0" cy="0"/>
+        </a:xfrm>
+      </p:grpSpPr>
+      <p:sp>
+        <p:nvSpPr>
+          <p:cNvPr id="2" name="Título 1">
+            <a:extLst>
+              <a:ext uri="{FF2B5EF4-FFF2-40B4-BE49-F238E27FC236}">
+                <a16:creationId xmlns:a16="http://schemas.microsoft.com/office/drawing/2014/main" id="{60304B40-6619-4716-9EBB-9A3A816B52F8}"/>
+              </a:ext>
+            </a:extLst>
+          </p:cNvPr>
+          <p:cNvSpPr>
+            <a:spLocks noGrp="1"/>
+          </p:cNvSpPr>
+          <p:nvPr>
+            <p:ph type="title"/>
+          </p:nvPr>
+        </p:nvSpPr>
+        <p:spPr/>
+        <p:txBody>
+          <a:bodyPr/>
+          <a:lstStyle/>
+          <a:p>
+            <a:r>
+              <a:rPr lang="pt-BR" dirty="0"/>
+              <a:t>Obrigado!</a:t>
+            </a:r>
+          </a:p>
+        </p:txBody>
+      </p:sp>
+      <p:sp>
+        <p:nvSpPr>
+          <p:cNvPr id="3" name="Espaço Reservado para Conteúdo 2">
+            <a:extLst>
+              <a:ext uri="{FF2B5EF4-FFF2-40B4-BE49-F238E27FC236}">
+                <a16:creationId xmlns:a16="http://schemas.microsoft.com/office/drawing/2014/main" id="{8093754E-D7A2-4D94-84FD-F7ADB980EB2A}"/>
+              </a:ext>
+            </a:extLst>
+          </p:cNvPr>
+          <p:cNvSpPr>
+            <a:spLocks noGrp="1"/>
+          </p:cNvSpPr>
+          <p:nvPr>
+            <p:ph idx="1"/>
+          </p:nvPr>
+        </p:nvSpPr>
+        <p:spPr/>
+        <p:txBody>
+          <a:bodyPr>
+            <a:normAutofit/>
+          </a:bodyPr>
+          <a:lstStyle/>
+          <a:p>
+            <a:pPr marL="0" indent="0" algn="ctr">
+              <a:buNone/>
+            </a:pPr>
+            <a:r>
+              <a:rPr lang="pt-BR" sz="2400" b="1" dirty="0"/>
+              <a:t>Evandro Ribeiro Gomes Coelho</a:t>
+            </a:r>
+          </a:p>
+          <a:p>
+            <a:pPr marL="0" indent="0">
+              <a:buNone/>
+            </a:pPr>
+            <a:endParaRPr lang="pt-BR" sz="2400" dirty="0"/>
+          </a:p>
+          <a:p>
+            <a:pPr marL="0" indent="0">
+              <a:buNone/>
+            </a:pPr>
+            <a:r>
+              <a:rPr lang="pt-BR" sz="2400" dirty="0"/>
+              <a:t>Contato: </a:t>
+            </a:r>
+          </a:p>
+          <a:p>
+            <a:r>
+              <a:rPr lang="pt-BR" sz="2000" dirty="0"/>
+              <a:t>https://</a:t>
+            </a:r>
+            <a:r>
+              <a:rPr lang="pt-BR" sz="2000" dirty="0" err="1"/>
+              <a:t>www.linkedin.com</a:t>
+            </a:r>
+            <a:r>
+              <a:rPr lang="pt-BR" sz="2000" dirty="0"/>
+              <a:t>/in/</a:t>
+            </a:r>
+            <a:r>
+              <a:rPr lang="pt-BR" sz="2000" dirty="0" err="1"/>
+              <a:t>evandrorcoelho</a:t>
+            </a:r>
+            <a:r>
+              <a:rPr lang="pt-BR" sz="2000" dirty="0"/>
+              <a:t>/</a:t>
+            </a:r>
+            <a:r>
+              <a:rPr lang="pt-BR" sz="2000" dirty="0" err="1"/>
+              <a:t>pt</a:t>
+            </a:r>
+            <a:r>
+              <a:rPr lang="pt-BR" sz="2000" dirty="0"/>
+              <a:t>/</a:t>
+            </a:r>
+          </a:p>
+        </p:txBody>
+      </p:sp>
+      <p:sp>
+        <p:nvSpPr>
+          <p:cNvPr id="4" name="Espaço Reservado para Número de Slide 3">
+            <a:extLst>
+              <a:ext uri="{FF2B5EF4-FFF2-40B4-BE49-F238E27FC236}">
+                <a16:creationId xmlns:a16="http://schemas.microsoft.com/office/drawing/2014/main" id="{8476E69A-EF8A-4BFE-9C44-6F783EE58850}"/>
+              </a:ext>
+            </a:extLst>
+          </p:cNvPr>
+          <p:cNvSpPr>
+            <a:spLocks noGrp="1"/>
+          </p:cNvSpPr>
+          <p:nvPr>
+            <p:ph type="sldNum" sz="quarter" idx="12"/>
+          </p:nvPr>
+        </p:nvSpPr>
+        <p:spPr/>
+        <p:txBody>
+          <a:bodyPr/>
+          <a:lstStyle/>
+          <a:p>
+            <a:pPr rtl="0"/>
+            <a:fld id="{3A98EE3D-8CD1-4C3F-BD1C-C98C9596463C}" type="slidenum">
+              <a:rPr lang="en-US" smtClean="0"/>
+              <a:t>26</a:t>
+            </a:fld>
+            <a:r>
+              <a:rPr lang="en-US" dirty="0"/>
+              <a:t> / 29</a:t>
+            </a:r>
+          </a:p>
+        </p:txBody>
+      </p:sp>
+    </p:spTree>
+    <p:extLst>
+      <p:ext uri="{BB962C8B-B14F-4D97-AF65-F5344CB8AC3E}">
+        <p14:creationId xmlns:p14="http://schemas.microsoft.com/office/powerpoint/2010/main" val="1609017714"/>
       </p:ext>
     </p:extLst>
   </p:cSld>
@@ -18411,404 +18084,6 @@
           <a:p>
             <a:r>
               <a:rPr lang="pt-BR" dirty="0"/>
-              <a:t>Conclusões</a:t>
-            </a:r>
-          </a:p>
-        </p:txBody>
-      </p:sp>
-      <p:sp>
-        <p:nvSpPr>
-          <p:cNvPr id="3" name="Espaço Reservado para Conteúdo 2">
-            <a:extLst>
-              <a:ext uri="{FF2B5EF4-FFF2-40B4-BE49-F238E27FC236}">
-                <a16:creationId xmlns:a16="http://schemas.microsoft.com/office/drawing/2014/main" id="{E1647ED6-C6B8-46F3-976C-6B7EECBA62C5}"/>
-              </a:ext>
-            </a:extLst>
-          </p:cNvPr>
-          <p:cNvSpPr>
-            <a:spLocks noGrp="1"/>
-          </p:cNvSpPr>
-          <p:nvPr>
-            <p:ph idx="1"/>
-          </p:nvPr>
-        </p:nvSpPr>
-        <p:spPr/>
-        <p:txBody>
-          <a:bodyPr>
-            <a:normAutofit/>
-          </a:bodyPr>
-          <a:lstStyle/>
-          <a:p>
-            <a:r>
-              <a:rPr lang="pt-BR" dirty="0"/>
-              <a:t>Foi possível verificar o processo de liquidação de despesa pública;</a:t>
-            </a:r>
-          </a:p>
-          <a:p>
-            <a:r>
-              <a:rPr lang="pt-BR" dirty="0"/>
-              <a:t>O registro estruturado dos dados de energia permite a análise do consumo;</a:t>
-            </a:r>
-          </a:p>
-          <a:p>
-            <a:r>
-              <a:rPr lang="pt-BR" dirty="0"/>
-              <a:t>A transformação da coluna de tempo e a coluna de feriado trouxe maior precisão;</a:t>
-            </a:r>
-          </a:p>
-          <a:p>
-            <a:r>
-              <a:rPr lang="pt-BR" dirty="0"/>
-              <a:t>A quantidade de neurônios não teve influência direta na precisão do modelo;</a:t>
-            </a:r>
-          </a:p>
-          <a:p>
-            <a:r>
-              <a:rPr lang="pt-BR" dirty="0"/>
-              <a:t>O algoritmo foi capaz de generalizar o aprendizado para os dados externos;</a:t>
-            </a:r>
-          </a:p>
-          <a:p>
-            <a:r>
-              <a:rPr lang="pt-BR" dirty="0"/>
-              <a:t>Futuros estudos: </a:t>
-            </a:r>
-          </a:p>
-          <a:p>
-            <a:pPr lvl="1"/>
-            <a:r>
-              <a:rPr lang="pt-BR" dirty="0"/>
-              <a:t>Variar o método de aprendizagem;</a:t>
-            </a:r>
-          </a:p>
-          <a:p>
-            <a:pPr lvl="1"/>
-            <a:r>
-              <a:rPr lang="pt-BR" dirty="0"/>
-              <a:t>Adicionar mais uma camada oculta;</a:t>
-            </a:r>
-          </a:p>
-          <a:p>
-            <a:pPr lvl="1"/>
-            <a:r>
-              <a:rPr lang="pt-BR" dirty="0"/>
-              <a:t>Alterar a arquitetura da rede. </a:t>
-            </a:r>
-          </a:p>
-        </p:txBody>
-      </p:sp>
-      <p:sp>
-        <p:nvSpPr>
-          <p:cNvPr id="6" name="Espaço Reservado para Número de Slide 5">
-            <a:extLst>
-              <a:ext uri="{FF2B5EF4-FFF2-40B4-BE49-F238E27FC236}">
-                <a16:creationId xmlns:a16="http://schemas.microsoft.com/office/drawing/2014/main" id="{A5545136-9C6F-49EA-A1A8-596EA8B2F23E}"/>
-              </a:ext>
-            </a:extLst>
-          </p:cNvPr>
-          <p:cNvSpPr>
-            <a:spLocks noGrp="1"/>
-          </p:cNvSpPr>
-          <p:nvPr>
-            <p:ph type="sldNum" sz="quarter" idx="12"/>
-          </p:nvPr>
-        </p:nvSpPr>
-        <p:spPr/>
-        <p:txBody>
-          <a:bodyPr/>
-          <a:lstStyle/>
-          <a:p>
-            <a:pPr rtl="0"/>
-            <a:fld id="{3A98EE3D-8CD1-4C3F-BD1C-C98C9596463C}" type="slidenum">
-              <a:rPr lang="en-US" smtClean="0"/>
-              <a:t>27</a:t>
-            </a:fld>
-            <a:r>
-              <a:rPr lang="en-US" dirty="0"/>
-              <a:t> / 29</a:t>
-            </a:r>
-          </a:p>
-        </p:txBody>
-      </p:sp>
-      <p:sp>
-        <p:nvSpPr>
-          <p:cNvPr id="4" name="Espaço Reservado para Rodapé 3">
-            <a:extLst>
-              <a:ext uri="{FF2B5EF4-FFF2-40B4-BE49-F238E27FC236}">
-                <a16:creationId xmlns:a16="http://schemas.microsoft.com/office/drawing/2014/main" id="{E66DE0F3-E3AA-49D8-89BE-7B6659EF1551}"/>
-              </a:ext>
-            </a:extLst>
-          </p:cNvPr>
-          <p:cNvSpPr>
-            <a:spLocks noGrp="1"/>
-          </p:cNvSpPr>
-          <p:nvPr>
-            <p:ph type="ftr" sz="quarter" idx="11"/>
-          </p:nvPr>
-        </p:nvSpPr>
-        <p:spPr/>
-        <p:txBody>
-          <a:bodyPr/>
-          <a:lstStyle/>
-          <a:p>
-            <a:r>
-              <a:rPr lang="en-US" dirty="0"/>
-              <a:t>CONCLUSÕES – </a:t>
-            </a:r>
-            <a:r>
-              <a:rPr lang="en-US" dirty="0" err="1"/>
-              <a:t>trabalho</a:t>
-            </a:r>
-            <a:r>
-              <a:rPr lang="en-US" dirty="0"/>
-              <a:t> de </a:t>
-            </a:r>
-            <a:r>
-              <a:rPr lang="en-US" dirty="0" err="1"/>
-              <a:t>conclusão</a:t>
-            </a:r>
-            <a:r>
-              <a:rPr lang="en-US" dirty="0"/>
-              <a:t> de </a:t>
-            </a:r>
-            <a:r>
-              <a:rPr lang="en-US" dirty="0" err="1"/>
-              <a:t>curso</a:t>
-            </a:r>
-            <a:r>
-              <a:rPr lang="en-US" dirty="0"/>
-              <a:t> – Evandro </a:t>
-            </a:r>
-            <a:r>
-              <a:rPr lang="en-US" dirty="0" err="1"/>
-              <a:t>coelho</a:t>
-            </a:r>
-            <a:endParaRPr lang="en-US" dirty="0"/>
-          </a:p>
-        </p:txBody>
-      </p:sp>
-    </p:spTree>
-    <p:extLst>
-      <p:ext uri="{BB962C8B-B14F-4D97-AF65-F5344CB8AC3E}">
-        <p14:creationId xmlns:p14="http://schemas.microsoft.com/office/powerpoint/2010/main" val="992450659"/>
-      </p:ext>
-    </p:extLst>
-  </p:cSld>
-  <p:clrMapOvr>
-    <a:masterClrMapping/>
-  </p:clrMapOvr>
-</p:sld>
-</file>
-
-<file path=ppt/slides/slide28.xml><?xml version="1.0" encoding="utf-8"?>
-<p:sld xmlns:a="http://schemas.openxmlformats.org/drawingml/2006/main" xmlns:r="http://schemas.openxmlformats.org/officeDocument/2006/relationships" xmlns:p="http://schemas.openxmlformats.org/presentationml/2006/main">
-  <p:cSld>
-    <p:spTree>
-      <p:nvGrpSpPr>
-        <p:cNvPr id="1" name=""/>
-        <p:cNvGrpSpPr/>
-        <p:nvPr/>
-      </p:nvGrpSpPr>
-      <p:grpSpPr>
-        <a:xfrm>
-          <a:off x="0" y="0"/>
-          <a:ext cx="0" cy="0"/>
-          <a:chOff x="0" y="0"/>
-          <a:chExt cx="0" cy="0"/>
-        </a:xfrm>
-      </p:grpSpPr>
-      <p:sp>
-        <p:nvSpPr>
-          <p:cNvPr id="2" name="Título 1">
-            <a:extLst>
-              <a:ext uri="{FF2B5EF4-FFF2-40B4-BE49-F238E27FC236}">
-                <a16:creationId xmlns:a16="http://schemas.microsoft.com/office/drawing/2014/main" id="{60304B40-6619-4716-9EBB-9A3A816B52F8}"/>
-              </a:ext>
-            </a:extLst>
-          </p:cNvPr>
-          <p:cNvSpPr>
-            <a:spLocks noGrp="1"/>
-          </p:cNvSpPr>
-          <p:nvPr>
-            <p:ph type="title"/>
-          </p:nvPr>
-        </p:nvSpPr>
-        <p:spPr/>
-        <p:txBody>
-          <a:bodyPr/>
-          <a:lstStyle/>
-          <a:p>
-            <a:r>
-              <a:rPr lang="pt-BR" dirty="0"/>
-              <a:t>Obrigado!</a:t>
-            </a:r>
-          </a:p>
-        </p:txBody>
-      </p:sp>
-      <p:sp>
-        <p:nvSpPr>
-          <p:cNvPr id="3" name="Espaço Reservado para Conteúdo 2">
-            <a:extLst>
-              <a:ext uri="{FF2B5EF4-FFF2-40B4-BE49-F238E27FC236}">
-                <a16:creationId xmlns:a16="http://schemas.microsoft.com/office/drawing/2014/main" id="{8093754E-D7A2-4D94-84FD-F7ADB980EB2A}"/>
-              </a:ext>
-            </a:extLst>
-          </p:cNvPr>
-          <p:cNvSpPr>
-            <a:spLocks noGrp="1"/>
-          </p:cNvSpPr>
-          <p:nvPr>
-            <p:ph idx="1"/>
-          </p:nvPr>
-        </p:nvSpPr>
-        <p:spPr/>
-        <p:txBody>
-          <a:bodyPr>
-            <a:normAutofit/>
-          </a:bodyPr>
-          <a:lstStyle/>
-          <a:p>
-            <a:pPr marL="0" indent="0" algn="ctr">
-              <a:buNone/>
-            </a:pPr>
-            <a:r>
-              <a:rPr lang="pt-BR" sz="2400" b="1" dirty="0"/>
-              <a:t>Evandro Ribeiro Gomes Coelho</a:t>
-            </a:r>
-          </a:p>
-          <a:p>
-            <a:pPr marL="0" indent="0">
-              <a:buNone/>
-            </a:pPr>
-            <a:endParaRPr lang="pt-BR" sz="2400" dirty="0"/>
-          </a:p>
-          <a:p>
-            <a:pPr marL="0" indent="0">
-              <a:buNone/>
-            </a:pPr>
-            <a:r>
-              <a:rPr lang="pt-BR" sz="2400" dirty="0"/>
-              <a:t>Contato: </a:t>
-            </a:r>
-          </a:p>
-          <a:p>
-            <a:r>
-              <a:rPr lang="pt-BR" sz="2000" dirty="0"/>
-              <a:t>https://</a:t>
-            </a:r>
-            <a:r>
-              <a:rPr lang="pt-BR" sz="2000" dirty="0" err="1"/>
-              <a:t>www.linkedin.com</a:t>
-            </a:r>
-            <a:r>
-              <a:rPr lang="pt-BR" sz="2000" dirty="0"/>
-              <a:t>/in/</a:t>
-            </a:r>
-            <a:r>
-              <a:rPr lang="pt-BR" sz="2000" dirty="0" err="1"/>
-              <a:t>evandrorcoelho</a:t>
-            </a:r>
-            <a:r>
-              <a:rPr lang="pt-BR" sz="2000" dirty="0"/>
-              <a:t>/</a:t>
-            </a:r>
-            <a:r>
-              <a:rPr lang="pt-BR" sz="2000" dirty="0" err="1"/>
-              <a:t>pt</a:t>
-            </a:r>
-            <a:r>
-              <a:rPr lang="pt-BR" sz="2000" dirty="0"/>
-              <a:t>/</a:t>
-            </a:r>
-          </a:p>
-        </p:txBody>
-      </p:sp>
-      <p:sp>
-        <p:nvSpPr>
-          <p:cNvPr id="4" name="Espaço Reservado para Número de Slide 3">
-            <a:extLst>
-              <a:ext uri="{FF2B5EF4-FFF2-40B4-BE49-F238E27FC236}">
-                <a16:creationId xmlns:a16="http://schemas.microsoft.com/office/drawing/2014/main" id="{8476E69A-EF8A-4BFE-9C44-6F783EE58850}"/>
-              </a:ext>
-            </a:extLst>
-          </p:cNvPr>
-          <p:cNvSpPr>
-            <a:spLocks noGrp="1"/>
-          </p:cNvSpPr>
-          <p:nvPr>
-            <p:ph type="sldNum" sz="quarter" idx="12"/>
-          </p:nvPr>
-        </p:nvSpPr>
-        <p:spPr/>
-        <p:txBody>
-          <a:bodyPr/>
-          <a:lstStyle/>
-          <a:p>
-            <a:pPr rtl="0"/>
-            <a:fld id="{3A98EE3D-8CD1-4C3F-BD1C-C98C9596463C}" type="slidenum">
-              <a:rPr lang="en-US" smtClean="0"/>
-              <a:t>28</a:t>
-            </a:fld>
-            <a:r>
-              <a:rPr lang="en-US" dirty="0"/>
-              <a:t> / 29</a:t>
-            </a:r>
-          </a:p>
-        </p:txBody>
-      </p:sp>
-    </p:spTree>
-    <p:extLst>
-      <p:ext uri="{BB962C8B-B14F-4D97-AF65-F5344CB8AC3E}">
-        <p14:creationId xmlns:p14="http://schemas.microsoft.com/office/powerpoint/2010/main" val="1609017714"/>
-      </p:ext>
-    </p:extLst>
-  </p:cSld>
-  <p:clrMapOvr>
-    <a:masterClrMapping/>
-  </p:clrMapOvr>
-</p:sld>
-</file>
-
-<file path=ppt/slides/slide29.xml><?xml version="1.0" encoding="utf-8"?>
-<p:sld xmlns:a="http://schemas.openxmlformats.org/drawingml/2006/main" xmlns:r="http://schemas.openxmlformats.org/officeDocument/2006/relationships" xmlns:p="http://schemas.openxmlformats.org/presentationml/2006/main">
-  <p:cSld>
-    <p:spTree>
-      <p:nvGrpSpPr>
-        <p:cNvPr id="1" name=""/>
-        <p:cNvGrpSpPr/>
-        <p:nvPr/>
-      </p:nvGrpSpPr>
-      <p:grpSpPr>
-        <a:xfrm>
-          <a:off x="0" y="0"/>
-          <a:ext cx="0" cy="0"/>
-          <a:chOff x="0" y="0"/>
-          <a:chExt cx="0" cy="0"/>
-        </a:xfrm>
-      </p:grpSpPr>
-      <p:sp>
-        <p:nvSpPr>
-          <p:cNvPr id="2" name="Título 1">
-            <a:extLst>
-              <a:ext uri="{FF2B5EF4-FFF2-40B4-BE49-F238E27FC236}">
-                <a16:creationId xmlns:a16="http://schemas.microsoft.com/office/drawing/2014/main" id="{9D872C6C-3E07-4AC6-B68D-9AFE69A9DDB5}"/>
-              </a:ext>
-            </a:extLst>
-          </p:cNvPr>
-          <p:cNvSpPr>
-            <a:spLocks noGrp="1"/>
-          </p:cNvSpPr>
-          <p:nvPr>
-            <p:ph type="title"/>
-          </p:nvPr>
-        </p:nvSpPr>
-        <p:spPr/>
-        <p:txBody>
-          <a:bodyPr/>
-          <a:lstStyle/>
-          <a:p>
-            <a:r>
-              <a:rPr lang="pt-BR" dirty="0"/>
               <a:t>referências</a:t>
             </a:r>
           </a:p>
@@ -18838,792 +18113,388 @@
         </p:spPr>
         <p:txBody>
           <a:bodyPr>
-            <a:normAutofit fontScale="47500" lnSpcReduction="20000"/>
+            <a:normAutofit fontScale="55000" lnSpcReduction="20000"/>
           </a:bodyPr>
           <a:lstStyle/>
           <a:p>
-            <a:pPr marL="0" lvl="0" indent="0" algn="just">
+            <a:pPr marL="0" indent="0">
               <a:buNone/>
-              <a:tabLst>
-                <a:tab pos="228600" algn="l"/>
-              </a:tabLst>
             </a:pPr>
             <a:r>
-              <a:rPr lang="pt-BR" sz="1800" dirty="0">
-                <a:effectLst/>
-                <a:latin typeface="Times New Roman" panose="02020603050405020304" pitchFamily="18" charset="0"/>
-                <a:ea typeface="Times New Roman" panose="02020603050405020304" pitchFamily="18" charset="0"/>
-              </a:rPr>
+              <a:rPr lang="pt-BR" dirty="0"/>
               <a:t>ABESCO, Associação Brasileira das Empresas de Serviços de Conservação de Energia. </a:t>
             </a:r>
             <a:r>
-              <a:rPr lang="pt-BR" sz="1800" b="1" dirty="0">
-                <a:effectLst/>
-                <a:latin typeface="Times New Roman" panose="02020603050405020304" pitchFamily="18" charset="0"/>
-                <a:ea typeface="Times New Roman" panose="02020603050405020304" pitchFamily="18" charset="0"/>
-              </a:rPr>
-              <a:t>O que é Eficiência Energética? (EE)</a:t>
-            </a:r>
-            <a:r>
-              <a:rPr lang="pt-BR" sz="1800" dirty="0">
-                <a:effectLst/>
-                <a:latin typeface="Times New Roman" panose="02020603050405020304" pitchFamily="18" charset="0"/>
-                <a:ea typeface="Times New Roman" panose="02020603050405020304" pitchFamily="18" charset="0"/>
-              </a:rPr>
-              <a:t>. Disponível em: &lt;http://www.abesco.com.br/</a:t>
-            </a:r>
-            <a:r>
-              <a:rPr lang="pt-BR" sz="1800" dirty="0" err="1">
-                <a:effectLst/>
-                <a:latin typeface="Times New Roman" panose="02020603050405020304" pitchFamily="18" charset="0"/>
-                <a:ea typeface="Times New Roman" panose="02020603050405020304" pitchFamily="18" charset="0"/>
-              </a:rPr>
+              <a:rPr lang="pt-BR" b="1" dirty="0"/>
+              <a:t>O que é Eficiência Energética? (EE).</a:t>
+            </a:r>
+            <a:r>
+              <a:rPr lang="pt-BR" dirty="0"/>
+              <a:t> Disponível em: &lt;https://</a:t>
+            </a:r>
+            <a:r>
+              <a:rPr lang="pt-BR" dirty="0" err="1"/>
+              <a:t>www.abesco.com.br</a:t>
+            </a:r>
+            <a:r>
+              <a:rPr lang="pt-BR" dirty="0"/>
+              <a:t>/</a:t>
+            </a:r>
+            <a:r>
+              <a:rPr lang="pt-BR" dirty="0" err="1"/>
               <a:t>pt</a:t>
             </a:r>
             <a:r>
-              <a:rPr lang="pt-BR" sz="1800" dirty="0">
-                <a:effectLst/>
-                <a:latin typeface="Times New Roman" panose="02020603050405020304" pitchFamily="18" charset="0"/>
-                <a:ea typeface="Times New Roman" panose="02020603050405020304" pitchFamily="18" charset="0"/>
-              </a:rPr>
+              <a:rPr lang="pt-BR" dirty="0"/>
               <a:t>/o-que-e-</a:t>
             </a:r>
             <a:r>
-              <a:rPr lang="pt-BR" sz="1800" dirty="0" err="1">
-                <a:effectLst/>
-                <a:latin typeface="Times New Roman" panose="02020603050405020304" pitchFamily="18" charset="0"/>
-                <a:ea typeface="Times New Roman" panose="02020603050405020304" pitchFamily="18" charset="0"/>
-              </a:rPr>
+              <a:rPr lang="pt-BR" dirty="0" err="1"/>
               <a:t>eficiencia</a:t>
             </a:r>
             <a:r>
-              <a:rPr lang="pt-BR" sz="1800" dirty="0">
-                <a:effectLst/>
-                <a:latin typeface="Times New Roman" panose="02020603050405020304" pitchFamily="18" charset="0"/>
-                <a:ea typeface="Times New Roman" panose="02020603050405020304" pitchFamily="18" charset="0"/>
-              </a:rPr>
+              <a:rPr lang="pt-BR" dirty="0"/>
               <a:t>-</a:t>
             </a:r>
             <a:r>
-              <a:rPr lang="pt-BR" sz="1800" dirty="0" err="1">
-                <a:effectLst/>
-                <a:latin typeface="Times New Roman" panose="02020603050405020304" pitchFamily="18" charset="0"/>
-                <a:ea typeface="Times New Roman" panose="02020603050405020304" pitchFamily="18" charset="0"/>
-              </a:rPr>
+              <a:rPr lang="pt-BR" dirty="0" err="1"/>
               <a:t>energetica-ee</a:t>
             </a:r>
             <a:r>
-              <a:rPr lang="pt-BR" sz="1800" dirty="0">
-                <a:effectLst/>
-                <a:latin typeface="Times New Roman" panose="02020603050405020304" pitchFamily="18" charset="0"/>
-                <a:ea typeface="Times New Roman" panose="02020603050405020304" pitchFamily="18" charset="0"/>
-              </a:rPr>
-              <a:t>/#:~:text=Efici%C3%AAncia%20energ%C3%A9tica%20%C3%A9%20uma%20atividade,se%20obter%20um%20determinado%20resultado&gt;. Acesso em 27 de dezembro de 2020.</a:t>
-            </a:r>
-          </a:p>
-          <a:p>
-            <a:pPr marL="0" lvl="0" indent="0" algn="just">
+              <a:rPr lang="pt-BR" dirty="0"/>
+              <a:t>\&gt;. </a:t>
+            </a:r>
+            <a:r>
+              <a:rPr lang="en-US" dirty="0" err="1"/>
+              <a:t>Acesso</a:t>
+            </a:r>
+            <a:r>
+              <a:rPr lang="en-US" dirty="0"/>
+              <a:t> </a:t>
+            </a:r>
+            <a:r>
+              <a:rPr lang="en-US" dirty="0" err="1"/>
+              <a:t>em</a:t>
+            </a:r>
+            <a:r>
+              <a:rPr lang="en-US" dirty="0"/>
+              <a:t>: 27 </a:t>
+            </a:r>
+            <a:r>
+              <a:rPr lang="en-US" dirty="0" err="1"/>
+              <a:t>dez</a:t>
+            </a:r>
+            <a:r>
+              <a:rPr lang="en-US" dirty="0"/>
+              <a:t>. 2020.</a:t>
+            </a:r>
+            <a:endParaRPr lang="pt-BR" dirty="0"/>
+          </a:p>
+          <a:p>
+            <a:pPr marL="0" indent="0">
               <a:buNone/>
-              <a:tabLst>
-                <a:tab pos="228600" algn="l"/>
-              </a:tabLst>
             </a:pPr>
             <a:r>
-              <a:rPr lang="en-US" sz="1800" dirty="0">
-                <a:effectLst/>
-                <a:latin typeface="Times New Roman" panose="02020603050405020304" pitchFamily="18" charset="0"/>
-                <a:ea typeface="Times New Roman" panose="02020603050405020304" pitchFamily="18" charset="0"/>
-              </a:rPr>
-              <a:t>AMASYALI, K., &amp; EL-GOHARY, N. M. A review of data-driven building energy consumption prediction studies. </a:t>
-            </a:r>
-            <a:r>
-              <a:rPr lang="pt-BR" sz="1800" b="1" dirty="0" err="1">
-                <a:effectLst/>
-                <a:latin typeface="Times New Roman" panose="02020603050405020304" pitchFamily="18" charset="0"/>
-                <a:ea typeface="Times New Roman" panose="02020603050405020304" pitchFamily="18" charset="0"/>
-              </a:rPr>
+              <a:rPr lang="en-US" dirty="0"/>
+              <a:t>AMASYALI, K.; EL-GOHARY, N. M. A review of data-driven building energy consumption prediction studies. </a:t>
+            </a:r>
+            <a:r>
+              <a:rPr lang="en-US" b="1" dirty="0"/>
+              <a:t>Renewable and Sustainable Energy Reviews</a:t>
+            </a:r>
+            <a:r>
+              <a:rPr lang="en-US" dirty="0"/>
+              <a:t>, p. 1192–1205, 2017.</a:t>
+            </a:r>
+            <a:endParaRPr lang="pt-BR" dirty="0"/>
+          </a:p>
+          <a:p>
+            <a:pPr marL="0" indent="0">
+              <a:buNone/>
+            </a:pPr>
+            <a:r>
+              <a:rPr lang="en-US" dirty="0"/>
+              <a:t>BUSSAB, W. D.; MORETTIN, P. A. </a:t>
+            </a:r>
+            <a:r>
+              <a:rPr lang="en-US" b="1" dirty="0" err="1"/>
+              <a:t>Estatística</a:t>
+            </a:r>
+            <a:r>
+              <a:rPr lang="en-US" b="1" dirty="0"/>
+              <a:t> </a:t>
+            </a:r>
+            <a:r>
+              <a:rPr lang="en-US" b="1" dirty="0" err="1"/>
+              <a:t>Básica</a:t>
+            </a:r>
+            <a:r>
+              <a:rPr lang="en-US" b="1" dirty="0"/>
+              <a:t>.</a:t>
+            </a:r>
+            <a:r>
+              <a:rPr lang="en-US" dirty="0"/>
+              <a:t> </a:t>
+            </a:r>
+            <a:r>
+              <a:rPr lang="pt-BR" dirty="0"/>
+              <a:t>São Paulo: Editora Saraiva, 2010.</a:t>
+            </a:r>
+          </a:p>
+          <a:p>
+            <a:pPr marL="0" indent="0">
+              <a:buNone/>
+            </a:pPr>
+            <a:r>
+              <a:rPr lang="pt-BR" dirty="0"/>
+              <a:t>COELHO, Evandro Ribeiro Gomes. </a:t>
+            </a:r>
+            <a:r>
+              <a:rPr lang="pt-BR" b="1" dirty="0"/>
+              <a:t>Previsão de Curto Prazo do Consumo Energético de Prédios Públicos em Minas Gerais.</a:t>
+            </a:r>
+            <a:r>
+              <a:rPr lang="pt-BR" dirty="0"/>
+              <a:t> Trabalho de Conclusão de Curso (Bacharelado em Engenharia Elétrica). Centro Federal de Educação Tecnológica de Minas Gerais, Belo Horizonte, 2021a.</a:t>
+            </a:r>
+          </a:p>
+          <a:p>
+            <a:pPr marL="0" indent="0">
+              <a:buNone/>
+            </a:pPr>
+            <a:r>
+              <a:rPr lang="pt-BR" dirty="0"/>
+              <a:t>COELHO, Evandro Ribeiro Gomes. </a:t>
+            </a:r>
+            <a:r>
+              <a:rPr lang="pt-BR" b="1" dirty="0"/>
+              <a:t>Previsão do Consumo Energético de Prédios Públicos por Rede Neural Artificial MLP.</a:t>
+            </a:r>
+            <a:r>
+              <a:rPr lang="pt-BR" dirty="0"/>
+              <a:t> Trabalho de Conclusão de Curso (Bacharelado em Engenharia Elétrica). Centro Federal de Educação Tecnológica de Minas Gerais, Belo Horizonte, 2021b.</a:t>
+            </a:r>
+          </a:p>
+          <a:p>
+            <a:pPr marL="0" indent="0">
+              <a:buNone/>
+            </a:pPr>
+            <a:r>
+              <a:rPr lang="pt-BR" dirty="0"/>
+              <a:t>D'ALBUQUERQUE, M. A.; SILVA, R. M.; GOMES, M. B. Eficiência energética em uma edificação pública: uma análise das possibilidades. </a:t>
+            </a:r>
+            <a:r>
+              <a:rPr lang="en-US" b="1" dirty="0"/>
+              <a:t>Sistemas &amp; </a:t>
+            </a:r>
+            <a:r>
+              <a:rPr lang="en-US" b="1" dirty="0" err="1"/>
+              <a:t>Gestão</a:t>
+            </a:r>
+            <a:r>
+              <a:rPr lang="en-US" dirty="0"/>
+              <a:t>, p. 462-470, 2017.</a:t>
+            </a:r>
+            <a:endParaRPr lang="pt-BR" dirty="0"/>
+          </a:p>
+          <a:p>
+            <a:pPr marL="0" indent="0">
+              <a:buNone/>
+            </a:pPr>
+            <a:r>
+              <a:rPr lang="en-US" dirty="0"/>
+              <a:t>DEB, C. et al. A review on time series forecasting techniques for building energy consumption. </a:t>
+            </a:r>
+            <a:r>
+              <a:rPr lang="pt-BR" b="1" dirty="0" err="1"/>
               <a:t>Renewable</a:t>
             </a:r>
             <a:r>
-              <a:rPr lang="pt-BR" sz="1800" b="1" dirty="0">
-                <a:effectLst/>
-                <a:latin typeface="Times New Roman" panose="02020603050405020304" pitchFamily="18" charset="0"/>
-                <a:ea typeface="Times New Roman" panose="02020603050405020304" pitchFamily="18" charset="0"/>
-              </a:rPr>
+              <a:rPr lang="pt-BR" b="1" dirty="0"/>
               <a:t> </a:t>
             </a:r>
             <a:r>
-              <a:rPr lang="pt-BR" sz="1800" b="1" dirty="0" err="1">
-                <a:effectLst/>
-                <a:latin typeface="Times New Roman" panose="02020603050405020304" pitchFamily="18" charset="0"/>
-                <a:ea typeface="Times New Roman" panose="02020603050405020304" pitchFamily="18" charset="0"/>
-              </a:rPr>
+              <a:rPr lang="pt-BR" b="1" dirty="0" err="1"/>
               <a:t>and</a:t>
             </a:r>
             <a:r>
-              <a:rPr lang="pt-BR" sz="1800" b="1" dirty="0">
-                <a:effectLst/>
-                <a:latin typeface="Times New Roman" panose="02020603050405020304" pitchFamily="18" charset="0"/>
-                <a:ea typeface="Times New Roman" panose="02020603050405020304" pitchFamily="18" charset="0"/>
-              </a:rPr>
+              <a:rPr lang="pt-BR" b="1" dirty="0"/>
               <a:t> </a:t>
             </a:r>
             <a:r>
-              <a:rPr lang="pt-BR" sz="1800" b="1" dirty="0" err="1">
-                <a:effectLst/>
-                <a:latin typeface="Times New Roman" panose="02020603050405020304" pitchFamily="18" charset="0"/>
-                <a:ea typeface="Times New Roman" panose="02020603050405020304" pitchFamily="18" charset="0"/>
-              </a:rPr>
+              <a:rPr lang="pt-BR" b="1" dirty="0" err="1"/>
               <a:t>Sustainable</a:t>
             </a:r>
             <a:r>
-              <a:rPr lang="pt-BR" sz="1800" b="1" dirty="0">
-                <a:effectLst/>
-                <a:latin typeface="Times New Roman" panose="02020603050405020304" pitchFamily="18" charset="0"/>
-                <a:ea typeface="Times New Roman" panose="02020603050405020304" pitchFamily="18" charset="0"/>
-              </a:rPr>
+              <a:rPr lang="pt-BR" b="1" dirty="0"/>
               <a:t> Energy Reviews</a:t>
             </a:r>
             <a:r>
-              <a:rPr lang="pt-BR" sz="1800" dirty="0">
-                <a:effectLst/>
-                <a:latin typeface="Times New Roman" panose="02020603050405020304" pitchFamily="18" charset="0"/>
-                <a:ea typeface="Times New Roman" panose="02020603050405020304" pitchFamily="18" charset="0"/>
-              </a:rPr>
-              <a:t>, p. 1192–1205, 2017.</a:t>
-            </a:r>
-          </a:p>
-          <a:p>
-            <a:pPr marL="0" lvl="0" indent="0" algn="just">
+              <a:rPr lang="pt-BR" dirty="0"/>
+              <a:t>, p. 9-12, 2017.</a:t>
+            </a:r>
+          </a:p>
+          <a:p>
+            <a:pPr marL="0" indent="0">
               <a:buNone/>
-              <a:tabLst>
-                <a:tab pos="228600" algn="l"/>
-              </a:tabLst>
             </a:pPr>
             <a:r>
-              <a:rPr lang="pt-BR" sz="1800" dirty="0">
-                <a:effectLst/>
-                <a:latin typeface="Times New Roman" panose="02020603050405020304" pitchFamily="18" charset="0"/>
-                <a:ea typeface="Times New Roman" panose="02020603050405020304" pitchFamily="18" charset="0"/>
-              </a:rPr>
-              <a:t>ANEEL, Agência Nacional De Energia Elétrica. (03 de abril de 2012). </a:t>
-            </a:r>
-            <a:r>
-              <a:rPr lang="pt-BR" sz="1800" b="1" dirty="0">
-                <a:effectLst/>
-                <a:latin typeface="Times New Roman" panose="02020603050405020304" pitchFamily="18" charset="0"/>
-                <a:ea typeface="Times New Roman" panose="02020603050405020304" pitchFamily="18" charset="0"/>
-              </a:rPr>
-              <a:t>RESOLUÇÃO NORMATIVA Nº 479, DE 3 DE ABRIL DE 2012</a:t>
-            </a:r>
-            <a:r>
-              <a:rPr lang="pt-BR" sz="1800" dirty="0">
-                <a:effectLst/>
-                <a:latin typeface="Times New Roman" panose="02020603050405020304" pitchFamily="18" charset="0"/>
-                <a:ea typeface="Times New Roman" panose="02020603050405020304" pitchFamily="18" charset="0"/>
-              </a:rPr>
-              <a:t>. Disponível em: &lt; https://www.aneel.gov.br/</a:t>
-            </a:r>
-            <a:r>
-              <a:rPr lang="pt-BR" sz="1800" dirty="0" err="1">
-                <a:effectLst/>
-                <a:latin typeface="Times New Roman" panose="02020603050405020304" pitchFamily="18" charset="0"/>
-                <a:ea typeface="Times New Roman" panose="02020603050405020304" pitchFamily="18" charset="0"/>
-              </a:rPr>
-              <a:t>documents</a:t>
-            </a:r>
-            <a:r>
-              <a:rPr lang="pt-BR" sz="1800" dirty="0">
-                <a:effectLst/>
-                <a:latin typeface="Times New Roman" panose="02020603050405020304" pitchFamily="18" charset="0"/>
-                <a:ea typeface="Times New Roman" panose="02020603050405020304" pitchFamily="18" charset="0"/>
-              </a:rPr>
-              <a:t>/656877/14486448/ren2012479.pdf/a89312fe-a5d7-4151-96be-95765ea2ce03?version=1.0&gt;. Acesso em 25 de maio de 2021.</a:t>
-            </a:r>
-          </a:p>
-          <a:p>
-            <a:pPr marL="0" lvl="0" indent="0" algn="just">
+              <a:rPr lang="en-US" dirty="0"/>
+              <a:t>DORARD, Louis. </a:t>
+            </a:r>
+            <a:r>
+              <a:rPr lang="en-US" b="1" dirty="0"/>
+              <a:t>Machine Learning Canvas</a:t>
+            </a:r>
+            <a:r>
+              <a:rPr lang="en-US" dirty="0"/>
+              <a:t>. </a:t>
+            </a:r>
+            <a:r>
+              <a:rPr lang="pt-BR" dirty="0"/>
+              <a:t>OWNML, 2015. Disponível em: &lt;https://</a:t>
+            </a:r>
+            <a:r>
+              <a:rPr lang="pt-BR" dirty="0" err="1"/>
+              <a:t>www.ownml.co</a:t>
+            </a:r>
+            <a:r>
+              <a:rPr lang="pt-BR" dirty="0"/>
+              <a:t>/machine-learning-</a:t>
+            </a:r>
+            <a:r>
+              <a:rPr lang="pt-BR" dirty="0" err="1"/>
+              <a:t>canvas</a:t>
+            </a:r>
+            <a:r>
+              <a:rPr lang="pt-BR" dirty="0"/>
+              <a:t>&gt;. Acesso em: 7 jun. 2026.</a:t>
+            </a:r>
+          </a:p>
+          <a:p>
+            <a:pPr marL="0" indent="0">
               <a:buNone/>
-              <a:tabLst>
-                <a:tab pos="228600" algn="l"/>
-              </a:tabLst>
             </a:pPr>
             <a:r>
-              <a:rPr lang="pt-BR" sz="1800" dirty="0">
-                <a:effectLst/>
-                <a:latin typeface="Times New Roman" panose="02020603050405020304" pitchFamily="18" charset="0"/>
-                <a:ea typeface="Times New Roman" panose="02020603050405020304" pitchFamily="18" charset="0"/>
-              </a:rPr>
-              <a:t>COSTA, A. F. </a:t>
-            </a:r>
-            <a:r>
-              <a:rPr lang="pt-BR" sz="1800" b="1" dirty="0">
-                <a:effectLst/>
-                <a:latin typeface="Times New Roman" panose="02020603050405020304" pitchFamily="18" charset="0"/>
-                <a:ea typeface="Times New Roman" panose="02020603050405020304" pitchFamily="18" charset="0"/>
-              </a:rPr>
-              <a:t>Fiscal de contratos administrativos: atribuições</a:t>
-            </a:r>
-            <a:r>
-              <a:rPr lang="pt-BR" sz="1800" dirty="0">
-                <a:effectLst/>
-                <a:latin typeface="Times New Roman" panose="02020603050405020304" pitchFamily="18" charset="0"/>
-                <a:ea typeface="Times New Roman" panose="02020603050405020304" pitchFamily="18" charset="0"/>
-              </a:rPr>
-              <a:t>. Disponível em: &lt;https://jus.com.br/artigos/24855/aspectos-gerais-sobre-o-fiscal-de-contratos-</a:t>
-            </a:r>
-            <a:r>
-              <a:rPr lang="pt-BR" sz="1800" dirty="0" err="1">
-                <a:effectLst/>
-                <a:latin typeface="Times New Roman" panose="02020603050405020304" pitchFamily="18" charset="0"/>
-                <a:ea typeface="Times New Roman" panose="02020603050405020304" pitchFamily="18" charset="0"/>
-              </a:rPr>
-              <a:t>publicos</a:t>
-            </a:r>
-            <a:r>
-              <a:rPr lang="pt-BR" sz="1800" dirty="0">
-                <a:effectLst/>
-                <a:latin typeface="Times New Roman" panose="02020603050405020304" pitchFamily="18" charset="0"/>
-                <a:ea typeface="Times New Roman" panose="02020603050405020304" pitchFamily="18" charset="0"/>
-              </a:rPr>
-              <a:t>/2#:~:</a:t>
-            </a:r>
-            <a:r>
-              <a:rPr lang="pt-BR" sz="1800" dirty="0" err="1">
-                <a:effectLst/>
-                <a:latin typeface="Times New Roman" panose="02020603050405020304" pitchFamily="18" charset="0"/>
-                <a:ea typeface="Times New Roman" panose="02020603050405020304" pitchFamily="18" charset="0"/>
-              </a:rPr>
-              <a:t>text</a:t>
-            </a:r>
-            <a:r>
-              <a:rPr lang="pt-BR" sz="1800" dirty="0">
-                <a:effectLst/>
-                <a:latin typeface="Times New Roman" panose="02020603050405020304" pitchFamily="18" charset="0"/>
-                <a:ea typeface="Times New Roman" panose="02020603050405020304" pitchFamily="18" charset="0"/>
-              </a:rPr>
-              <a:t>=LIQUIDA%C3%87%C3%83O%20DA%20DESPESA&amp;text=%E2%80%9CA%20liquida%C3%A7%C3%A3o%20da%20despesa%20consiste,cumpriu%20o%20que%20foi%20pactuado&gt;. Acesso 03 de novembro de 2020.</a:t>
-            </a:r>
-          </a:p>
-          <a:p>
-            <a:pPr marL="0" lvl="0" indent="0" algn="just">
+              <a:rPr lang="pt-BR" dirty="0"/>
+              <a:t>GONÇALVES, A. C. </a:t>
+            </a:r>
+            <a:r>
+              <a:rPr lang="pt-BR" b="1" dirty="0"/>
+              <a:t>Eficientização Energética em Prédios Públicos:</a:t>
+            </a:r>
+            <a:r>
+              <a:rPr lang="pt-BR" dirty="0"/>
+              <a:t> um desafio aos gestores municipais frente aos requisitos de governança e sustentabilidade. Dissertação de Mestrado. São Paulo, p. 1-25, 2012.</a:t>
+            </a:r>
+          </a:p>
+          <a:p>
+            <a:pPr marL="0" indent="0">
               <a:buNone/>
-              <a:tabLst>
-                <a:tab pos="228600" algn="l"/>
-              </a:tabLst>
             </a:pPr>
             <a:r>
-              <a:rPr lang="pt-BR" sz="1800" dirty="0">
-                <a:effectLst/>
-                <a:latin typeface="Times New Roman" panose="02020603050405020304" pitchFamily="18" charset="0"/>
-                <a:ea typeface="Times New Roman" panose="02020603050405020304" pitchFamily="18" charset="0"/>
-              </a:rPr>
-              <a:t>D’ALBUQUERQUE, M. A., SILVA, R. M., &amp; Gomes, M. B. Eficiência Energética Em Uma Edificação Pública. </a:t>
-            </a:r>
-            <a:r>
-              <a:rPr lang="pt-BR" sz="1800" b="1" dirty="0">
-                <a:effectLst/>
-                <a:latin typeface="Times New Roman" panose="02020603050405020304" pitchFamily="18" charset="0"/>
-                <a:ea typeface="Times New Roman" panose="02020603050405020304" pitchFamily="18" charset="0"/>
-              </a:rPr>
-              <a:t>Sistemas &amp; Gestão</a:t>
-            </a:r>
-            <a:r>
-              <a:rPr lang="pt-BR" sz="1800" dirty="0">
-                <a:effectLst/>
-                <a:latin typeface="Times New Roman" panose="02020603050405020304" pitchFamily="18" charset="0"/>
-                <a:ea typeface="Times New Roman" panose="02020603050405020304" pitchFamily="18" charset="0"/>
-              </a:rPr>
-              <a:t>, p. 462-470, 2017.</a:t>
-            </a:r>
-          </a:p>
-          <a:p>
-            <a:pPr marL="0" lvl="0" indent="0" algn="just">
+              <a:rPr lang="pt-BR" dirty="0"/>
+              <a:t>HYNDMAN, J. R.; ATHANASOPOULOS, G. </a:t>
+            </a:r>
+            <a:r>
+              <a:rPr lang="pt-BR" b="1" dirty="0" err="1"/>
+              <a:t>Forecasting</a:t>
+            </a:r>
+            <a:r>
+              <a:rPr lang="pt-BR" b="1" dirty="0"/>
+              <a:t>: </a:t>
+            </a:r>
+            <a:r>
+              <a:rPr lang="pt-BR" b="1" dirty="0" err="1"/>
+              <a:t>Principles</a:t>
+            </a:r>
+            <a:r>
+              <a:rPr lang="pt-BR" b="1" dirty="0"/>
+              <a:t> </a:t>
+            </a:r>
+            <a:r>
+              <a:rPr lang="pt-BR" b="1" dirty="0" err="1"/>
+              <a:t>and</a:t>
+            </a:r>
+            <a:r>
+              <a:rPr lang="pt-BR" b="1" dirty="0"/>
+              <a:t> </a:t>
+            </a:r>
+            <a:r>
+              <a:rPr lang="pt-BR" b="1" dirty="0" err="1"/>
+              <a:t>Practice</a:t>
+            </a:r>
+            <a:r>
+              <a:rPr lang="pt-BR" b="1" dirty="0"/>
+              <a:t>.</a:t>
+            </a:r>
+            <a:r>
+              <a:rPr lang="pt-BR" dirty="0"/>
+              <a:t> </a:t>
+            </a:r>
+            <a:r>
+              <a:rPr lang="en-US" dirty="0"/>
+              <a:t>Melbourne: </a:t>
+            </a:r>
+            <a:r>
+              <a:rPr lang="en-US" dirty="0" err="1"/>
+              <a:t>OTexts</a:t>
+            </a:r>
+            <a:r>
+              <a:rPr lang="en-US" dirty="0"/>
+              <a:t>, 2018.</a:t>
+            </a:r>
+          </a:p>
+          <a:p>
+            <a:pPr marL="0" indent="0">
               <a:buNone/>
-              <a:tabLst>
-                <a:tab pos="228600" algn="l"/>
-              </a:tabLst>
             </a:pPr>
             <a:r>
-              <a:rPr lang="pt-BR" sz="1800" dirty="0">
-                <a:effectLst/>
-                <a:latin typeface="Times New Roman" panose="02020603050405020304" pitchFamily="18" charset="0"/>
-                <a:ea typeface="Times New Roman" panose="02020603050405020304" pitchFamily="18" charset="0"/>
-              </a:rPr>
-              <a:t>DEB C. </a:t>
-            </a:r>
-            <a:r>
-              <a:rPr lang="pt-BR" sz="1800" i="1" dirty="0">
-                <a:effectLst/>
-                <a:latin typeface="Times New Roman" panose="02020603050405020304" pitchFamily="18" charset="0"/>
-                <a:ea typeface="Times New Roman" panose="02020603050405020304" pitchFamily="18" charset="0"/>
-              </a:rPr>
-              <a:t>et al</a:t>
-            </a:r>
-            <a:r>
-              <a:rPr lang="pt-BR" sz="1800" dirty="0">
-                <a:effectLst/>
-                <a:latin typeface="Times New Roman" panose="02020603050405020304" pitchFamily="18" charset="0"/>
-                <a:ea typeface="Times New Roman" panose="02020603050405020304" pitchFamily="18" charset="0"/>
-              </a:rPr>
+              <a:rPr lang="en-US" dirty="0"/>
+              <a:t>KALEKO, D. </a:t>
+            </a:r>
+            <a:r>
+              <a:rPr lang="en-US" b="1" dirty="0"/>
+              <a:t>Feature Engineering — Handling Cyclical Features</a:t>
+            </a:r>
+            <a:r>
+              <a:rPr lang="en-US" dirty="0"/>
               <a:t>. </a:t>
             </a:r>
             <a:r>
-              <a:rPr lang="pt-BR" sz="1800" b="1" dirty="0">
-                <a:effectLst/>
-                <a:latin typeface="Times New Roman" panose="02020603050405020304" pitchFamily="18" charset="0"/>
-                <a:ea typeface="Times New Roman" panose="02020603050405020304" pitchFamily="18" charset="0"/>
-              </a:rPr>
-              <a:t>A review </a:t>
-            </a:r>
-            <a:r>
-              <a:rPr lang="pt-BR" sz="1800" b="1" dirty="0" err="1">
-                <a:effectLst/>
-                <a:latin typeface="Times New Roman" panose="02020603050405020304" pitchFamily="18" charset="0"/>
-                <a:ea typeface="Times New Roman" panose="02020603050405020304" pitchFamily="18" charset="0"/>
-              </a:rPr>
-              <a:t>on</a:t>
-            </a:r>
-            <a:r>
-              <a:rPr lang="pt-BR" sz="1800" b="1" dirty="0">
-                <a:effectLst/>
-                <a:latin typeface="Times New Roman" panose="02020603050405020304" pitchFamily="18" charset="0"/>
-                <a:ea typeface="Times New Roman" panose="02020603050405020304" pitchFamily="18" charset="0"/>
-              </a:rPr>
-              <a:t> time series </a:t>
-            </a:r>
-            <a:r>
-              <a:rPr lang="pt-BR" sz="1800" b="1" dirty="0" err="1">
-                <a:effectLst/>
-                <a:latin typeface="Times New Roman" panose="02020603050405020304" pitchFamily="18" charset="0"/>
-                <a:ea typeface="Times New Roman" panose="02020603050405020304" pitchFamily="18" charset="0"/>
-              </a:rPr>
-              <a:t>forecasting</a:t>
-            </a:r>
-            <a:r>
-              <a:rPr lang="pt-BR" sz="1800" b="1" dirty="0">
-                <a:effectLst/>
-                <a:latin typeface="Times New Roman" panose="02020603050405020304" pitchFamily="18" charset="0"/>
-                <a:ea typeface="Times New Roman" panose="02020603050405020304" pitchFamily="18" charset="0"/>
-              </a:rPr>
-              <a:t> </a:t>
-            </a:r>
-            <a:r>
-              <a:rPr lang="pt-BR" sz="1800" b="1" dirty="0" err="1">
-                <a:effectLst/>
-                <a:latin typeface="Times New Roman" panose="02020603050405020304" pitchFamily="18" charset="0"/>
-                <a:ea typeface="Times New Roman" panose="02020603050405020304" pitchFamily="18" charset="0"/>
-              </a:rPr>
-              <a:t>techniques</a:t>
-            </a:r>
-            <a:r>
-              <a:rPr lang="pt-BR" sz="1800" b="1" dirty="0">
-                <a:effectLst/>
-                <a:latin typeface="Times New Roman" panose="02020603050405020304" pitchFamily="18" charset="0"/>
-                <a:ea typeface="Times New Roman" panose="02020603050405020304" pitchFamily="18" charset="0"/>
-              </a:rPr>
-              <a:t> for </a:t>
-            </a:r>
-            <a:r>
-              <a:rPr lang="pt-BR" sz="1800" b="1" dirty="0" err="1">
-                <a:effectLst/>
-                <a:latin typeface="Times New Roman" panose="02020603050405020304" pitchFamily="18" charset="0"/>
-                <a:ea typeface="Times New Roman" panose="02020603050405020304" pitchFamily="18" charset="0"/>
-              </a:rPr>
-              <a:t>building</a:t>
-            </a:r>
-            <a:r>
-              <a:rPr lang="pt-BR" sz="1800" b="1" dirty="0">
-                <a:effectLst/>
-                <a:latin typeface="Times New Roman" panose="02020603050405020304" pitchFamily="18" charset="0"/>
-                <a:ea typeface="Times New Roman" panose="02020603050405020304" pitchFamily="18" charset="0"/>
-              </a:rPr>
-              <a:t> </a:t>
-            </a:r>
-            <a:r>
-              <a:rPr lang="pt-BR" sz="1800" b="1" dirty="0" err="1">
-                <a:effectLst/>
-                <a:latin typeface="Times New Roman" panose="02020603050405020304" pitchFamily="18" charset="0"/>
-                <a:ea typeface="Times New Roman" panose="02020603050405020304" pitchFamily="18" charset="0"/>
-              </a:rPr>
-              <a:t>energy</a:t>
-            </a:r>
-            <a:r>
-              <a:rPr lang="pt-BR" sz="1800" b="1" dirty="0">
-                <a:effectLst/>
-                <a:latin typeface="Times New Roman" panose="02020603050405020304" pitchFamily="18" charset="0"/>
-                <a:ea typeface="Times New Roman" panose="02020603050405020304" pitchFamily="18" charset="0"/>
-              </a:rPr>
-              <a:t> </a:t>
-            </a:r>
-            <a:r>
-              <a:rPr lang="pt-BR" sz="1800" b="1" dirty="0" err="1">
-                <a:effectLst/>
-                <a:latin typeface="Times New Roman" panose="02020603050405020304" pitchFamily="18" charset="0"/>
-                <a:ea typeface="Times New Roman" panose="02020603050405020304" pitchFamily="18" charset="0"/>
-              </a:rPr>
-              <a:t>Consumption</a:t>
-            </a:r>
-            <a:r>
-              <a:rPr lang="pt-BR" sz="1800" dirty="0">
-                <a:effectLst/>
-                <a:latin typeface="Times New Roman" panose="02020603050405020304" pitchFamily="18" charset="0"/>
-                <a:ea typeface="Times New Roman" panose="02020603050405020304" pitchFamily="18" charset="0"/>
-              </a:rPr>
-              <a:t>. </a:t>
-            </a:r>
-            <a:r>
-              <a:rPr lang="pt-BR" sz="1800" dirty="0" err="1">
-                <a:effectLst/>
-                <a:latin typeface="Times New Roman" panose="02020603050405020304" pitchFamily="18" charset="0"/>
-                <a:ea typeface="Times New Roman" panose="02020603050405020304" pitchFamily="18" charset="0"/>
-              </a:rPr>
-              <a:t>Renewable</a:t>
-            </a:r>
-            <a:r>
-              <a:rPr lang="pt-BR" sz="1800" dirty="0">
-                <a:effectLst/>
-                <a:latin typeface="Times New Roman" panose="02020603050405020304" pitchFamily="18" charset="0"/>
-                <a:ea typeface="Times New Roman" panose="02020603050405020304" pitchFamily="18" charset="0"/>
-              </a:rPr>
-              <a:t> </a:t>
-            </a:r>
-            <a:r>
-              <a:rPr lang="pt-BR" sz="1800" dirty="0" err="1">
-                <a:effectLst/>
-                <a:latin typeface="Times New Roman" panose="02020603050405020304" pitchFamily="18" charset="0"/>
-                <a:ea typeface="Times New Roman" panose="02020603050405020304" pitchFamily="18" charset="0"/>
-              </a:rPr>
-              <a:t>and</a:t>
-            </a:r>
-            <a:r>
-              <a:rPr lang="pt-BR" sz="1800" dirty="0">
-                <a:effectLst/>
-                <a:latin typeface="Times New Roman" panose="02020603050405020304" pitchFamily="18" charset="0"/>
-                <a:ea typeface="Times New Roman" panose="02020603050405020304" pitchFamily="18" charset="0"/>
-              </a:rPr>
-              <a:t> </a:t>
-            </a:r>
-            <a:r>
-              <a:rPr lang="pt-BR" sz="1800" dirty="0" err="1">
-                <a:effectLst/>
-                <a:latin typeface="Times New Roman" panose="02020603050405020304" pitchFamily="18" charset="0"/>
-                <a:ea typeface="Times New Roman" panose="02020603050405020304" pitchFamily="18" charset="0"/>
-              </a:rPr>
-              <a:t>Sustainable</a:t>
-            </a:r>
-            <a:r>
-              <a:rPr lang="pt-BR" sz="1800" dirty="0">
-                <a:effectLst/>
-                <a:latin typeface="Times New Roman" panose="02020603050405020304" pitchFamily="18" charset="0"/>
-                <a:ea typeface="Times New Roman" panose="02020603050405020304" pitchFamily="18" charset="0"/>
-              </a:rPr>
-              <a:t> Energy Reviews. p-9-12. 2017.</a:t>
-            </a:r>
-          </a:p>
-          <a:p>
-            <a:pPr marL="0" lvl="0" indent="0" algn="just">
+              <a:rPr lang="pt-BR" dirty="0"/>
+              <a:t>Disponível em: &lt;https://</a:t>
+            </a:r>
+            <a:r>
+              <a:rPr lang="pt-BR" dirty="0" err="1"/>
+              <a:t>blog.davidkaleko.com</a:t>
+            </a:r>
+            <a:r>
+              <a:rPr lang="pt-BR" dirty="0"/>
+              <a:t>/feature-</a:t>
+            </a:r>
+            <a:r>
+              <a:rPr lang="pt-BR" dirty="0" err="1"/>
+              <a:t>engineering</a:t>
+            </a:r>
+            <a:r>
+              <a:rPr lang="pt-BR" dirty="0"/>
+              <a:t>-</a:t>
+            </a:r>
+            <a:r>
+              <a:rPr lang="pt-BR" dirty="0" err="1"/>
+              <a:t>cyclical-features.html</a:t>
+            </a:r>
+            <a:r>
+              <a:rPr lang="pt-BR" dirty="0"/>
+              <a:t>\&gt;. Acesso em: 13 jun. 2021.</a:t>
+            </a:r>
+          </a:p>
+          <a:p>
+            <a:pPr marL="0" indent="0">
               <a:buNone/>
-              <a:tabLst>
-                <a:tab pos="228600" algn="l"/>
-              </a:tabLst>
             </a:pPr>
-            <a:r>
-              <a:rPr lang="pt-BR" sz="1800" dirty="0">
-                <a:effectLst/>
-                <a:latin typeface="Times New Roman" panose="02020603050405020304" pitchFamily="18" charset="0"/>
-                <a:ea typeface="Times New Roman" panose="02020603050405020304" pitchFamily="18" charset="0"/>
-              </a:rPr>
-              <a:t>GONÇALVES, A. C. </a:t>
-            </a:r>
-            <a:r>
-              <a:rPr lang="pt-BR" sz="1800" b="1" dirty="0" err="1">
-                <a:effectLst/>
-                <a:latin typeface="Times New Roman" panose="02020603050405020304" pitchFamily="18" charset="0"/>
-                <a:ea typeface="Times New Roman" panose="02020603050405020304" pitchFamily="18" charset="0"/>
-              </a:rPr>
-              <a:t>Eficientização</a:t>
-            </a:r>
-            <a:r>
-              <a:rPr lang="pt-BR" sz="1800" b="1" dirty="0">
-                <a:effectLst/>
-                <a:latin typeface="Times New Roman" panose="02020603050405020304" pitchFamily="18" charset="0"/>
-                <a:ea typeface="Times New Roman" panose="02020603050405020304" pitchFamily="18" charset="0"/>
-              </a:rPr>
-              <a:t> Energética Em Prédios Públicos: Um Desafio Aos Gestores Municipais Frente Aos Requisitos De Governança E Sustentabilidade</a:t>
-            </a:r>
-            <a:r>
-              <a:rPr lang="pt-BR" sz="1800" dirty="0">
-                <a:effectLst/>
-                <a:latin typeface="Times New Roman" panose="02020603050405020304" pitchFamily="18" charset="0"/>
-                <a:ea typeface="Times New Roman" panose="02020603050405020304" pitchFamily="18" charset="0"/>
-              </a:rPr>
-              <a:t>, São Paulo. p. 1-25, 2012.</a:t>
-            </a:r>
-          </a:p>
-          <a:p>
-            <a:pPr marL="0" lvl="0" indent="0" algn="just">
-              <a:buNone/>
-              <a:tabLst>
-                <a:tab pos="228600" algn="l"/>
-              </a:tabLst>
-            </a:pPr>
-            <a:r>
-              <a:rPr lang="en-US" sz="1800" dirty="0">
-                <a:effectLst/>
-                <a:latin typeface="Times New Roman" panose="02020603050405020304" pitchFamily="18" charset="0"/>
-                <a:ea typeface="Times New Roman" panose="02020603050405020304" pitchFamily="18" charset="0"/>
-              </a:rPr>
-              <a:t>GOOGLE INC. </a:t>
-            </a:r>
-            <a:r>
-              <a:rPr lang="en-US" sz="1800" b="1" dirty="0">
-                <a:effectLst/>
-                <a:latin typeface="Times New Roman" panose="02020603050405020304" pitchFamily="18" charset="0"/>
-                <a:ea typeface="Times New Roman" panose="02020603050405020304" pitchFamily="18" charset="0"/>
-              </a:rPr>
-              <a:t>Machine Learning Crash Course. </a:t>
-            </a:r>
-            <a:r>
-              <a:rPr lang="pt-BR" sz="1800" dirty="0" err="1">
-                <a:effectLst/>
-                <a:latin typeface="Times New Roman" panose="02020603050405020304" pitchFamily="18" charset="0"/>
-                <a:ea typeface="Times New Roman" panose="02020603050405020304" pitchFamily="18" charset="0"/>
-              </a:rPr>
-              <a:t>Developers</a:t>
-            </a:r>
-            <a:r>
-              <a:rPr lang="pt-BR" sz="1800" dirty="0">
-                <a:effectLst/>
-                <a:latin typeface="Times New Roman" panose="02020603050405020304" pitchFamily="18" charset="0"/>
-                <a:ea typeface="Times New Roman" panose="02020603050405020304" pitchFamily="18" charset="0"/>
-              </a:rPr>
-              <a:t> Google. Disponível em: &lt;https://developers.google.com/</a:t>
-            </a:r>
-            <a:r>
-              <a:rPr lang="pt-BR" sz="1800" dirty="0" err="1">
-                <a:effectLst/>
-                <a:latin typeface="Times New Roman" panose="02020603050405020304" pitchFamily="18" charset="0"/>
-                <a:ea typeface="Times New Roman" panose="02020603050405020304" pitchFamily="18" charset="0"/>
-              </a:rPr>
-              <a:t>machine-learning</a:t>
-            </a:r>
-            <a:r>
-              <a:rPr lang="pt-BR" sz="1800" dirty="0">
-                <a:effectLst/>
-                <a:latin typeface="Times New Roman" panose="02020603050405020304" pitchFamily="18" charset="0"/>
-                <a:ea typeface="Times New Roman" panose="02020603050405020304" pitchFamily="18" charset="0"/>
-              </a:rPr>
-              <a:t>/crash-</a:t>
-            </a:r>
-            <a:r>
-              <a:rPr lang="pt-BR" sz="1800" dirty="0" err="1">
-                <a:effectLst/>
-                <a:latin typeface="Times New Roman" panose="02020603050405020304" pitchFamily="18" charset="0"/>
-                <a:ea typeface="Times New Roman" panose="02020603050405020304" pitchFamily="18" charset="0"/>
-              </a:rPr>
-              <a:t>course</a:t>
-            </a:r>
-            <a:r>
-              <a:rPr lang="pt-BR" sz="1800" dirty="0">
-                <a:effectLst/>
-                <a:latin typeface="Times New Roman" panose="02020603050405020304" pitchFamily="18" charset="0"/>
-                <a:ea typeface="Times New Roman" panose="02020603050405020304" pitchFamily="18" charset="0"/>
-              </a:rPr>
-              <a:t>/training-</a:t>
-            </a:r>
-            <a:r>
-              <a:rPr lang="pt-BR" sz="1800" dirty="0" err="1">
-                <a:effectLst/>
-                <a:latin typeface="Times New Roman" panose="02020603050405020304" pitchFamily="18" charset="0"/>
-                <a:ea typeface="Times New Roman" panose="02020603050405020304" pitchFamily="18" charset="0"/>
-              </a:rPr>
-              <a:t>and</a:t>
-            </a:r>
-            <a:r>
-              <a:rPr lang="pt-BR" sz="1800" dirty="0">
-                <a:effectLst/>
-                <a:latin typeface="Times New Roman" panose="02020603050405020304" pitchFamily="18" charset="0"/>
-                <a:ea typeface="Times New Roman" panose="02020603050405020304" pitchFamily="18" charset="0"/>
-              </a:rPr>
-              <a:t>-</a:t>
-            </a:r>
-            <a:r>
-              <a:rPr lang="pt-BR" sz="1800" dirty="0" err="1">
-                <a:effectLst/>
-                <a:latin typeface="Times New Roman" panose="02020603050405020304" pitchFamily="18" charset="0"/>
-                <a:ea typeface="Times New Roman" panose="02020603050405020304" pitchFamily="18" charset="0"/>
-              </a:rPr>
-              <a:t>test</a:t>
-            </a:r>
-            <a:r>
-              <a:rPr lang="pt-BR" sz="1800" dirty="0">
-                <a:effectLst/>
-                <a:latin typeface="Times New Roman" panose="02020603050405020304" pitchFamily="18" charset="0"/>
-                <a:ea typeface="Times New Roman" panose="02020603050405020304" pitchFamily="18" charset="0"/>
-              </a:rPr>
-              <a:t>-sets&gt;. Acesso em 12 de outubro de 2020.</a:t>
-            </a:r>
-          </a:p>
-          <a:p>
-            <a:pPr marL="0" lvl="0" indent="0" algn="just">
-              <a:buNone/>
-              <a:tabLst>
-                <a:tab pos="228600" algn="l"/>
-              </a:tabLst>
-            </a:pPr>
-            <a:r>
-              <a:rPr lang="en-US" sz="1800" dirty="0">
-                <a:effectLst/>
-                <a:latin typeface="Times New Roman" panose="02020603050405020304" pitchFamily="18" charset="0"/>
-                <a:ea typeface="Times New Roman" panose="02020603050405020304" pitchFamily="18" charset="0"/>
-              </a:rPr>
-              <a:t>HOSCH, W. L. </a:t>
-            </a:r>
-            <a:r>
-              <a:rPr lang="en-US" sz="1800" b="1" dirty="0">
-                <a:effectLst/>
-                <a:latin typeface="Times New Roman" panose="02020603050405020304" pitchFamily="18" charset="0"/>
-                <a:ea typeface="Times New Roman" panose="02020603050405020304" pitchFamily="18" charset="0"/>
-              </a:rPr>
-              <a:t>Machine learning</a:t>
-            </a:r>
-            <a:r>
-              <a:rPr lang="en-US" sz="1800" dirty="0">
-                <a:effectLst/>
-                <a:latin typeface="Times New Roman" panose="02020603050405020304" pitchFamily="18" charset="0"/>
-                <a:ea typeface="Times New Roman" panose="02020603050405020304" pitchFamily="18" charset="0"/>
-              </a:rPr>
-              <a:t>. </a:t>
-            </a:r>
-            <a:r>
-              <a:rPr lang="pt-BR" sz="1800" dirty="0" err="1">
-                <a:effectLst/>
-                <a:latin typeface="Times New Roman" panose="02020603050405020304" pitchFamily="18" charset="0"/>
-                <a:ea typeface="Times New Roman" panose="02020603050405020304" pitchFamily="18" charset="0"/>
-              </a:rPr>
-              <a:t>Encyclopædia</a:t>
-            </a:r>
-            <a:r>
-              <a:rPr lang="pt-BR" sz="1800" dirty="0">
-                <a:effectLst/>
-                <a:latin typeface="Times New Roman" panose="02020603050405020304" pitchFamily="18" charset="0"/>
-                <a:ea typeface="Times New Roman" panose="02020603050405020304" pitchFamily="18" charset="0"/>
-              </a:rPr>
-              <a:t> </a:t>
-            </a:r>
-            <a:r>
-              <a:rPr lang="pt-BR" sz="1800" dirty="0" err="1">
-                <a:effectLst/>
-                <a:latin typeface="Times New Roman" panose="02020603050405020304" pitchFamily="18" charset="0"/>
-                <a:ea typeface="Times New Roman" panose="02020603050405020304" pitchFamily="18" charset="0"/>
-              </a:rPr>
-              <a:t>Britannica</a:t>
-            </a:r>
-            <a:r>
-              <a:rPr lang="pt-BR" sz="1800" dirty="0">
-                <a:effectLst/>
-                <a:latin typeface="Times New Roman" panose="02020603050405020304" pitchFamily="18" charset="0"/>
-                <a:ea typeface="Times New Roman" panose="02020603050405020304" pitchFamily="18" charset="0"/>
-              </a:rPr>
-              <a:t>. Disponível em: &lt;https://www.britannica.com/</a:t>
-            </a:r>
-            <a:r>
-              <a:rPr lang="pt-BR" sz="1800" dirty="0" err="1">
-                <a:effectLst/>
-                <a:latin typeface="Times New Roman" panose="02020603050405020304" pitchFamily="18" charset="0"/>
-                <a:ea typeface="Times New Roman" panose="02020603050405020304" pitchFamily="18" charset="0"/>
-              </a:rPr>
-              <a:t>technology</a:t>
-            </a:r>
-            <a:r>
-              <a:rPr lang="pt-BR" sz="1800" dirty="0">
-                <a:effectLst/>
-                <a:latin typeface="Times New Roman" panose="02020603050405020304" pitchFamily="18" charset="0"/>
-                <a:ea typeface="Times New Roman" panose="02020603050405020304" pitchFamily="18" charset="0"/>
-              </a:rPr>
-              <a:t>/</a:t>
-            </a:r>
-            <a:r>
-              <a:rPr lang="pt-BR" sz="1800" dirty="0" err="1">
-                <a:effectLst/>
-                <a:latin typeface="Times New Roman" panose="02020603050405020304" pitchFamily="18" charset="0"/>
-                <a:ea typeface="Times New Roman" panose="02020603050405020304" pitchFamily="18" charset="0"/>
-              </a:rPr>
-              <a:t>machine-learning</a:t>
-            </a:r>
-            <a:r>
-              <a:rPr lang="pt-BR" sz="1800" dirty="0">
-                <a:effectLst/>
-                <a:latin typeface="Times New Roman" panose="02020603050405020304" pitchFamily="18" charset="0"/>
-                <a:ea typeface="Times New Roman" panose="02020603050405020304" pitchFamily="18" charset="0"/>
-              </a:rPr>
-              <a:t>&gt;. Acesso em 24 de fevereiro de 2021.</a:t>
-            </a:r>
-          </a:p>
-          <a:p>
-            <a:pPr marL="0" lvl="0" indent="0" algn="just">
-              <a:buNone/>
-              <a:tabLst>
-                <a:tab pos="228600" algn="l"/>
-              </a:tabLst>
-            </a:pPr>
-            <a:r>
-              <a:rPr lang="pt-BR" sz="1800" dirty="0">
-                <a:effectLst/>
-                <a:latin typeface="Times New Roman" panose="02020603050405020304" pitchFamily="18" charset="0"/>
-                <a:ea typeface="Times New Roman" panose="02020603050405020304" pitchFamily="18" charset="0"/>
-              </a:rPr>
-              <a:t>INEE, Instituto Nacional de Eficiência Energética. </a:t>
-            </a:r>
-            <a:r>
-              <a:rPr lang="pt-BR" sz="1800" b="1" dirty="0">
-                <a:effectLst/>
-                <a:latin typeface="Times New Roman" panose="02020603050405020304" pitchFamily="18" charset="0"/>
-                <a:ea typeface="Times New Roman" panose="02020603050405020304" pitchFamily="18" charset="0"/>
-              </a:rPr>
-              <a:t>O que é Eficiência Energética</a:t>
-            </a:r>
-            <a:r>
-              <a:rPr lang="pt-BR" sz="1800" dirty="0">
-                <a:effectLst/>
-                <a:latin typeface="Times New Roman" panose="02020603050405020304" pitchFamily="18" charset="0"/>
-                <a:ea typeface="Times New Roman" panose="02020603050405020304" pitchFamily="18" charset="0"/>
-              </a:rPr>
-              <a:t>. Disponível em: &lt;http://www.inee.org.br/</a:t>
-            </a:r>
-            <a:r>
-              <a:rPr lang="pt-BR" sz="1800" dirty="0" err="1">
-                <a:effectLst/>
-                <a:latin typeface="Times New Roman" panose="02020603050405020304" pitchFamily="18" charset="0"/>
-                <a:ea typeface="Times New Roman" panose="02020603050405020304" pitchFamily="18" charset="0"/>
-              </a:rPr>
-              <a:t>eficiencia_o_que_eh.asp?Cat</a:t>
-            </a:r>
-            <a:r>
-              <a:rPr lang="pt-BR" sz="1800" dirty="0">
-                <a:effectLst/>
-                <a:latin typeface="Times New Roman" panose="02020603050405020304" pitchFamily="18" charset="0"/>
-                <a:ea typeface="Times New Roman" panose="02020603050405020304" pitchFamily="18" charset="0"/>
-              </a:rPr>
-              <a:t>=</a:t>
-            </a:r>
-            <a:r>
-              <a:rPr lang="pt-BR" sz="1800" dirty="0" err="1">
-                <a:effectLst/>
-                <a:latin typeface="Times New Roman" panose="02020603050405020304" pitchFamily="18" charset="0"/>
-                <a:ea typeface="Times New Roman" panose="02020603050405020304" pitchFamily="18" charset="0"/>
-              </a:rPr>
-              <a:t>eficiencia</a:t>
-            </a:r>
-            <a:r>
-              <a:rPr lang="pt-BR" sz="1800" dirty="0">
-                <a:effectLst/>
-                <a:latin typeface="Times New Roman" panose="02020603050405020304" pitchFamily="18" charset="0"/>
-                <a:ea typeface="Times New Roman" panose="02020603050405020304" pitchFamily="18" charset="0"/>
-              </a:rPr>
-              <a:t>&gt;. Acesso em 03 de novembro de 2020.</a:t>
-            </a:r>
+            <a:endParaRPr lang="pt-BR" dirty="0"/>
           </a:p>
         </p:txBody>
       </p:sp>
@@ -19651,7 +18522,7 @@
             <a:pPr rtl="0"/>
             <a:fld id="{3A98EE3D-8CD1-4C3F-BD1C-C98C9596463C}" type="slidenum">
               <a:rPr lang="en-US" smtClean="0"/>
-              <a:t>29</a:t>
+              <a:t>27</a:t>
             </a:fld>
             <a:r>
               <a:rPr lang="en-US" dirty="0"/>
@@ -19660,53 +18531,6 @@
           </a:p>
         </p:txBody>
       </p:sp>
-      <p:pic>
-        <p:nvPicPr>
-          <p:cNvPr id="7" name="Picture 2">
-            <a:extLst>
-              <a:ext uri="{FF2B5EF4-FFF2-40B4-BE49-F238E27FC236}">
-                <a16:creationId xmlns:a16="http://schemas.microsoft.com/office/drawing/2014/main" id="{6170CD65-EDA2-4BDE-83D3-9C048772A7D6}"/>
-              </a:ext>
-            </a:extLst>
-          </p:cNvPr>
-          <p:cNvPicPr>
-            <a:picLocks noChangeAspect="1" noChangeArrowheads="1"/>
-          </p:cNvPicPr>
-          <p:nvPr/>
-        </p:nvPicPr>
-        <p:blipFill>
-          <a:blip r:embed="rId2">
-            <a:extLst>
-              <a:ext uri="{28A0092B-C50C-407E-A947-70E740481C1C}">
-                <a14:useLocalDpi xmlns:a14="http://schemas.microsoft.com/office/drawing/2010/main" val="0"/>
-              </a:ext>
-            </a:extLst>
-          </a:blip>
-          <a:srcRect/>
-          <a:stretch>
-            <a:fillRect/>
-          </a:stretch>
-        </p:blipFill>
-        <p:spPr bwMode="auto">
-          <a:xfrm>
-            <a:off x="10970506" y="1003873"/>
-            <a:ext cx="887003" cy="887003"/>
-          </a:xfrm>
-          <a:prstGeom prst="rect">
-            <a:avLst/>
-          </a:prstGeom>
-          <a:noFill/>
-          <a:extLst>
-            <a:ext uri="{909E8E84-426E-40DD-AFC4-6F175D3DCCD1}">
-              <a14:hiddenFill xmlns:a14="http://schemas.microsoft.com/office/drawing/2010/main">
-                <a:solidFill>
-                  <a:srgbClr val="FFFFFF"/>
-                </a:solidFill>
-              </a14:hiddenFill>
-            </a:ext>
-          </a:extLst>
-        </p:spPr>
-      </p:pic>
       <p:sp>
         <p:nvSpPr>
           <p:cNvPr id="8" name="Espaço Reservado para Conteúdo 2">
@@ -19953,806 +18777,295 @@
             </a:lvl9pPr>
           </a:lstStyle>
           <a:p>
-            <a:pPr marL="0" indent="0" algn="just">
+            <a:pPr marL="0" indent="0">
               <a:buNone/>
-              <a:tabLst>
-                <a:tab pos="228600" algn="l"/>
-              </a:tabLst>
             </a:pPr>
             <a:r>
-              <a:rPr lang="en-US" sz="1600" dirty="0">
-                <a:effectLst/>
-                <a:latin typeface="Times New Roman" panose="02020603050405020304" pitchFamily="18" charset="0"/>
-                <a:ea typeface="Times New Roman" panose="02020603050405020304" pitchFamily="18" charset="0"/>
-              </a:rPr>
-              <a:t>KALEKO, D. </a:t>
-            </a:r>
-            <a:r>
-              <a:rPr lang="en-US" sz="1600" b="1" dirty="0">
-                <a:effectLst/>
-                <a:latin typeface="Times New Roman" panose="02020603050405020304" pitchFamily="18" charset="0"/>
-                <a:ea typeface="Times New Roman" panose="02020603050405020304" pitchFamily="18" charset="0"/>
-              </a:rPr>
-              <a:t>Feature Engineering - Handling Cyclical Features</a:t>
-            </a:r>
-            <a:r>
-              <a:rPr lang="en-US" sz="1600" dirty="0">
-                <a:effectLst/>
-                <a:latin typeface="Times New Roman" panose="02020603050405020304" pitchFamily="18" charset="0"/>
-                <a:ea typeface="Times New Roman" panose="02020603050405020304" pitchFamily="18" charset="0"/>
-              </a:rPr>
+              <a:rPr lang="pt-BR" dirty="0"/>
+              <a:t>MARTINS, P.; LAUGENI, F. P. </a:t>
+            </a:r>
+            <a:r>
+              <a:rPr lang="pt-BR" b="1" dirty="0"/>
+              <a:t>Administração da Produção.</a:t>
+            </a:r>
+            <a:r>
+              <a:rPr lang="pt-BR" dirty="0"/>
+              <a:t> São Paulo: Editora Saraiva, 2005.</a:t>
+            </a:r>
+          </a:p>
+          <a:p>
+            <a:pPr marL="0" indent="0">
+              <a:buNone/>
+            </a:pPr>
+            <a:r>
+              <a:rPr lang="pt-BR" dirty="0" err="1"/>
+              <a:t>McKINNEY</a:t>
+            </a:r>
+            <a:r>
+              <a:rPr lang="pt-BR" dirty="0"/>
+              <a:t>, W. </a:t>
+            </a:r>
+            <a:r>
+              <a:rPr lang="pt-BR" b="1" dirty="0"/>
+              <a:t>Python Para Análise de Dados.</a:t>
+            </a:r>
+            <a:r>
+              <a:rPr lang="pt-BR" dirty="0"/>
+              <a:t> Tratamento de dados com Pandas, </a:t>
+            </a:r>
+            <a:r>
+              <a:rPr lang="pt-BR" dirty="0" err="1"/>
+              <a:t>Numpy</a:t>
+            </a:r>
+            <a:r>
+              <a:rPr lang="pt-BR" dirty="0"/>
+              <a:t> e </a:t>
+            </a:r>
+            <a:r>
+              <a:rPr lang="pt-BR" dirty="0" err="1"/>
+              <a:t>iPython</a:t>
+            </a:r>
+            <a:r>
+              <a:rPr lang="pt-BR" dirty="0"/>
               <a:t>. </a:t>
             </a:r>
             <a:r>
-              <a:rPr lang="pt-BR" sz="1600" dirty="0">
-                <a:effectLst/>
-                <a:latin typeface="Times New Roman" panose="02020603050405020304" pitchFamily="18" charset="0"/>
-                <a:ea typeface="Times New Roman" panose="02020603050405020304" pitchFamily="18" charset="0"/>
-              </a:rPr>
-              <a:t>Disponível em: &lt;http://blog.davidkaleko.com/feature-engineering-cyclical-features.html&gt;. Acesso em 13 de junho de 2021.</a:t>
-            </a:r>
-          </a:p>
-          <a:p>
-            <a:pPr marL="0" lvl="0" indent="0" algn="just">
+              <a:rPr lang="en-US" dirty="0"/>
+              <a:t>1. ed. São Paulo: </a:t>
+            </a:r>
+            <a:r>
+              <a:rPr lang="en-US" dirty="0" err="1"/>
+              <a:t>Novatec</a:t>
+            </a:r>
+            <a:r>
+              <a:rPr lang="en-US" dirty="0"/>
+              <a:t> Editora, 2019.</a:t>
+            </a:r>
+          </a:p>
+          <a:p>
+            <a:pPr marL="0" indent="0">
               <a:buNone/>
-              <a:tabLst>
-                <a:tab pos="228600" algn="l"/>
-              </a:tabLst>
             </a:pPr>
             <a:r>
-              <a:rPr lang="pt-BR" sz="1600" dirty="0">
-                <a:effectLst/>
-                <a:latin typeface="Times New Roman" panose="02020603050405020304" pitchFamily="18" charset="0"/>
-                <a:ea typeface="Times New Roman" panose="02020603050405020304" pitchFamily="18" charset="0"/>
-              </a:rPr>
-              <a:t>MCKINNEY, W. </a:t>
-            </a:r>
-            <a:r>
-              <a:rPr lang="pt-BR" sz="1600" b="1" dirty="0">
-                <a:effectLst/>
-                <a:latin typeface="Times New Roman" panose="02020603050405020304" pitchFamily="18" charset="0"/>
-                <a:ea typeface="Times New Roman" panose="02020603050405020304" pitchFamily="18" charset="0"/>
-              </a:rPr>
-              <a:t>Python Para Análise de Dados</a:t>
-            </a:r>
-            <a:r>
-              <a:rPr lang="pt-BR" sz="1600" dirty="0">
-                <a:effectLst/>
-                <a:latin typeface="Times New Roman" panose="02020603050405020304" pitchFamily="18" charset="0"/>
-                <a:ea typeface="Times New Roman" panose="02020603050405020304" pitchFamily="18" charset="0"/>
-              </a:rPr>
-              <a:t>. Tratamento de dados com Pandas, </a:t>
-            </a:r>
-            <a:r>
-              <a:rPr lang="pt-BR" sz="1600" dirty="0" err="1">
-                <a:effectLst/>
-                <a:latin typeface="Times New Roman" panose="02020603050405020304" pitchFamily="18" charset="0"/>
-                <a:ea typeface="Times New Roman" panose="02020603050405020304" pitchFamily="18" charset="0"/>
-              </a:rPr>
-              <a:t>Numpy</a:t>
-            </a:r>
-            <a:r>
-              <a:rPr lang="pt-BR" sz="1600" dirty="0">
-                <a:effectLst/>
-                <a:latin typeface="Times New Roman" panose="02020603050405020304" pitchFamily="18" charset="0"/>
-                <a:ea typeface="Times New Roman" panose="02020603050405020304" pitchFamily="18" charset="0"/>
-              </a:rPr>
-              <a:t> e </a:t>
-            </a:r>
-            <a:r>
-              <a:rPr lang="pt-BR" sz="1600" dirty="0" err="1">
-                <a:effectLst/>
-                <a:latin typeface="Times New Roman" panose="02020603050405020304" pitchFamily="18" charset="0"/>
-                <a:ea typeface="Times New Roman" panose="02020603050405020304" pitchFamily="18" charset="0"/>
-              </a:rPr>
-              <a:t>iPython</a:t>
-            </a:r>
-            <a:r>
-              <a:rPr lang="pt-BR" sz="1600" dirty="0">
-                <a:effectLst/>
-                <a:latin typeface="Times New Roman" panose="02020603050405020304" pitchFamily="18" charset="0"/>
-                <a:ea typeface="Times New Roman" panose="02020603050405020304" pitchFamily="18" charset="0"/>
-              </a:rPr>
-              <a:t>. Primeira Edição, 2019. São Paulo: </a:t>
-            </a:r>
-            <a:r>
-              <a:rPr lang="pt-BR" sz="1600" dirty="0" err="1">
-                <a:effectLst/>
-                <a:latin typeface="Times New Roman" panose="02020603050405020304" pitchFamily="18" charset="0"/>
-                <a:ea typeface="Times New Roman" panose="02020603050405020304" pitchFamily="18" charset="0"/>
-              </a:rPr>
-              <a:t>Novatec</a:t>
-            </a:r>
-            <a:r>
-              <a:rPr lang="pt-BR" sz="1600" dirty="0">
-                <a:effectLst/>
-                <a:latin typeface="Times New Roman" panose="02020603050405020304" pitchFamily="18" charset="0"/>
-                <a:ea typeface="Times New Roman" panose="02020603050405020304" pitchFamily="18" charset="0"/>
-              </a:rPr>
-              <a:t> Editora.</a:t>
-            </a:r>
-          </a:p>
-          <a:p>
-            <a:pPr marL="0" lvl="0" indent="0" algn="just">
+              <a:rPr lang="en-US" dirty="0"/>
+              <a:t>MÖBIUS. </a:t>
+            </a:r>
+            <a:r>
+              <a:rPr lang="en-US" b="1" dirty="0"/>
+              <a:t>Building Sites Power Consumption.</a:t>
+            </a:r>
+            <a:r>
+              <a:rPr lang="en-US" dirty="0"/>
+              <a:t> Forecast energy consumption in different time steps and granularities. </a:t>
+            </a:r>
+            <a:r>
+              <a:rPr lang="pt-BR" dirty="0"/>
+              <a:t>Disponível em: &lt;https://</a:t>
+            </a:r>
+            <a:r>
+              <a:rPr lang="pt-BR" dirty="0" err="1"/>
+              <a:t>www.kaggle.com</a:t>
+            </a:r>
+            <a:r>
+              <a:rPr lang="pt-BR" dirty="0"/>
+              <a:t>/</a:t>
+            </a:r>
+            <a:r>
+              <a:rPr lang="pt-BR" dirty="0" err="1"/>
+              <a:t>arashnic</a:t>
+            </a:r>
+            <a:r>
+              <a:rPr lang="pt-BR" dirty="0"/>
+              <a:t>/</a:t>
+            </a:r>
+            <a:r>
+              <a:rPr lang="pt-BR" dirty="0" err="1"/>
+              <a:t>building</a:t>
+            </a:r>
+            <a:r>
+              <a:rPr lang="pt-BR" dirty="0"/>
+              <a:t>-sites-</a:t>
+            </a:r>
+            <a:r>
+              <a:rPr lang="pt-BR" dirty="0" err="1"/>
+              <a:t>power</a:t>
+            </a:r>
+            <a:r>
+              <a:rPr lang="pt-BR" dirty="0"/>
+              <a:t>-</a:t>
+            </a:r>
+            <a:r>
+              <a:rPr lang="pt-BR" dirty="0" err="1"/>
+              <a:t>consumption-dataset</a:t>
+            </a:r>
+            <a:r>
+              <a:rPr lang="pt-BR" dirty="0"/>
+              <a:t>\&gt;. Acesso em: 12 jun. 2021.</a:t>
+            </a:r>
+          </a:p>
+          <a:p>
+            <a:pPr marL="0" indent="0">
               <a:buNone/>
-              <a:tabLst>
-                <a:tab pos="228600" algn="l"/>
-              </a:tabLst>
             </a:pPr>
             <a:r>
-              <a:rPr lang="en-US" sz="1600" dirty="0">
-                <a:effectLst/>
-                <a:latin typeface="Times New Roman" panose="02020603050405020304" pitchFamily="18" charset="0"/>
-                <a:ea typeface="Times New Roman" panose="02020603050405020304" pitchFamily="18" charset="0"/>
-              </a:rPr>
-              <a:t>MÖBIUS. </a:t>
-            </a:r>
-            <a:r>
-              <a:rPr lang="en-US" sz="1600" b="1" dirty="0">
-                <a:effectLst/>
-                <a:latin typeface="Times New Roman" panose="02020603050405020304" pitchFamily="18" charset="0"/>
-                <a:ea typeface="Times New Roman" panose="02020603050405020304" pitchFamily="18" charset="0"/>
-              </a:rPr>
-              <a:t>Building Sites Power Consumption</a:t>
-            </a:r>
-            <a:r>
-              <a:rPr lang="en-US" sz="1600" dirty="0">
-                <a:effectLst/>
-                <a:latin typeface="Times New Roman" panose="02020603050405020304" pitchFamily="18" charset="0"/>
-                <a:ea typeface="Times New Roman" panose="02020603050405020304" pitchFamily="18" charset="0"/>
-              </a:rPr>
-              <a:t>. Forecast energy consumption in different time steps and granularities. </a:t>
-            </a:r>
-            <a:r>
-              <a:rPr lang="pt-BR" sz="1600" dirty="0">
-                <a:effectLst/>
-                <a:latin typeface="Times New Roman" panose="02020603050405020304" pitchFamily="18" charset="0"/>
-                <a:ea typeface="Times New Roman" panose="02020603050405020304" pitchFamily="18" charset="0"/>
-              </a:rPr>
-              <a:t>Disponível em: &lt; https://www.kaggle.com/</a:t>
-            </a:r>
-            <a:r>
-              <a:rPr lang="pt-BR" sz="1600" dirty="0" err="1">
-                <a:effectLst/>
-                <a:latin typeface="Times New Roman" panose="02020603050405020304" pitchFamily="18" charset="0"/>
-                <a:ea typeface="Times New Roman" panose="02020603050405020304" pitchFamily="18" charset="0"/>
-              </a:rPr>
-              <a:t>arashnic</a:t>
-            </a:r>
-            <a:r>
-              <a:rPr lang="pt-BR" sz="1600" dirty="0">
-                <a:effectLst/>
-                <a:latin typeface="Times New Roman" panose="02020603050405020304" pitchFamily="18" charset="0"/>
-                <a:ea typeface="Times New Roman" panose="02020603050405020304" pitchFamily="18" charset="0"/>
-              </a:rPr>
-              <a:t>/</a:t>
-            </a:r>
-            <a:r>
-              <a:rPr lang="pt-BR" sz="1600" dirty="0" err="1">
-                <a:effectLst/>
-                <a:latin typeface="Times New Roman" panose="02020603050405020304" pitchFamily="18" charset="0"/>
-                <a:ea typeface="Times New Roman" panose="02020603050405020304" pitchFamily="18" charset="0"/>
-              </a:rPr>
-              <a:t>building</a:t>
-            </a:r>
-            <a:r>
-              <a:rPr lang="pt-BR" sz="1600" dirty="0">
-                <a:effectLst/>
-                <a:latin typeface="Times New Roman" panose="02020603050405020304" pitchFamily="18" charset="0"/>
-                <a:ea typeface="Times New Roman" panose="02020603050405020304" pitchFamily="18" charset="0"/>
-              </a:rPr>
-              <a:t>-sites-</a:t>
-            </a:r>
-            <a:r>
-              <a:rPr lang="pt-BR" sz="1600" dirty="0" err="1">
-                <a:effectLst/>
-                <a:latin typeface="Times New Roman" panose="02020603050405020304" pitchFamily="18" charset="0"/>
-                <a:ea typeface="Times New Roman" panose="02020603050405020304" pitchFamily="18" charset="0"/>
-              </a:rPr>
-              <a:t>power</a:t>
-            </a:r>
-            <a:r>
-              <a:rPr lang="pt-BR" sz="1600" dirty="0">
-                <a:effectLst/>
-                <a:latin typeface="Times New Roman" panose="02020603050405020304" pitchFamily="18" charset="0"/>
-                <a:ea typeface="Times New Roman" panose="02020603050405020304" pitchFamily="18" charset="0"/>
-              </a:rPr>
-              <a:t>-</a:t>
-            </a:r>
-            <a:r>
-              <a:rPr lang="pt-BR" sz="1600" dirty="0" err="1">
-                <a:effectLst/>
-                <a:latin typeface="Times New Roman" panose="02020603050405020304" pitchFamily="18" charset="0"/>
-                <a:ea typeface="Times New Roman" panose="02020603050405020304" pitchFamily="18" charset="0"/>
-              </a:rPr>
-              <a:t>consumption-dataset</a:t>
-            </a:r>
-            <a:r>
-              <a:rPr lang="pt-BR" sz="1600" dirty="0">
-                <a:effectLst/>
-                <a:latin typeface="Times New Roman" panose="02020603050405020304" pitchFamily="18" charset="0"/>
-                <a:ea typeface="Times New Roman" panose="02020603050405020304" pitchFamily="18" charset="0"/>
-              </a:rPr>
-              <a:t>&gt;. Acesso em 12 junho 2021.</a:t>
-            </a:r>
-          </a:p>
-          <a:p>
-            <a:pPr marL="0" lvl="0" indent="0" algn="just">
+              <a:rPr lang="en-US" dirty="0"/>
+              <a:t>PEDREGOSA, F. et al. Scikit-learn: Machine Learning in Python. </a:t>
+            </a:r>
+            <a:r>
+              <a:rPr lang="pt-BR" b="1" dirty="0"/>
+              <a:t>JMLR</a:t>
+            </a:r>
+            <a:r>
+              <a:rPr lang="pt-BR" dirty="0"/>
+              <a:t>, v. 12, p. 2825-2830, 2011.</a:t>
+            </a:r>
+          </a:p>
+          <a:p>
+            <a:pPr marL="0" indent="0">
               <a:buNone/>
-              <a:tabLst>
-                <a:tab pos="228600" algn="l"/>
-              </a:tabLst>
             </a:pPr>
             <a:r>
-              <a:rPr lang="en-US" sz="1600" dirty="0">
-                <a:effectLst/>
-                <a:latin typeface="Times New Roman" panose="02020603050405020304" pitchFamily="18" charset="0"/>
-                <a:ea typeface="Times New Roman" panose="02020603050405020304" pitchFamily="18" charset="0"/>
-              </a:rPr>
-              <a:t>MUSA, Sam. </a:t>
-            </a:r>
-            <a:r>
-              <a:rPr lang="en-US" sz="1600" b="1" dirty="0">
-                <a:effectLst/>
-                <a:latin typeface="Times New Roman" panose="02020603050405020304" pitchFamily="18" charset="0"/>
-                <a:ea typeface="Times New Roman" panose="02020603050405020304" pitchFamily="18" charset="0"/>
-              </a:rPr>
-              <a:t>Smart City Roadmap</a:t>
-            </a:r>
-            <a:r>
-              <a:rPr lang="en-US" sz="1600" dirty="0">
-                <a:effectLst/>
-                <a:latin typeface="Times New Roman" panose="02020603050405020304" pitchFamily="18" charset="0"/>
-                <a:ea typeface="Times New Roman" panose="02020603050405020304" pitchFamily="18" charset="0"/>
-              </a:rPr>
-              <a:t>. </a:t>
-            </a:r>
-            <a:r>
-              <a:rPr lang="pt-BR" sz="1600" dirty="0">
-                <a:effectLst/>
-                <a:latin typeface="Times New Roman" panose="02020603050405020304" pitchFamily="18" charset="0"/>
-                <a:ea typeface="Times New Roman" panose="02020603050405020304" pitchFamily="18" charset="0"/>
-              </a:rPr>
-              <a:t>Academia. Disponível em: &lt;https://www.academia.edu/21181336/</a:t>
-            </a:r>
-            <a:r>
-              <a:rPr lang="pt-BR" sz="1600" dirty="0" err="1">
-                <a:effectLst/>
-                <a:latin typeface="Times New Roman" panose="02020603050405020304" pitchFamily="18" charset="0"/>
-                <a:ea typeface="Times New Roman" panose="02020603050405020304" pitchFamily="18" charset="0"/>
-              </a:rPr>
-              <a:t>Smart_City_Roadmap</a:t>
-            </a:r>
-            <a:r>
-              <a:rPr lang="pt-BR" sz="1600" dirty="0">
-                <a:effectLst/>
-                <a:latin typeface="Times New Roman" panose="02020603050405020304" pitchFamily="18" charset="0"/>
-                <a:ea typeface="Times New Roman" panose="02020603050405020304" pitchFamily="18" charset="0"/>
-              </a:rPr>
-              <a:t>&gt;. Acesso em 25 de maio de 2021.</a:t>
-            </a:r>
-          </a:p>
-          <a:p>
-            <a:pPr marL="0" lvl="0" indent="0" algn="just">
+              <a:rPr lang="pt-BR" dirty="0"/>
+              <a:t>PROCEL, Programa Nacional de Conservação de Energia Elétrica. </a:t>
+            </a:r>
+            <a:r>
+              <a:rPr lang="pt-BR" b="1" dirty="0"/>
+              <a:t>Edificações.</a:t>
+            </a:r>
+            <a:r>
+              <a:rPr lang="pt-BR" dirty="0"/>
+              <a:t> Disponível em: &lt;https://</a:t>
+            </a:r>
+            <a:r>
+              <a:rPr lang="pt-BR" dirty="0" err="1"/>
+              <a:t>www.procelinfo.com.br</a:t>
+            </a:r>
+            <a:r>
+              <a:rPr lang="pt-BR" dirty="0"/>
+              <a:t>\&gt;. </a:t>
+            </a:r>
+            <a:r>
+              <a:rPr lang="en-US" dirty="0" err="1"/>
+              <a:t>Acesso</a:t>
+            </a:r>
+            <a:r>
+              <a:rPr lang="en-US" dirty="0"/>
+              <a:t> </a:t>
+            </a:r>
+            <a:r>
+              <a:rPr lang="en-US" dirty="0" err="1"/>
+              <a:t>em</a:t>
+            </a:r>
+            <a:r>
+              <a:rPr lang="en-US" dirty="0"/>
+              <a:t>: 15 out. 2020.</a:t>
+            </a:r>
+            <a:endParaRPr lang="pt-BR" dirty="0"/>
+          </a:p>
+          <a:p>
+            <a:pPr marL="0" indent="0">
               <a:buNone/>
-              <a:tabLst>
-                <a:tab pos="228600" algn="l"/>
-              </a:tabLst>
             </a:pPr>
             <a:r>
-              <a:rPr lang="en-US" sz="1600" dirty="0">
-                <a:effectLst/>
-                <a:latin typeface="Times New Roman" panose="02020603050405020304" pitchFamily="18" charset="0"/>
-                <a:ea typeface="Times New Roman" panose="02020603050405020304" pitchFamily="18" charset="0"/>
-              </a:rPr>
-              <a:t>PEDREGOSA </a:t>
-            </a:r>
-            <a:r>
-              <a:rPr lang="en-US" sz="1600" i="1" dirty="0">
-                <a:effectLst/>
-                <a:latin typeface="Times New Roman" panose="02020603050405020304" pitchFamily="18" charset="0"/>
-                <a:ea typeface="Times New Roman" panose="02020603050405020304" pitchFamily="18" charset="0"/>
-              </a:rPr>
-              <a:t>et al</a:t>
-            </a:r>
-            <a:r>
-              <a:rPr lang="en-US" sz="1600" b="1" dirty="0">
-                <a:effectLst/>
-                <a:latin typeface="Times New Roman" panose="02020603050405020304" pitchFamily="18" charset="0"/>
-                <a:ea typeface="Times New Roman" panose="02020603050405020304" pitchFamily="18" charset="0"/>
-              </a:rPr>
-              <a:t>., Scikit-learn: Machine Learning in Python</a:t>
-            </a:r>
-            <a:r>
-              <a:rPr lang="en-US" sz="1600" dirty="0">
-                <a:effectLst/>
-                <a:latin typeface="Times New Roman" panose="02020603050405020304" pitchFamily="18" charset="0"/>
-                <a:ea typeface="Times New Roman" panose="02020603050405020304" pitchFamily="18" charset="0"/>
-              </a:rPr>
-              <a:t>, JMLR 12, pp. 2825-2830, 2011.</a:t>
-            </a:r>
-            <a:endParaRPr lang="pt-BR" sz="1600" dirty="0">
-              <a:effectLst/>
-              <a:latin typeface="Times New Roman" panose="02020603050405020304" pitchFamily="18" charset="0"/>
-              <a:ea typeface="Times New Roman" panose="02020603050405020304" pitchFamily="18" charset="0"/>
-            </a:endParaRPr>
-          </a:p>
-          <a:p>
-            <a:pPr marL="0" lvl="0" indent="0" algn="just">
+              <a:rPr lang="en-US" dirty="0"/>
+              <a:t>RALLAPALLI, S. R.; GHOSH, S. Forecasting monthly peak demand of electricity in India — a critique. </a:t>
+            </a:r>
+            <a:r>
+              <a:rPr lang="en-US" b="1" dirty="0"/>
+              <a:t>Energy Policy</a:t>
+            </a:r>
+            <a:r>
+              <a:rPr lang="en-US" dirty="0"/>
+              <a:t>, p. 516–520, 2012.</a:t>
+            </a:r>
+            <a:endParaRPr lang="pt-BR" dirty="0"/>
+          </a:p>
+          <a:p>
+            <a:pPr marL="0" indent="0">
               <a:buNone/>
-              <a:tabLst>
-                <a:tab pos="228600" algn="l"/>
-              </a:tabLst>
             </a:pPr>
             <a:r>
-              <a:rPr lang="pt-BR" sz="1600" dirty="0">
-                <a:effectLst/>
-                <a:latin typeface="Times New Roman" panose="02020603050405020304" pitchFamily="18" charset="0"/>
-                <a:ea typeface="Times New Roman" panose="02020603050405020304" pitchFamily="18" charset="0"/>
-              </a:rPr>
-              <a:t>PROCEL, Programa Nacional de Conservação de Energia Elétrica. </a:t>
-            </a:r>
-            <a:r>
-              <a:rPr lang="pt-BR" sz="1600" b="1" dirty="0">
-                <a:effectLst/>
-                <a:latin typeface="Times New Roman" panose="02020603050405020304" pitchFamily="18" charset="0"/>
-                <a:ea typeface="Times New Roman" panose="02020603050405020304" pitchFamily="18" charset="0"/>
-              </a:rPr>
-              <a:t>Edificações</a:t>
-            </a:r>
-            <a:r>
-              <a:rPr lang="pt-BR" sz="1600" dirty="0">
-                <a:effectLst/>
-                <a:latin typeface="Times New Roman" panose="02020603050405020304" pitchFamily="18" charset="0"/>
-                <a:ea typeface="Times New Roman" panose="02020603050405020304" pitchFamily="18" charset="0"/>
-              </a:rPr>
-              <a:t>. Disponível em: &lt;http://www.procelinfo.com.br/</a:t>
-            </a:r>
-            <a:r>
-              <a:rPr lang="pt-BR" sz="1600" dirty="0" err="1">
-                <a:effectLst/>
-                <a:latin typeface="Times New Roman" panose="02020603050405020304" pitchFamily="18" charset="0"/>
-                <a:ea typeface="Times New Roman" panose="02020603050405020304" pitchFamily="18" charset="0"/>
-              </a:rPr>
-              <a:t>main.asp?TeamID</a:t>
-            </a:r>
-            <a:r>
-              <a:rPr lang="pt-BR" sz="1600" dirty="0">
-                <a:effectLst/>
-                <a:latin typeface="Times New Roman" panose="02020603050405020304" pitchFamily="18" charset="0"/>
-                <a:ea typeface="Times New Roman" panose="02020603050405020304" pitchFamily="18" charset="0"/>
-              </a:rPr>
-              <a:t>=%7B82BBD82C-FB89-48CA-98A9-620D5F9DBD04%7D#:~:</a:t>
-            </a:r>
-            <a:r>
-              <a:rPr lang="pt-BR" sz="1600" dirty="0" err="1">
-                <a:effectLst/>
-                <a:latin typeface="Times New Roman" panose="02020603050405020304" pitchFamily="18" charset="0"/>
-                <a:ea typeface="Times New Roman" panose="02020603050405020304" pitchFamily="18" charset="0"/>
-              </a:rPr>
-              <a:t>text</a:t>
-            </a:r>
-            <a:r>
-              <a:rPr lang="pt-BR" sz="1600" dirty="0">
-                <a:effectLst/>
-                <a:latin typeface="Times New Roman" panose="02020603050405020304" pitchFamily="18" charset="0"/>
-                <a:ea typeface="Times New Roman" panose="02020603050405020304" pitchFamily="18" charset="0"/>
-              </a:rPr>
-              <a:t>=O%20Procel%20promove%20a%20avalia%C3%A7%C3%A3o,edifica%C3%A7%C3%B5es%2C%20a%20Etiqueta%20PBE%20Edifica&gt;. Acesso em 15 de outubro de 2020.</a:t>
-            </a:r>
-          </a:p>
-          <a:p>
-            <a:pPr marL="0" lvl="0" indent="0" algn="just">
+              <a:rPr lang="en-US" dirty="0"/>
+              <a:t>SILVA, I. N. et al. </a:t>
+            </a:r>
+            <a:r>
+              <a:rPr lang="en-US" b="1" dirty="0"/>
+              <a:t>Artificial Neural Networks — A Practical Course.</a:t>
+            </a:r>
+            <a:r>
+              <a:rPr lang="en-US" dirty="0"/>
+              <a:t> 1. ed. São Carlos: Springer, 2017.</a:t>
+            </a:r>
+            <a:endParaRPr lang="pt-BR" dirty="0"/>
+          </a:p>
+          <a:p>
+            <a:pPr marL="0" indent="0">
               <a:buNone/>
-              <a:tabLst>
-                <a:tab pos="228600" algn="l"/>
-              </a:tabLst>
             </a:pPr>
             <a:r>
-              <a:rPr lang="pt-BR" sz="1600" dirty="0">
-                <a:effectLst/>
-                <a:latin typeface="Times New Roman" panose="02020603050405020304" pitchFamily="18" charset="0"/>
-                <a:ea typeface="Times New Roman" panose="02020603050405020304" pitchFamily="18" charset="0"/>
-              </a:rPr>
-              <a:t>SILVA, I.  N., SPATTI, DANIELO H., FLAUZINO, ROGERIO A., LIBONI, LUISA H. B., ALVES, SILAS F. R. </a:t>
-            </a:r>
-            <a:r>
-              <a:rPr lang="pt-BR" sz="1600" b="1" dirty="0">
-                <a:effectLst/>
-                <a:latin typeface="Times New Roman" panose="02020603050405020304" pitchFamily="18" charset="0"/>
-                <a:ea typeface="Times New Roman" panose="02020603050405020304" pitchFamily="18" charset="0"/>
-              </a:rPr>
-              <a:t>Artificial Neural Networks. </a:t>
-            </a:r>
-            <a:r>
-              <a:rPr lang="pt-BR" sz="1600" dirty="0">
-                <a:effectLst/>
-                <a:latin typeface="Times New Roman" panose="02020603050405020304" pitchFamily="18" charset="0"/>
-                <a:ea typeface="Times New Roman" panose="02020603050405020304" pitchFamily="18" charset="0"/>
-              </a:rPr>
-              <a:t>A </a:t>
-            </a:r>
-            <a:r>
-              <a:rPr lang="pt-BR" sz="1600" dirty="0" err="1">
-                <a:effectLst/>
-                <a:latin typeface="Times New Roman" panose="02020603050405020304" pitchFamily="18" charset="0"/>
-                <a:ea typeface="Times New Roman" panose="02020603050405020304" pitchFamily="18" charset="0"/>
-              </a:rPr>
-              <a:t>Practical</a:t>
-            </a:r>
-            <a:r>
-              <a:rPr lang="pt-BR" sz="1600" dirty="0">
-                <a:effectLst/>
-                <a:latin typeface="Times New Roman" panose="02020603050405020304" pitchFamily="18" charset="0"/>
-                <a:ea typeface="Times New Roman" panose="02020603050405020304" pitchFamily="18" charset="0"/>
-              </a:rPr>
-              <a:t> </a:t>
-            </a:r>
-            <a:r>
-              <a:rPr lang="pt-BR" sz="1600" dirty="0" err="1">
-                <a:effectLst/>
-                <a:latin typeface="Times New Roman" panose="02020603050405020304" pitchFamily="18" charset="0"/>
-                <a:ea typeface="Times New Roman" panose="02020603050405020304" pitchFamily="18" charset="0"/>
-              </a:rPr>
-              <a:t>Course</a:t>
-            </a:r>
-            <a:r>
-              <a:rPr lang="pt-BR" sz="1600" dirty="0">
-                <a:effectLst/>
-                <a:latin typeface="Times New Roman" panose="02020603050405020304" pitchFamily="18" charset="0"/>
-                <a:ea typeface="Times New Roman" panose="02020603050405020304" pitchFamily="18" charset="0"/>
-              </a:rPr>
-              <a:t>. Primeira Edição, 2017. </a:t>
-            </a:r>
-            <a:r>
-              <a:rPr lang="pt-BR" sz="1600" dirty="0">
-                <a:effectLst/>
-                <a:latin typeface="GkbvlxCrjfpxDmblnbRwgwvjKhlprnC"/>
-                <a:ea typeface="Times New Roman" panose="02020603050405020304" pitchFamily="18" charset="0"/>
-                <a:cs typeface="GkbvlxCrjfpxDmblnbRwgwvjKhlprnC"/>
-              </a:rPr>
-              <a:t>São Carlos:</a:t>
-            </a:r>
-            <a:r>
-              <a:rPr lang="pt-BR" sz="1600" b="1" dirty="0">
-                <a:effectLst/>
-                <a:latin typeface="Times New Roman" panose="02020603050405020304" pitchFamily="18" charset="0"/>
-                <a:ea typeface="Times New Roman" panose="02020603050405020304" pitchFamily="18" charset="0"/>
-              </a:rPr>
-              <a:t> </a:t>
-            </a:r>
-            <a:r>
-              <a:rPr lang="pt-BR" sz="1600" dirty="0">
-                <a:effectLst/>
-                <a:latin typeface="GkbvlxCrjfpxDmblnbRwgwvjKhlprnC"/>
-                <a:ea typeface="Times New Roman" panose="02020603050405020304" pitchFamily="18" charset="0"/>
-                <a:cs typeface="GkbvlxCrjfpxDmblnbRwgwvjKhlprnC"/>
-              </a:rPr>
-              <a:t>Springer. </a:t>
-            </a:r>
-            <a:endParaRPr lang="pt-BR" sz="1600" dirty="0">
-              <a:effectLst/>
-              <a:latin typeface="Times New Roman" panose="02020603050405020304" pitchFamily="18" charset="0"/>
-              <a:ea typeface="Times New Roman" panose="02020603050405020304" pitchFamily="18" charset="0"/>
-            </a:endParaRPr>
-          </a:p>
-          <a:p>
-            <a:pPr marL="0" lvl="0" indent="0" algn="just">
+              <a:rPr lang="en-US" dirty="0"/>
+              <a:t>TABRIZCHI, H.; JAVIDI, M. M.; AMIRZADEH, V. Estimates of residential building energy consumption using. </a:t>
+            </a:r>
+            <a:r>
+              <a:rPr lang="en-US" b="1" dirty="0"/>
+              <a:t>Evolving Systems</a:t>
+            </a:r>
+            <a:r>
+              <a:rPr lang="en-US" dirty="0"/>
+              <a:t>, 2019.</a:t>
+            </a:r>
+            <a:endParaRPr lang="pt-BR" dirty="0"/>
+          </a:p>
+          <a:p>
+            <a:pPr marL="0" indent="0">
               <a:buNone/>
-              <a:tabLst>
-                <a:tab pos="228600" algn="l"/>
-              </a:tabLst>
             </a:pPr>
             <a:r>
-              <a:rPr lang="en-US" sz="1600" dirty="0">
-                <a:effectLst/>
-                <a:latin typeface="Times New Roman" panose="02020603050405020304" pitchFamily="18" charset="0"/>
-                <a:ea typeface="Times New Roman" panose="02020603050405020304" pitchFamily="18" charset="0"/>
-              </a:rPr>
-              <a:t>TABRIZCHI, H., JAVIDI, M. M., &amp; AMIRZADEH, V. </a:t>
-            </a:r>
-            <a:r>
-              <a:rPr lang="en-US" sz="1600" b="1" dirty="0">
-                <a:effectLst/>
-                <a:latin typeface="Times New Roman" panose="02020603050405020304" pitchFamily="18" charset="0"/>
-                <a:ea typeface="Times New Roman" panose="02020603050405020304" pitchFamily="18" charset="0"/>
-              </a:rPr>
-              <a:t>Estimates of residential building energy consumption using</a:t>
-            </a:r>
-            <a:r>
-              <a:rPr lang="en-US" sz="1600" dirty="0">
-                <a:effectLst/>
-                <a:latin typeface="Times New Roman" panose="02020603050405020304" pitchFamily="18" charset="0"/>
-                <a:ea typeface="Times New Roman" panose="02020603050405020304" pitchFamily="18" charset="0"/>
-              </a:rPr>
-              <a:t>. </a:t>
-            </a:r>
-            <a:r>
-              <a:rPr lang="pt-BR" sz="1600" dirty="0" err="1">
-                <a:effectLst/>
-                <a:latin typeface="Times New Roman" panose="02020603050405020304" pitchFamily="18" charset="0"/>
-                <a:ea typeface="Times New Roman" panose="02020603050405020304" pitchFamily="18" charset="0"/>
-              </a:rPr>
-              <a:t>Evolving</a:t>
-            </a:r>
-            <a:r>
-              <a:rPr lang="pt-BR" sz="1600" dirty="0">
-                <a:effectLst/>
-                <a:latin typeface="Times New Roman" panose="02020603050405020304" pitchFamily="18" charset="0"/>
-                <a:ea typeface="Times New Roman" panose="02020603050405020304" pitchFamily="18" charset="0"/>
-              </a:rPr>
-              <a:t> Systems, 2019.</a:t>
-            </a:r>
-          </a:p>
-          <a:p>
-            <a:pPr marL="0" lvl="0" indent="0" algn="just">
+              <a:rPr lang="en-US" dirty="0"/>
+              <a:t>WEI, Y. et al. A review of data-driven approaches for prediction and classification of building energy consumption. </a:t>
+            </a:r>
+            <a:r>
+              <a:rPr lang="en-US" b="1" dirty="0"/>
+              <a:t>Renewable and Sustainable Energy Reviews</a:t>
+            </a:r>
+            <a:r>
+              <a:rPr lang="en-US" dirty="0"/>
+              <a:t>, p. 1-21, 2017.</a:t>
+            </a:r>
+            <a:endParaRPr lang="pt-BR" dirty="0"/>
+          </a:p>
+          <a:p>
+            <a:pPr marL="0" indent="0">
               <a:buNone/>
-              <a:tabLst>
-                <a:tab pos="228600" algn="l"/>
-              </a:tabLst>
             </a:pPr>
             <a:r>
-              <a:rPr lang="en-US" sz="1600" dirty="0">
-                <a:effectLst/>
-                <a:latin typeface="Times New Roman" panose="02020603050405020304" pitchFamily="18" charset="0"/>
-                <a:ea typeface="Times New Roman" panose="02020603050405020304" pitchFamily="18" charset="0"/>
-              </a:rPr>
-              <a:t>WEI, Y. </a:t>
-            </a:r>
-            <a:r>
-              <a:rPr lang="en-US" sz="1600" i="1" dirty="0">
-                <a:effectLst/>
-                <a:latin typeface="Times New Roman" panose="02020603050405020304" pitchFamily="18" charset="0"/>
-                <a:ea typeface="Times New Roman" panose="02020603050405020304" pitchFamily="18" charset="0"/>
-              </a:rPr>
-              <a:t>et al</a:t>
-            </a:r>
-            <a:r>
-              <a:rPr lang="en-US" sz="1600" dirty="0">
-                <a:effectLst/>
-                <a:latin typeface="Times New Roman" panose="02020603050405020304" pitchFamily="18" charset="0"/>
-                <a:ea typeface="Times New Roman" panose="02020603050405020304" pitchFamily="18" charset="0"/>
-              </a:rPr>
-              <a:t>. </a:t>
-            </a:r>
-            <a:r>
-              <a:rPr lang="en-US" sz="1600" b="1" dirty="0">
-                <a:effectLst/>
-                <a:latin typeface="Times New Roman" panose="02020603050405020304" pitchFamily="18" charset="0"/>
-                <a:ea typeface="Times New Roman" panose="02020603050405020304" pitchFamily="18" charset="0"/>
-              </a:rPr>
-              <a:t>A review of data-driven approaches for prediction and classification</a:t>
-            </a:r>
-            <a:r>
-              <a:rPr lang="en-US" sz="1600" dirty="0">
-                <a:effectLst/>
-                <a:latin typeface="Times New Roman" panose="02020603050405020304" pitchFamily="18" charset="0"/>
-                <a:ea typeface="Times New Roman" panose="02020603050405020304" pitchFamily="18" charset="0"/>
-              </a:rPr>
-              <a:t> of. </a:t>
-            </a:r>
-            <a:r>
-              <a:rPr lang="pt-BR" sz="1600" dirty="0" err="1">
-                <a:effectLst/>
-                <a:latin typeface="Times New Roman" panose="02020603050405020304" pitchFamily="18" charset="0"/>
-                <a:ea typeface="Times New Roman" panose="02020603050405020304" pitchFamily="18" charset="0"/>
-              </a:rPr>
-              <a:t>Renewable</a:t>
-            </a:r>
-            <a:r>
-              <a:rPr lang="pt-BR" sz="1600" dirty="0">
-                <a:effectLst/>
-                <a:latin typeface="Times New Roman" panose="02020603050405020304" pitchFamily="18" charset="0"/>
-                <a:ea typeface="Times New Roman" panose="02020603050405020304" pitchFamily="18" charset="0"/>
-              </a:rPr>
-              <a:t> </a:t>
-            </a:r>
-            <a:r>
-              <a:rPr lang="pt-BR" sz="1600" dirty="0" err="1">
-                <a:effectLst/>
-                <a:latin typeface="Times New Roman" panose="02020603050405020304" pitchFamily="18" charset="0"/>
-                <a:ea typeface="Times New Roman" panose="02020603050405020304" pitchFamily="18" charset="0"/>
-              </a:rPr>
-              <a:t>and</a:t>
-            </a:r>
-            <a:r>
-              <a:rPr lang="pt-BR" sz="1600" dirty="0">
-                <a:effectLst/>
-                <a:latin typeface="Times New Roman" panose="02020603050405020304" pitchFamily="18" charset="0"/>
-                <a:ea typeface="Times New Roman" panose="02020603050405020304" pitchFamily="18" charset="0"/>
-              </a:rPr>
-              <a:t> </a:t>
-            </a:r>
-            <a:r>
-              <a:rPr lang="pt-BR" sz="1600" dirty="0" err="1">
-                <a:effectLst/>
-                <a:latin typeface="Times New Roman" panose="02020603050405020304" pitchFamily="18" charset="0"/>
-                <a:ea typeface="Times New Roman" panose="02020603050405020304" pitchFamily="18" charset="0"/>
-              </a:rPr>
-              <a:t>Sustainable</a:t>
-            </a:r>
-            <a:r>
-              <a:rPr lang="pt-BR" sz="1600" dirty="0">
-                <a:effectLst/>
-                <a:latin typeface="Times New Roman" panose="02020603050405020304" pitchFamily="18" charset="0"/>
-                <a:ea typeface="Times New Roman" panose="02020603050405020304" pitchFamily="18" charset="0"/>
-              </a:rPr>
-              <a:t> Energy Reviews, p. 1-21, 2017.</a:t>
-            </a:r>
-          </a:p>
-          <a:p>
-            <a:pPr marL="0" lvl="0" indent="0" algn="just">
+              <a:rPr lang="en-US" dirty="0"/>
+              <a:t>ZHAO, H.; MAGOULÈS, F. A review on the prediction of building energy consumption. </a:t>
+            </a:r>
+            <a:r>
+              <a:rPr lang="en-US" b="1" dirty="0"/>
+              <a:t>Renewable and Sustainable Energy Reviews</a:t>
+            </a:r>
+            <a:r>
+              <a:rPr lang="en-US" dirty="0"/>
+              <a:t>, p. 1-7, 2012.</a:t>
+            </a:r>
+            <a:endParaRPr lang="pt-BR" dirty="0"/>
+          </a:p>
+          <a:p>
+            <a:pPr marL="0" indent="0">
               <a:buNone/>
-              <a:tabLst>
-                <a:tab pos="228600" algn="l"/>
-              </a:tabLst>
             </a:pPr>
             <a:r>
-              <a:rPr lang="en-US" sz="1600" dirty="0">
-                <a:effectLst/>
-                <a:latin typeface="Times New Roman" panose="02020603050405020304" pitchFamily="18" charset="0"/>
-                <a:ea typeface="Times New Roman" panose="02020603050405020304" pitchFamily="18" charset="0"/>
-              </a:rPr>
-              <a:t>ZHAO, H., &amp; MAGOULÈS, F. </a:t>
-            </a:r>
-            <a:r>
-              <a:rPr lang="en-US" sz="1600" b="1" dirty="0">
-                <a:effectLst/>
-                <a:latin typeface="Times New Roman" panose="02020603050405020304" pitchFamily="18" charset="0"/>
-                <a:ea typeface="Times New Roman" panose="02020603050405020304" pitchFamily="18" charset="0"/>
-              </a:rPr>
-              <a:t>A review on the prediction of building energy consumption. </a:t>
-            </a:r>
-            <a:r>
-              <a:rPr lang="pt-BR" sz="1600" dirty="0" err="1">
-                <a:effectLst/>
-                <a:latin typeface="Times New Roman" panose="02020603050405020304" pitchFamily="18" charset="0"/>
-                <a:ea typeface="Times New Roman" panose="02020603050405020304" pitchFamily="18" charset="0"/>
-              </a:rPr>
-              <a:t>Renewable</a:t>
-            </a:r>
-            <a:r>
-              <a:rPr lang="pt-BR" sz="1600" dirty="0">
-                <a:effectLst/>
-                <a:latin typeface="Times New Roman" panose="02020603050405020304" pitchFamily="18" charset="0"/>
-                <a:ea typeface="Times New Roman" panose="02020603050405020304" pitchFamily="18" charset="0"/>
-              </a:rPr>
-              <a:t> </a:t>
-            </a:r>
-            <a:r>
-              <a:rPr lang="pt-BR" sz="1600" dirty="0" err="1">
-                <a:effectLst/>
-                <a:latin typeface="Times New Roman" panose="02020603050405020304" pitchFamily="18" charset="0"/>
-                <a:ea typeface="Times New Roman" panose="02020603050405020304" pitchFamily="18" charset="0"/>
-              </a:rPr>
-              <a:t>and</a:t>
-            </a:r>
-            <a:r>
-              <a:rPr lang="pt-BR" sz="1600" dirty="0">
-                <a:effectLst/>
-                <a:latin typeface="Times New Roman" panose="02020603050405020304" pitchFamily="18" charset="0"/>
-                <a:ea typeface="Times New Roman" panose="02020603050405020304" pitchFamily="18" charset="0"/>
-              </a:rPr>
-              <a:t> </a:t>
-            </a:r>
-            <a:r>
-              <a:rPr lang="pt-BR" sz="1600" dirty="0" err="1">
-                <a:effectLst/>
-                <a:latin typeface="Times New Roman" panose="02020603050405020304" pitchFamily="18" charset="0"/>
-                <a:ea typeface="Times New Roman" panose="02020603050405020304" pitchFamily="18" charset="0"/>
-              </a:rPr>
-              <a:t>Sustainable</a:t>
-            </a:r>
-            <a:r>
-              <a:rPr lang="pt-BR" sz="1600" dirty="0">
-                <a:effectLst/>
-                <a:latin typeface="Times New Roman" panose="02020603050405020304" pitchFamily="18" charset="0"/>
-                <a:ea typeface="Times New Roman" panose="02020603050405020304" pitchFamily="18" charset="0"/>
-              </a:rPr>
-              <a:t> Energy Reviews, pp. 1-7, 2012.</a:t>
-            </a:r>
-          </a:p>
-          <a:p>
-            <a:pPr marL="0" lvl="0" indent="0" algn="just">
-              <a:buNone/>
-              <a:tabLst>
-                <a:tab pos="228600" algn="l"/>
-              </a:tabLst>
-            </a:pPr>
-            <a:r>
-              <a:rPr lang="pt-BR" sz="1600" dirty="0">
-                <a:effectLst/>
-                <a:latin typeface="Times New Roman" panose="02020603050405020304" pitchFamily="18" charset="0"/>
-                <a:ea typeface="Times New Roman" panose="02020603050405020304" pitchFamily="18" charset="0"/>
-              </a:rPr>
-              <a:t>ZMEUREANU, J. </a:t>
-            </a:r>
-            <a:r>
-              <a:rPr lang="pt-BR" sz="1600" dirty="0" err="1">
-                <a:effectLst/>
-                <a:latin typeface="Times New Roman" panose="02020603050405020304" pitchFamily="18" charset="0"/>
-                <a:ea typeface="Times New Roman" panose="02020603050405020304" pitchFamily="18" charset="0"/>
-              </a:rPr>
-              <a:t>and</a:t>
-            </a:r>
-            <a:r>
-              <a:rPr lang="pt-BR" sz="1600" dirty="0">
-                <a:effectLst/>
-                <a:latin typeface="Times New Roman" panose="02020603050405020304" pitchFamily="18" charset="0"/>
-                <a:ea typeface="Times New Roman" panose="02020603050405020304" pitchFamily="18" charset="0"/>
-              </a:rPr>
-              <a:t> RUNGE R. </a:t>
-            </a:r>
-            <a:r>
-              <a:rPr lang="pt-BR" sz="1600" b="1" dirty="0" err="1">
-                <a:effectLst/>
-                <a:latin typeface="Times New Roman" panose="02020603050405020304" pitchFamily="18" charset="0"/>
-                <a:ea typeface="Times New Roman" panose="02020603050405020304" pitchFamily="18" charset="0"/>
-              </a:rPr>
-              <a:t>Forecasting</a:t>
-            </a:r>
-            <a:r>
-              <a:rPr lang="pt-BR" sz="1600" b="1" dirty="0">
-                <a:effectLst/>
-                <a:latin typeface="Times New Roman" panose="02020603050405020304" pitchFamily="18" charset="0"/>
-                <a:ea typeface="Times New Roman" panose="02020603050405020304" pitchFamily="18" charset="0"/>
-              </a:rPr>
-              <a:t> Energy Use in </a:t>
-            </a:r>
-            <a:r>
-              <a:rPr lang="pt-BR" sz="1600" b="1" dirty="0" err="1">
-                <a:effectLst/>
-                <a:latin typeface="Times New Roman" panose="02020603050405020304" pitchFamily="18" charset="0"/>
-                <a:ea typeface="Times New Roman" panose="02020603050405020304" pitchFamily="18" charset="0"/>
-              </a:rPr>
-              <a:t>Buildings</a:t>
-            </a:r>
-            <a:r>
-              <a:rPr lang="pt-BR" sz="1600" b="1" dirty="0">
-                <a:effectLst/>
-                <a:latin typeface="Times New Roman" panose="02020603050405020304" pitchFamily="18" charset="0"/>
-                <a:ea typeface="Times New Roman" panose="02020603050405020304" pitchFamily="18" charset="0"/>
-              </a:rPr>
-              <a:t> </a:t>
-            </a:r>
-            <a:r>
-              <a:rPr lang="pt-BR" sz="1600" b="1" dirty="0" err="1">
-                <a:effectLst/>
-                <a:latin typeface="Times New Roman" panose="02020603050405020304" pitchFamily="18" charset="0"/>
-                <a:ea typeface="Times New Roman" panose="02020603050405020304" pitchFamily="18" charset="0"/>
-              </a:rPr>
-              <a:t>Using</a:t>
-            </a:r>
-            <a:r>
-              <a:rPr lang="pt-BR" sz="1600" b="1" dirty="0">
-                <a:effectLst/>
-                <a:latin typeface="Times New Roman" panose="02020603050405020304" pitchFamily="18" charset="0"/>
-                <a:ea typeface="Times New Roman" panose="02020603050405020304" pitchFamily="18" charset="0"/>
-              </a:rPr>
-              <a:t> Artificial Neural Networks: A Review</a:t>
-            </a:r>
-            <a:r>
-              <a:rPr lang="pt-BR" sz="1600" dirty="0">
-                <a:effectLst/>
-                <a:latin typeface="Times New Roman" panose="02020603050405020304" pitchFamily="18" charset="0"/>
-                <a:ea typeface="Times New Roman" panose="02020603050405020304" pitchFamily="18" charset="0"/>
-              </a:rPr>
-              <a:t>. </a:t>
-            </a:r>
-            <a:r>
-              <a:rPr lang="pt-BR" sz="1600" dirty="0" err="1">
-                <a:effectLst/>
-                <a:latin typeface="Times New Roman" panose="02020603050405020304" pitchFamily="18" charset="0"/>
-                <a:ea typeface="Times New Roman" panose="02020603050405020304" pitchFamily="18" charset="0"/>
-              </a:rPr>
+              <a:rPr lang="en-US" dirty="0"/>
+              <a:t>ZMEUREANU, J.; RUNGE, R. Forecasting energy use in buildings using artificial neural networks: a review. </a:t>
+            </a:r>
+            <a:r>
+              <a:rPr lang="pt-BR" b="1" dirty="0" err="1"/>
               <a:t>Energies</a:t>
             </a:r>
             <a:r>
-              <a:rPr lang="pt-BR" sz="1600" dirty="0">
-                <a:effectLst/>
-                <a:latin typeface="Times New Roman" panose="02020603050405020304" pitchFamily="18" charset="0"/>
-                <a:ea typeface="Times New Roman" panose="02020603050405020304" pitchFamily="18" charset="0"/>
-              </a:rPr>
+              <a:rPr lang="pt-BR" dirty="0"/>
               <a:t>, p. 5-8, 2019.</a:t>
             </a:r>
           </a:p>
@@ -20862,15 +19175,15 @@
             <a:pPr algn="just"/>
             <a:r>
               <a:rPr lang="pt-BR" sz="2200" dirty="0"/>
-              <a:t>Essa pesquisa se propõe realizar um estudo de </a:t>
+              <a:t>Essa pesquisa se propõe realizar um </a:t>
             </a:r>
             <a:r>
               <a:rPr lang="pt-BR" sz="2200" b="1" dirty="0"/>
-              <a:t>previsão de dados de energia </a:t>
+              <a:t>evolução</a:t>
             </a:r>
             <a:r>
               <a:rPr lang="pt-BR" sz="2200" dirty="0"/>
-              <a:t>no setor público, além de uma revisão bibliográfica da área.</a:t>
+              <a:t> do estudo de previsão de dados de energia no setor público (COELHO, 2021).</a:t>
             </a:r>
           </a:p>
         </p:txBody>
@@ -21018,7 +19331,7 @@
           <a:p>
             <a:r>
               <a:rPr lang="pt-BR" dirty="0"/>
-              <a:t>Consumo energético</a:t>
+              <a:t>OBJETIVOS</a:t>
             </a:r>
           </a:p>
         </p:txBody>
@@ -21039,38 +19352,92 @@
             <p:ph idx="1"/>
           </p:nvPr>
         </p:nvSpPr>
-        <p:spPr/>
+        <p:spPr>
+          <a:xfrm>
+            <a:off x="581193" y="2340864"/>
+            <a:ext cx="7278951" cy="3814980"/>
+          </a:xfrm>
+        </p:spPr>
         <p:txBody>
           <a:bodyPr>
-            <a:normAutofit/>
+            <a:normAutofit fontScale="70000" lnSpcReduction="20000"/>
           </a:bodyPr>
           <a:lstStyle/>
           <a:p>
-            <a:pPr algn="just"/>
-            <a:r>
-              <a:rPr lang="pt-BR" sz="2200" dirty="0"/>
-              <a:t>“Os projetos de eficiência energética, em geral, atuam em primeiro momento na substituição de equipamentos ineficientes” (PROCEL, 2020);</a:t>
-            </a:r>
-          </a:p>
-          <a:p>
-            <a:pPr algn="just"/>
-            <a:r>
-              <a:rPr lang="pt-BR" sz="2200" dirty="0"/>
-              <a:t>Em segundo momento, existem estudos de migração de tarifas (Gonçalves, 2012);</a:t>
-            </a:r>
-          </a:p>
-          <a:p>
-            <a:pPr algn="just"/>
-            <a:r>
-              <a:rPr lang="pt-BR" sz="2200" dirty="0"/>
-              <a:t>A maior parte do uso de energia em edifícios públicos está concentrado em iluminação e climatização (PROCEL, 2020);</a:t>
-            </a:r>
-          </a:p>
-          <a:p>
-            <a:pPr algn="just"/>
-            <a:r>
-              <a:rPr lang="pt-BR" sz="2200" dirty="0"/>
-              <a:t>A devida análise de faturas auxilia a elaboração de políticas internas e revisão de contratos (d’Albuquerque, Silva, &amp; Gomes, 2017).</a:t>
+            <a:pPr marL="0" indent="0">
+              <a:buNone/>
+            </a:pPr>
+            <a:r>
+              <a:rPr lang="pt-BR" sz="2400" b="1" dirty="0"/>
+              <a:t>Objetivo geral</a:t>
+            </a:r>
+            <a:r>
+              <a:rPr lang="pt-BR" sz="2400" dirty="0"/>
+              <a:t> Desenvolver e comparar modelos de aprendizado de máquina para previsão de curto prazo do consumo energético de edifícios, com ênfase na contribuição da </a:t>
+            </a:r>
+            <a:r>
+              <a:rPr lang="pt-BR" sz="2400" b="1" dirty="0"/>
+              <a:t>engenharia de recursos</a:t>
+            </a:r>
+            <a:endParaRPr lang="pt-BR" sz="2400" dirty="0"/>
+          </a:p>
+          <a:p>
+            <a:pPr marL="0" indent="0">
+              <a:buNone/>
+            </a:pPr>
+            <a:r>
+              <a:rPr lang="pt-BR" sz="2400" b="1" dirty="0"/>
+              <a:t>Objetivos específicos</a:t>
+            </a:r>
+            <a:endParaRPr lang="pt-BR" sz="2400" dirty="0"/>
+          </a:p>
+          <a:p>
+            <a:r>
+              <a:rPr lang="pt-BR" sz="2400" dirty="0"/>
+              <a:t>Realizar análise exploratória e identificar padrões temporais</a:t>
+            </a:r>
+          </a:p>
+          <a:p>
+            <a:r>
+              <a:rPr lang="pt-BR" sz="2400" dirty="0"/>
+              <a:t>Construir conjunto expandido de </a:t>
+            </a:r>
+            <a:r>
+              <a:rPr lang="pt-BR" sz="2400" b="1" dirty="0"/>
+              <a:t>20 recursos preditores</a:t>
+            </a:r>
+            <a:endParaRPr lang="pt-BR" sz="2400" dirty="0"/>
+          </a:p>
+          <a:p>
+            <a:r>
+              <a:rPr lang="pt-BR" sz="2400" dirty="0"/>
+              <a:t>Implementar modelos de referência: MMS, MME, Regressão Linear e SARIMA</a:t>
+            </a:r>
+          </a:p>
+          <a:p>
+            <a:r>
+              <a:rPr lang="pt-BR" sz="2400" dirty="0"/>
+              <a:t>Implementar modelos avançados: MLP, Random Forest, </a:t>
+            </a:r>
+            <a:r>
+              <a:rPr lang="pt-BR" sz="2400" dirty="0" err="1"/>
+              <a:t>XGBoost</a:t>
+            </a:r>
+            <a:r>
+              <a:rPr lang="pt-BR" sz="2400" dirty="0"/>
+              <a:t> e LSTM</a:t>
+            </a:r>
+          </a:p>
+          <a:p>
+            <a:r>
+              <a:rPr lang="pt-BR" sz="2400" dirty="0"/>
+              <a:t>Comparar todos os modelos por MAE, RMSE, R² e MAPE</a:t>
+            </a:r>
+          </a:p>
+          <a:p>
+            <a:r>
+              <a:rPr lang="pt-BR" sz="2400" dirty="0"/>
+              <a:t>Analisar importância de variáveis nos modelos baseados em árvore</a:t>
             </a:r>
           </a:p>
         </p:txBody>
@@ -21113,7 +19480,7 @@
           <p:cNvPr id="4" name="Espaço Reservado para Rodapé 3">
             <a:extLst>
               <a:ext uri="{FF2B5EF4-FFF2-40B4-BE49-F238E27FC236}">
-                <a16:creationId xmlns:a16="http://schemas.microsoft.com/office/drawing/2014/main" id="{DFF8F544-E1AE-4F8D-8A62-595BE19C9792}"/>
+                <a16:creationId xmlns:a16="http://schemas.microsoft.com/office/drawing/2014/main" id="{5B3CEA00-7A58-479A-9B5F-951F0597C4C9}"/>
               </a:ext>
             </a:extLst>
           </p:cNvPr>
@@ -21129,7 +19496,6 @@
           <a:bodyPr/>
           <a:lstStyle/>
           <a:p>
-            <a:pPr rtl="0"/>
             <a:r>
               <a:rPr lang="en-US" dirty="0" err="1"/>
               <a:t>Referencial</a:t>
@@ -21178,10 +19544,39 @@
           </a:p>
         </p:txBody>
       </p:sp>
+      <p:pic>
+        <p:nvPicPr>
+          <p:cNvPr id="10" name="Imagem 9">
+            <a:extLst>
+              <a:ext uri="{FF2B5EF4-FFF2-40B4-BE49-F238E27FC236}">
+                <a16:creationId xmlns:a16="http://schemas.microsoft.com/office/drawing/2014/main" id="{82B3783B-0A66-40A2-A4A3-BFC19B8845D5}"/>
+              </a:ext>
+            </a:extLst>
+          </p:cNvPr>
+          <p:cNvPicPr>
+            <a:picLocks noChangeAspect="1"/>
+          </p:cNvPicPr>
+          <p:nvPr/>
+        </p:nvPicPr>
+        <p:blipFill rotWithShape="1">
+          <a:blip r:embed="rId2"/>
+          <a:srcRect l="15793" r="14388"/>
+          <a:stretch/>
+        </p:blipFill>
+        <p:spPr>
+          <a:xfrm>
+            <a:off x="8201063" y="2700762"/>
+            <a:ext cx="3409743" cy="2913266"/>
+          </a:xfrm>
+          <a:prstGeom prst="rect">
+            <a:avLst/>
+          </a:prstGeom>
+        </p:spPr>
+      </p:pic>
     </p:spTree>
     <p:extLst>
       <p:ext uri="{BB962C8B-B14F-4D97-AF65-F5344CB8AC3E}">
-        <p14:creationId xmlns:p14="http://schemas.microsoft.com/office/powerpoint/2010/main" val="2026437557"/>
+        <p14:creationId xmlns:p14="http://schemas.microsoft.com/office/powerpoint/2010/main" val="2543167044"/>
       </p:ext>
     </p:extLst>
   </p:cSld>
@@ -21231,7 +19626,7 @@
           <a:p>
             <a:r>
               <a:rPr lang="pt-BR" dirty="0"/>
-              <a:t>Gestão de faturas</a:t>
+              <a:t>Problema proposto: Consumo energético</a:t>
             </a:r>
           </a:p>
         </p:txBody>
@@ -21252,53 +19647,16 @@
             <p:ph idx="1"/>
           </p:nvPr>
         </p:nvSpPr>
-        <p:spPr>
-          <a:xfrm>
-            <a:off x="581193" y="2340864"/>
-            <a:ext cx="11029615" cy="3634486"/>
-          </a:xfrm>
-        </p:spPr>
+        <p:spPr/>
         <p:txBody>
           <a:bodyPr>
             <a:normAutofit/>
           </a:bodyPr>
           <a:lstStyle/>
           <a:p>
-            <a:pPr algn="just"/>
             <a:r>
               <a:rPr lang="pt-BR" sz="2400" dirty="0"/>
-              <a:t>As contas de energia deverão conter dados de </a:t>
-            </a:r>
-            <a:r>
-              <a:rPr lang="pt-BR" sz="2400" b="1" dirty="0"/>
-              <a:t>leitura de medidor</a:t>
-            </a:r>
-            <a:r>
-              <a:rPr lang="pt-BR" sz="2400" dirty="0"/>
-              <a:t>, </a:t>
-            </a:r>
-            <a:r>
-              <a:rPr lang="pt-BR" sz="2400" b="1" dirty="0"/>
-              <a:t>valor total a pagar </a:t>
-            </a:r>
-            <a:r>
-              <a:rPr lang="pt-BR" sz="2400" dirty="0"/>
-              <a:t>e </a:t>
-            </a:r>
-            <a:r>
-              <a:rPr lang="pt-BR" sz="2400" b="1" dirty="0"/>
-              <a:t>histórico de consumo de cada mês </a:t>
-            </a:r>
-            <a:r>
-              <a:rPr lang="pt-BR" sz="2400" dirty="0"/>
-              <a:t>(ANEEL, 2012);</a:t>
-            </a:r>
-          </a:p>
-          <a:p>
-            <a:pPr algn="just"/>
-            <a:r>
-              <a:rPr lang="pt-BR" sz="2400" dirty="0"/>
-              <a:t>O fiscal do contrato público fica responsável pela unidade consumidora e atesta o consumo de todas as instalações (Costa, 2020);</a:t>
+              <a:t>Em que medida a expansão dos recursos preditores e a adoção de múltiplos algoritmos melhoram a previsão do consumo energético, em relação à abordagem anterior?</a:t>
             </a:r>
           </a:p>
         </p:txBody>
@@ -21341,7 +19699,7 @@
           <p:cNvPr id="4" name="Espaço Reservado para Rodapé 3">
             <a:extLst>
               <a:ext uri="{FF2B5EF4-FFF2-40B4-BE49-F238E27FC236}">
-                <a16:creationId xmlns:a16="http://schemas.microsoft.com/office/drawing/2014/main" id="{5B3CEA00-7A58-479A-9B5F-951F0597C4C9}"/>
+                <a16:creationId xmlns:a16="http://schemas.microsoft.com/office/drawing/2014/main" id="{DFF8F544-E1AE-4F8D-8A62-595BE19C9792}"/>
               </a:ext>
             </a:extLst>
           </p:cNvPr>
@@ -21357,6 +19715,7 @@
           <a:bodyPr/>
           <a:lstStyle/>
           <a:p>
+            <a:pPr rtl="0"/>
             <a:r>
               <a:rPr lang="en-US" dirty="0" err="1"/>
               <a:t>Referencial</a:t>
@@ -21408,7 +19767,7 @@
     </p:spTree>
     <p:extLst>
       <p:ext uri="{BB962C8B-B14F-4D97-AF65-F5344CB8AC3E}">
-        <p14:creationId xmlns:p14="http://schemas.microsoft.com/office/powerpoint/2010/main" val="794457377"/>
+        <p14:creationId xmlns:p14="http://schemas.microsoft.com/office/powerpoint/2010/main" val="2026437557"/>
       </p:ext>
     </p:extLst>
   </p:cSld>
@@ -21458,517 +19817,13 @@
           <a:p>
             <a:r>
               <a:rPr lang="pt-BR" dirty="0"/>
-              <a:t>Gestão de faturas</a:t>
+              <a:t>Previsão de dados</a:t>
             </a:r>
           </a:p>
         </p:txBody>
       </p:sp>
-      <p:sp>
-        <p:nvSpPr>
-          <p:cNvPr id="3" name="Espaço Reservado para Conteúdo 2">
-            <a:extLst>
-              <a:ext uri="{FF2B5EF4-FFF2-40B4-BE49-F238E27FC236}">
-                <a16:creationId xmlns:a16="http://schemas.microsoft.com/office/drawing/2014/main" id="{E1647ED6-C6B8-46F3-976C-6B7EECBA62C5}"/>
-              </a:ext>
-            </a:extLst>
-          </p:cNvPr>
-          <p:cNvSpPr>
-            <a:spLocks noGrp="1"/>
-          </p:cNvSpPr>
-          <p:nvPr>
-            <p:ph idx="1"/>
-          </p:nvPr>
-        </p:nvSpPr>
-        <p:spPr>
-          <a:xfrm>
-            <a:off x="581193" y="2340864"/>
-            <a:ext cx="7278951" cy="3814980"/>
-          </a:xfrm>
-        </p:spPr>
-        <p:txBody>
-          <a:bodyPr>
-            <a:normAutofit/>
-          </a:bodyPr>
-          <a:lstStyle/>
-          <a:p>
-            <a:pPr algn="just"/>
-            <a:r>
-              <a:rPr lang="pt-BR" sz="2400" dirty="0"/>
-              <a:t>Uma unidade consumidora (prédio) é composta </a:t>
-            </a:r>
-            <a:r>
-              <a:rPr lang="pt-BR" sz="2400" b="1" dirty="0"/>
-              <a:t>mais de uma </a:t>
-            </a:r>
-            <a:r>
-              <a:rPr lang="pt-BR" sz="2400" dirty="0"/>
-              <a:t>instalação elétrica que gera </a:t>
-            </a:r>
-            <a:r>
-              <a:rPr lang="pt-BR" sz="2400" b="1" dirty="0"/>
-              <a:t>faturas mensais</a:t>
-            </a:r>
-            <a:r>
-              <a:rPr lang="pt-BR" sz="2400" dirty="0"/>
-              <a:t>;</a:t>
-            </a:r>
-          </a:p>
-          <a:p>
-            <a:pPr algn="just"/>
-            <a:r>
-              <a:rPr lang="pt-BR" sz="2400" dirty="0"/>
-              <a:t>Metodologia para verificar o consumo pode auxiliar nas análises e dar subsídios para o gestor público.</a:t>
-            </a:r>
-          </a:p>
-        </p:txBody>
-      </p:sp>
-      <p:sp>
-        <p:nvSpPr>
-          <p:cNvPr id="6" name="Espaço Reservado para Número de Slide 5">
-            <a:extLst>
-              <a:ext uri="{FF2B5EF4-FFF2-40B4-BE49-F238E27FC236}">
-                <a16:creationId xmlns:a16="http://schemas.microsoft.com/office/drawing/2014/main" id="{A5545136-9C6F-49EA-A1A8-596EA8B2F23E}"/>
-              </a:ext>
-            </a:extLst>
-          </p:cNvPr>
-          <p:cNvSpPr>
-            <a:spLocks noGrp="1"/>
-          </p:cNvSpPr>
-          <p:nvPr>
-            <p:ph type="sldNum" sz="quarter" idx="12"/>
-          </p:nvPr>
-        </p:nvSpPr>
-        <p:spPr/>
-        <p:txBody>
-          <a:bodyPr/>
-          <a:lstStyle/>
-          <a:p>
-            <a:pPr rtl="0"/>
-            <a:fld id="{3A98EE3D-8CD1-4C3F-BD1C-C98C9596463C}" type="slidenum">
-              <a:rPr lang="en-US" smtClean="0"/>
-              <a:t>6</a:t>
-            </a:fld>
-            <a:r>
-              <a:rPr lang="en-US" dirty="0"/>
-              <a:t> / 29</a:t>
-            </a:r>
-          </a:p>
-        </p:txBody>
-      </p:sp>
-      <p:sp>
-        <p:nvSpPr>
-          <p:cNvPr id="4" name="Espaço Reservado para Rodapé 3">
-            <a:extLst>
-              <a:ext uri="{FF2B5EF4-FFF2-40B4-BE49-F238E27FC236}">
-                <a16:creationId xmlns:a16="http://schemas.microsoft.com/office/drawing/2014/main" id="{5B3CEA00-7A58-479A-9B5F-951F0597C4C9}"/>
-              </a:ext>
-            </a:extLst>
-          </p:cNvPr>
-          <p:cNvSpPr>
-            <a:spLocks noGrp="1"/>
-          </p:cNvSpPr>
-          <p:nvPr>
-            <p:ph type="ftr" sz="quarter" idx="11"/>
-          </p:nvPr>
-        </p:nvSpPr>
-        <p:spPr/>
-        <p:txBody>
-          <a:bodyPr/>
-          <a:lstStyle/>
-          <a:p>
-            <a:r>
-              <a:rPr lang="en-US" dirty="0" err="1"/>
-              <a:t>Referencial</a:t>
-            </a:r>
-            <a:r>
-              <a:rPr lang="en-US" dirty="0"/>
-              <a:t> </a:t>
-            </a:r>
-            <a:r>
-              <a:rPr lang="en-US" dirty="0" err="1"/>
-              <a:t>teórico</a:t>
-            </a:r>
-            <a:r>
-              <a:rPr lang="en-US" dirty="0"/>
-              <a:t> – </a:t>
-            </a:r>
-            <a:r>
-              <a:rPr lang="en-US" dirty="0" err="1"/>
-              <a:t>trabalho</a:t>
-            </a:r>
-            <a:r>
-              <a:rPr lang="en-US" dirty="0"/>
-              <a:t> de </a:t>
-            </a:r>
-            <a:r>
-              <a:rPr lang="en-US" dirty="0" err="1"/>
-              <a:t>conclusão</a:t>
-            </a:r>
-            <a:r>
-              <a:rPr lang="en-US" dirty="0"/>
-              <a:t> de </a:t>
-            </a:r>
-            <a:r>
-              <a:rPr lang="en-US" dirty="0" err="1"/>
-              <a:t>curso</a:t>
-            </a:r>
-            <a:r>
-              <a:rPr lang="en-US" dirty="0"/>
-              <a:t> – Evandro </a:t>
-            </a:r>
-            <a:r>
-              <a:rPr lang="en-US" dirty="0" err="1"/>
-              <a:t>coelho</a:t>
-            </a:r>
-            <a:endParaRPr lang="en-US" dirty="0"/>
-          </a:p>
-        </p:txBody>
-      </p:sp>
-      <p:pic>
-        <p:nvPicPr>
-          <p:cNvPr id="10" name="Imagem 9">
-            <a:extLst>
-              <a:ext uri="{FF2B5EF4-FFF2-40B4-BE49-F238E27FC236}">
-                <a16:creationId xmlns:a16="http://schemas.microsoft.com/office/drawing/2014/main" id="{82B3783B-0A66-40A2-A4A3-BFC19B8845D5}"/>
-              </a:ext>
-            </a:extLst>
-          </p:cNvPr>
-          <p:cNvPicPr>
-            <a:picLocks noChangeAspect="1"/>
-          </p:cNvPicPr>
-          <p:nvPr/>
-        </p:nvPicPr>
-        <p:blipFill rotWithShape="1">
-          <a:blip r:embed="rId2"/>
-          <a:srcRect l="15793" r="14388"/>
-          <a:stretch/>
-        </p:blipFill>
-        <p:spPr>
-          <a:xfrm>
-            <a:off x="8201063" y="2700762"/>
-            <a:ext cx="3409743" cy="2913266"/>
-          </a:xfrm>
-          <a:prstGeom prst="rect">
-            <a:avLst/>
-          </a:prstGeom>
-        </p:spPr>
-      </p:pic>
-    </p:spTree>
-    <p:extLst>
-      <p:ext uri="{BB962C8B-B14F-4D97-AF65-F5344CB8AC3E}">
-        <p14:creationId xmlns:p14="http://schemas.microsoft.com/office/powerpoint/2010/main" val="2543167044"/>
-      </p:ext>
-    </p:extLst>
-  </p:cSld>
-  <p:clrMapOvr>
-    <a:masterClrMapping/>
-  </p:clrMapOvr>
-</p:sld>
-</file>
-
-<file path=ppt/slides/slide7.xml><?xml version="1.0" encoding="utf-8"?>
-<p:sld xmlns:a="http://schemas.openxmlformats.org/drawingml/2006/main" xmlns:r="http://schemas.openxmlformats.org/officeDocument/2006/relationships" xmlns:p="http://schemas.openxmlformats.org/presentationml/2006/main">
-  <p:cSld>
-    <p:spTree>
-      <p:nvGrpSpPr>
-        <p:cNvPr id="1" name=""/>
-        <p:cNvGrpSpPr/>
-        <p:nvPr/>
-      </p:nvGrpSpPr>
-      <p:grpSpPr>
-        <a:xfrm>
-          <a:off x="0" y="0"/>
-          <a:ext cx="0" cy="0"/>
-          <a:chOff x="0" y="0"/>
-          <a:chExt cx="0" cy="0"/>
-        </a:xfrm>
-      </p:grpSpPr>
-      <p:sp>
-        <p:nvSpPr>
-          <p:cNvPr id="2" name="Título 1">
-            <a:extLst>
-              <a:ext uri="{FF2B5EF4-FFF2-40B4-BE49-F238E27FC236}">
-                <a16:creationId xmlns:a16="http://schemas.microsoft.com/office/drawing/2014/main" id="{9D872C6C-3E07-4AC6-B68D-9AFE69A9DDB5}"/>
-              </a:ext>
-            </a:extLst>
-          </p:cNvPr>
-          <p:cNvSpPr>
-            <a:spLocks noGrp="1"/>
-          </p:cNvSpPr>
-          <p:nvPr>
-            <p:ph type="title"/>
-          </p:nvPr>
-        </p:nvSpPr>
-        <p:spPr/>
-        <p:txBody>
-          <a:bodyPr/>
-          <a:lstStyle/>
-          <a:p>
-            <a:r>
-              <a:rPr lang="pt-BR" dirty="0"/>
-              <a:t>Previsão de dados</a:t>
-            </a:r>
-          </a:p>
-        </p:txBody>
-      </p:sp>
-      <p:sp>
-        <p:nvSpPr>
-          <p:cNvPr id="3" name="Espaço Reservado para Conteúdo 2">
-            <a:extLst>
-              <a:ext uri="{FF2B5EF4-FFF2-40B4-BE49-F238E27FC236}">
-                <a16:creationId xmlns:a16="http://schemas.microsoft.com/office/drawing/2014/main" id="{E1647ED6-C6B8-46F3-976C-6B7EECBA62C5}"/>
-              </a:ext>
-            </a:extLst>
-          </p:cNvPr>
-          <p:cNvSpPr>
-            <a:spLocks noGrp="1"/>
-          </p:cNvSpPr>
-          <p:nvPr>
-            <p:ph idx="1"/>
-          </p:nvPr>
-        </p:nvSpPr>
-        <p:spPr>
-          <a:xfrm>
-            <a:off x="581193" y="2340864"/>
-            <a:ext cx="11029614" cy="1963166"/>
-          </a:xfrm>
-        </p:spPr>
-        <p:txBody>
-          <a:bodyPr>
-            <a:normAutofit/>
-          </a:bodyPr>
-          <a:lstStyle/>
-          <a:p>
-            <a:pPr algn="just"/>
-            <a:r>
-              <a:rPr lang="pt-BR" sz="2200" dirty="0"/>
-              <a:t>Modelos </a:t>
-            </a:r>
-            <a:r>
-              <a:rPr lang="pt-BR" sz="2200" i="1" dirty="0"/>
-              <a:t>Black-box</a:t>
-            </a:r>
-            <a:r>
-              <a:rPr lang="pt-BR" sz="2200" dirty="0"/>
-              <a:t>, foram considerados de alta precisão (Zhao em </a:t>
-            </a:r>
-            <a:r>
-              <a:rPr lang="pt-BR" sz="2200" dirty="0" err="1"/>
-              <a:t>Magoulès</a:t>
-            </a:r>
-            <a:r>
-              <a:rPr lang="pt-BR" sz="2200" dirty="0"/>
-              <a:t>, 2012); </a:t>
-            </a:r>
-          </a:p>
-          <a:p>
-            <a:pPr algn="just"/>
-            <a:r>
-              <a:rPr lang="pt-BR" sz="2200" dirty="0"/>
-              <a:t>Esses modelos estão associados ao conceito de </a:t>
-            </a:r>
-            <a:r>
-              <a:rPr lang="pt-BR" sz="2200" i="1" dirty="0"/>
-              <a:t>aprendizado de máquina.</a:t>
-            </a:r>
-            <a:endParaRPr lang="pt-BR" sz="2200" dirty="0"/>
-          </a:p>
-          <a:p>
-            <a:endParaRPr lang="pt-BR" dirty="0"/>
-          </a:p>
-        </p:txBody>
-      </p:sp>
-      <p:sp>
-        <p:nvSpPr>
-          <p:cNvPr id="6" name="Espaço Reservado para Número de Slide 5">
-            <a:extLst>
-              <a:ext uri="{FF2B5EF4-FFF2-40B4-BE49-F238E27FC236}">
-                <a16:creationId xmlns:a16="http://schemas.microsoft.com/office/drawing/2014/main" id="{A5545136-9C6F-49EA-A1A8-596EA8B2F23E}"/>
-              </a:ext>
-            </a:extLst>
-          </p:cNvPr>
-          <p:cNvSpPr>
-            <a:spLocks noGrp="1"/>
-          </p:cNvSpPr>
-          <p:nvPr>
-            <p:ph type="sldNum" sz="quarter" idx="12"/>
-          </p:nvPr>
-        </p:nvSpPr>
-        <p:spPr/>
-        <p:txBody>
-          <a:bodyPr/>
-          <a:lstStyle/>
-          <a:p>
-            <a:pPr rtl="0"/>
-            <a:fld id="{3A98EE3D-8CD1-4C3F-BD1C-C98C9596463C}" type="slidenum">
-              <a:rPr lang="en-US" smtClean="0"/>
-              <a:t>7</a:t>
-            </a:fld>
-            <a:r>
-              <a:rPr lang="en-US" dirty="0"/>
-              <a:t> / 29</a:t>
-            </a:r>
-          </a:p>
-        </p:txBody>
-      </p:sp>
-      <p:sp>
-        <p:nvSpPr>
-          <p:cNvPr id="4" name="Espaço Reservado para Rodapé 3">
-            <a:extLst>
-              <a:ext uri="{FF2B5EF4-FFF2-40B4-BE49-F238E27FC236}">
-                <a16:creationId xmlns:a16="http://schemas.microsoft.com/office/drawing/2014/main" id="{98ADD59D-66D0-425F-9F99-B2F7E635774E}"/>
-              </a:ext>
-            </a:extLst>
-          </p:cNvPr>
-          <p:cNvSpPr>
-            <a:spLocks noGrp="1"/>
-          </p:cNvSpPr>
-          <p:nvPr>
-            <p:ph type="ftr" sz="quarter" idx="11"/>
-          </p:nvPr>
-        </p:nvSpPr>
-        <p:spPr/>
-        <p:txBody>
-          <a:bodyPr/>
-          <a:lstStyle/>
-          <a:p>
-            <a:r>
-              <a:rPr lang="en-US" dirty="0" err="1"/>
-              <a:t>Referencial</a:t>
-            </a:r>
-            <a:r>
-              <a:rPr lang="en-US" dirty="0"/>
-              <a:t> </a:t>
-            </a:r>
-            <a:r>
-              <a:rPr lang="en-US" dirty="0" err="1"/>
-              <a:t>teórico</a:t>
-            </a:r>
-            <a:r>
-              <a:rPr lang="en-US" dirty="0"/>
-              <a:t> – </a:t>
-            </a:r>
-            <a:r>
-              <a:rPr lang="en-US" dirty="0" err="1"/>
-              <a:t>trabalho</a:t>
-            </a:r>
-            <a:r>
-              <a:rPr lang="en-US" dirty="0"/>
-              <a:t> de </a:t>
-            </a:r>
-            <a:r>
-              <a:rPr lang="en-US" dirty="0" err="1"/>
-              <a:t>conclusão</a:t>
-            </a:r>
-            <a:r>
-              <a:rPr lang="en-US" dirty="0"/>
-              <a:t> de </a:t>
-            </a:r>
-            <a:r>
-              <a:rPr lang="en-US" dirty="0" err="1"/>
-              <a:t>curso</a:t>
-            </a:r>
-            <a:r>
-              <a:rPr lang="en-US" dirty="0"/>
-              <a:t> – Evandro </a:t>
-            </a:r>
-            <a:r>
-              <a:rPr lang="en-US" dirty="0" err="1"/>
-              <a:t>coelho</a:t>
-            </a:r>
-            <a:endParaRPr lang="en-US" dirty="0"/>
-          </a:p>
-        </p:txBody>
-      </p:sp>
-      <p:pic>
-        <p:nvPicPr>
-          <p:cNvPr id="11" name="Imagem 10">
-            <a:extLst>
-              <a:ext uri="{FF2B5EF4-FFF2-40B4-BE49-F238E27FC236}">
-                <a16:creationId xmlns:a16="http://schemas.microsoft.com/office/drawing/2014/main" id="{1A1C7535-060B-4A51-A957-3A8D675726B6}"/>
-              </a:ext>
-            </a:extLst>
-          </p:cNvPr>
-          <p:cNvPicPr>
-            <a:picLocks noChangeAspect="1"/>
-          </p:cNvPicPr>
-          <p:nvPr/>
-        </p:nvPicPr>
-        <p:blipFill rotWithShape="1">
-          <a:blip r:embed="rId2"/>
-          <a:srcRect t="1796" b="3139"/>
-          <a:stretch/>
-        </p:blipFill>
-        <p:spPr>
-          <a:xfrm>
-            <a:off x="3306857" y="4010759"/>
-            <a:ext cx="5578286" cy="1926755"/>
-          </a:xfrm>
-          <a:prstGeom prst="rect">
-            <a:avLst/>
-          </a:prstGeom>
-        </p:spPr>
-      </p:pic>
-    </p:spTree>
-    <p:extLst>
-      <p:ext uri="{BB962C8B-B14F-4D97-AF65-F5344CB8AC3E}">
-        <p14:creationId xmlns:p14="http://schemas.microsoft.com/office/powerpoint/2010/main" val="1534144825"/>
-      </p:ext>
-    </p:extLst>
-  </p:cSld>
-  <p:clrMapOvr>
-    <a:masterClrMapping/>
-  </p:clrMapOvr>
-</p:sld>
-</file>
-
-<file path=ppt/slides/slide8.xml><?xml version="1.0" encoding="utf-8"?>
-<p:sld xmlns:a="http://schemas.openxmlformats.org/drawingml/2006/main" xmlns:r="http://schemas.openxmlformats.org/officeDocument/2006/relationships" xmlns:p="http://schemas.openxmlformats.org/presentationml/2006/main">
-  <p:cSld>
-    <p:spTree>
-      <p:nvGrpSpPr>
-        <p:cNvPr id="1" name=""/>
-        <p:cNvGrpSpPr/>
-        <p:nvPr/>
-      </p:nvGrpSpPr>
-      <p:grpSpPr>
-        <a:xfrm>
-          <a:off x="0" y="0"/>
-          <a:ext cx="0" cy="0"/>
-          <a:chOff x="0" y="0"/>
-          <a:chExt cx="0" cy="0"/>
-        </a:xfrm>
-      </p:grpSpPr>
-      <p:sp>
-        <p:nvSpPr>
-          <p:cNvPr id="2" name="Título 1">
-            <a:extLst>
-              <a:ext uri="{FF2B5EF4-FFF2-40B4-BE49-F238E27FC236}">
-                <a16:creationId xmlns:a16="http://schemas.microsoft.com/office/drawing/2014/main" id="{9D872C6C-3E07-4AC6-B68D-9AFE69A9DDB5}"/>
-              </a:ext>
-            </a:extLst>
-          </p:cNvPr>
-          <p:cNvSpPr>
-            <a:spLocks noGrp="1"/>
-          </p:cNvSpPr>
-          <p:nvPr>
-            <p:ph type="title"/>
-          </p:nvPr>
-        </p:nvSpPr>
-        <p:spPr/>
-        <p:txBody>
-          <a:bodyPr/>
-          <a:lstStyle/>
-          <a:p>
-            <a:r>
-              <a:rPr lang="pt-BR" dirty="0"/>
-              <a:t>Previsão de dados</a:t>
-            </a:r>
-          </a:p>
-        </p:txBody>
-      </p:sp>
-      <mc:AlternateContent xmlns:mc="http://schemas.openxmlformats.org/markup-compatibility/2006" xmlns:a14="http://schemas.microsoft.com/office/drawing/2010/main">
-        <mc:Choice Requires="a14">
+      <mc:AlternateContent xmlns:mc="http://schemas.openxmlformats.org/markup-compatibility/2006">
+        <mc:Choice xmlns:a14="http://schemas.microsoft.com/office/drawing/2010/main" Requires="a14">
           <p:sp>
             <p:nvSpPr>
               <p:cNvPr id="3" name="Espaço Reservado para Conteúdo 2">
@@ -22067,12 +19922,19 @@
                 </a:r>
               </a:p>
               <a:p>
+                <a:pPr lvl="1" algn="just"/>
+                <a:r>
+                  <a:rPr lang="pt-BR" sz="1600" dirty="0"/>
+                  <a:t>Lacuna identificada</a:t>
+                </a:r>
+              </a:p>
+              <a:p>
                 <a:endParaRPr lang="pt-BR" dirty="0"/>
               </a:p>
             </p:txBody>
           </p:sp>
         </mc:Choice>
-        <mc:Fallback xmlns="">
+        <mc:Fallback>
           <p:sp>
             <p:nvSpPr>
               <p:cNvPr id="3" name="Espaço Reservado para Conteúdo 2">
@@ -22097,7 +19959,7 @@
               <a:blipFill>
                 <a:blip r:embed="rId2"/>
                 <a:stretch>
-                  <a:fillRect l="-541" r="-324"/>
+                  <a:fillRect l="-450" r="-337"/>
                 </a:stretch>
               </a:blipFill>
             </p:spPr>
@@ -22140,7 +20002,7 @@
             <a:pPr rtl="0"/>
             <a:fld id="{3A98EE3D-8CD1-4C3F-BD1C-C98C9596463C}" type="slidenum">
               <a:rPr lang="en-US" smtClean="0"/>
-              <a:t>8</a:t>
+              <a:t>6</a:t>
             </a:fld>
             <a:r>
               <a:rPr lang="en-US" dirty="0"/>
@@ -22231,7 +20093,7 @@
 </p:sld>
 </file>
 
-<file path=ppt/slides/slide9.xml><?xml version="1.0" encoding="utf-8"?>
+<file path=ppt/slides/slide7.xml><?xml version="1.0" encoding="utf-8"?>
 <p:sld xmlns:a="http://schemas.openxmlformats.org/drawingml/2006/main" xmlns:r="http://schemas.openxmlformats.org/officeDocument/2006/relationships" xmlns:p="http://schemas.openxmlformats.org/presentationml/2006/main">
   <p:cSld>
     <p:spTree>
@@ -22606,7 +20468,7 @@
             <a:pPr rtl="0"/>
             <a:fld id="{3A98EE3D-8CD1-4C3F-BD1C-C98C9596463C}" type="slidenum">
               <a:rPr lang="en-US" smtClean="0"/>
-              <a:t>9</a:t>
+              <a:t>7</a:t>
             </a:fld>
             <a:r>
               <a:rPr lang="en-US" dirty="0"/>
@@ -23002,6 +20864,403 @@
     <p:extLst>
       <p:ext uri="{BB962C8B-B14F-4D97-AF65-F5344CB8AC3E}">
         <p14:creationId xmlns:p14="http://schemas.microsoft.com/office/powerpoint/2010/main" val="1344456116"/>
+      </p:ext>
+    </p:extLst>
+  </p:cSld>
+  <p:clrMapOvr>
+    <a:masterClrMapping/>
+  </p:clrMapOvr>
+</p:sld>
+</file>
+
+<file path=ppt/slides/slide8.xml><?xml version="1.0" encoding="utf-8"?>
+<p:sld xmlns:a="http://schemas.openxmlformats.org/drawingml/2006/main" xmlns:r="http://schemas.openxmlformats.org/officeDocument/2006/relationships" xmlns:p="http://schemas.openxmlformats.org/presentationml/2006/main">
+  <p:cSld>
+    <p:spTree>
+      <p:nvGrpSpPr>
+        <p:cNvPr id="1" name=""/>
+        <p:cNvGrpSpPr/>
+        <p:nvPr/>
+      </p:nvGrpSpPr>
+      <p:grpSpPr>
+        <a:xfrm>
+          <a:off x="0" y="0"/>
+          <a:ext cx="0" cy="0"/>
+          <a:chOff x="0" y="0"/>
+          <a:chExt cx="0" cy="0"/>
+        </a:xfrm>
+      </p:grpSpPr>
+      <p:sp>
+        <p:nvSpPr>
+          <p:cNvPr id="2" name="Título 1">
+            <a:extLst>
+              <a:ext uri="{FF2B5EF4-FFF2-40B4-BE49-F238E27FC236}">
+                <a16:creationId xmlns:a16="http://schemas.microsoft.com/office/drawing/2014/main" id="{9D872C6C-3E07-4AC6-B68D-9AFE69A9DDB5}"/>
+              </a:ext>
+            </a:extLst>
+          </p:cNvPr>
+          <p:cNvSpPr>
+            <a:spLocks noGrp="1"/>
+          </p:cNvSpPr>
+          <p:nvPr>
+            <p:ph type="title"/>
+          </p:nvPr>
+        </p:nvSpPr>
+        <p:spPr/>
+        <p:txBody>
+          <a:bodyPr/>
+          <a:lstStyle/>
+          <a:p>
+            <a:r>
+              <a:rPr lang="pt-BR" dirty="0"/>
+              <a:t>Redes Neurais Artificiais</a:t>
+            </a:r>
+          </a:p>
+        </p:txBody>
+      </p:sp>
+      <p:sp>
+        <p:nvSpPr>
+          <p:cNvPr id="3" name="Espaço Reservado para Conteúdo 2">
+            <a:extLst>
+              <a:ext uri="{FF2B5EF4-FFF2-40B4-BE49-F238E27FC236}">
+                <a16:creationId xmlns:a16="http://schemas.microsoft.com/office/drawing/2014/main" id="{E1647ED6-C6B8-46F3-976C-6B7EECBA62C5}"/>
+              </a:ext>
+            </a:extLst>
+          </p:cNvPr>
+          <p:cNvSpPr>
+            <a:spLocks noGrp="1"/>
+          </p:cNvSpPr>
+          <p:nvPr>
+            <p:ph idx="1"/>
+          </p:nvPr>
+        </p:nvSpPr>
+        <p:spPr>
+          <a:xfrm>
+            <a:off x="581192" y="2340864"/>
+            <a:ext cx="5764189" cy="3634486"/>
+          </a:xfrm>
+        </p:spPr>
+        <p:txBody>
+          <a:bodyPr>
+            <a:normAutofit/>
+          </a:bodyPr>
+          <a:lstStyle/>
+          <a:p>
+            <a:pPr algn="just"/>
+            <a:r>
+              <a:rPr lang="pt-BR" sz="1800" dirty="0"/>
+              <a:t>Rede </a:t>
+            </a:r>
+            <a:r>
+              <a:rPr lang="pt-BR" sz="1800" i="1" dirty="0" err="1"/>
+              <a:t>Multilayer</a:t>
+            </a:r>
+            <a:r>
+              <a:rPr lang="pt-BR" sz="1800" i="1" dirty="0"/>
+              <a:t> </a:t>
+            </a:r>
+            <a:r>
+              <a:rPr lang="pt-BR" sz="1800" i="1" dirty="0" err="1"/>
+              <a:t>Perceptron</a:t>
+            </a:r>
+            <a:r>
+              <a:rPr lang="pt-BR" sz="1800" i="1" dirty="0"/>
+              <a:t> </a:t>
+            </a:r>
+            <a:r>
+              <a:rPr lang="pt-BR" sz="1800" dirty="0"/>
+              <a:t>(MLP) para o problema de regressão;</a:t>
+            </a:r>
+          </a:p>
+          <a:p>
+            <a:pPr algn="just"/>
+            <a:r>
+              <a:rPr lang="pt-BR" sz="1800" dirty="0"/>
+              <a:t>Aplicação em problemas de previsão de séries temporais (Silva, 2017);</a:t>
+            </a:r>
+          </a:p>
+          <a:p>
+            <a:pPr algn="just"/>
+            <a:r>
+              <a:rPr lang="pt-BR" sz="1800" dirty="0"/>
+              <a:t>Classificação:</a:t>
+            </a:r>
+            <a:r>
+              <a:rPr lang="pt-BR" sz="1800" i="1" dirty="0"/>
+              <a:t> </a:t>
+            </a:r>
+            <a:r>
+              <a:rPr lang="pt-BR" sz="1800" i="1" dirty="0" err="1"/>
+              <a:t>feedforward</a:t>
+            </a:r>
+            <a:r>
+              <a:rPr lang="pt-BR" sz="1800" i="1" dirty="0"/>
+              <a:t> </a:t>
+            </a:r>
+            <a:r>
+              <a:rPr lang="pt-BR" sz="1800" dirty="0"/>
+              <a:t>e aprendizagem supervisionada;</a:t>
+            </a:r>
+          </a:p>
+          <a:p>
+            <a:pPr algn="just"/>
+            <a:r>
+              <a:rPr lang="pt-BR" sz="1800" dirty="0"/>
+              <a:t>Algoritmo de aprendizagem: </a:t>
+            </a:r>
+            <a:r>
+              <a:rPr lang="pt-BR" sz="1800" i="1" dirty="0" err="1"/>
+              <a:t>backpropagation</a:t>
+            </a:r>
+            <a:r>
+              <a:rPr lang="pt-BR" sz="1800" i="1" dirty="0"/>
+              <a:t>.</a:t>
+            </a:r>
+          </a:p>
+          <a:p>
+            <a:pPr lvl="1" algn="just"/>
+            <a:r>
+              <a:rPr lang="pt-BR" sz="1600" dirty="0"/>
+              <a:t>Busca minimizar a função de erro para se ajustar a curva dos dados.</a:t>
+            </a:r>
+          </a:p>
+          <a:p>
+            <a:endParaRPr lang="pt-BR" dirty="0"/>
+          </a:p>
+        </p:txBody>
+      </p:sp>
+      <p:sp>
+        <p:nvSpPr>
+          <p:cNvPr id="6" name="Espaço Reservado para Número de Slide 5">
+            <a:extLst>
+              <a:ext uri="{FF2B5EF4-FFF2-40B4-BE49-F238E27FC236}">
+                <a16:creationId xmlns:a16="http://schemas.microsoft.com/office/drawing/2014/main" id="{A5545136-9C6F-49EA-A1A8-596EA8B2F23E}"/>
+              </a:ext>
+            </a:extLst>
+          </p:cNvPr>
+          <p:cNvSpPr>
+            <a:spLocks noGrp="1"/>
+          </p:cNvSpPr>
+          <p:nvPr>
+            <p:ph type="sldNum" sz="quarter" idx="12"/>
+          </p:nvPr>
+        </p:nvSpPr>
+        <p:spPr/>
+        <p:txBody>
+          <a:bodyPr/>
+          <a:lstStyle/>
+          <a:p>
+            <a:pPr rtl="0"/>
+            <a:fld id="{3A98EE3D-8CD1-4C3F-BD1C-C98C9596463C}" type="slidenum">
+              <a:rPr lang="en-US" smtClean="0"/>
+              <a:t>8</a:t>
+            </a:fld>
+            <a:r>
+              <a:rPr lang="en-US" dirty="0"/>
+              <a:t> / 29</a:t>
+            </a:r>
+          </a:p>
+        </p:txBody>
+      </p:sp>
+      <p:pic>
+        <p:nvPicPr>
+          <p:cNvPr id="8" name="Imagem 7">
+            <a:extLst>
+              <a:ext uri="{FF2B5EF4-FFF2-40B4-BE49-F238E27FC236}">
+                <a16:creationId xmlns:a16="http://schemas.microsoft.com/office/drawing/2014/main" id="{E3E5E48C-4012-4A7E-A19D-5C70C51397A4}"/>
+              </a:ext>
+            </a:extLst>
+          </p:cNvPr>
+          <p:cNvPicPr/>
+          <p:nvPr/>
+        </p:nvPicPr>
+        <p:blipFill>
+          <a:blip r:embed="rId2"/>
+          <a:stretch>
+            <a:fillRect/>
+          </a:stretch>
+        </p:blipFill>
+        <p:spPr>
+          <a:xfrm>
+            <a:off x="6731172" y="2340864"/>
+            <a:ext cx="4879635" cy="2958215"/>
+          </a:xfrm>
+          <a:prstGeom prst="rect">
+            <a:avLst/>
+          </a:prstGeom>
+        </p:spPr>
+      </p:pic>
+      <p:sp>
+        <p:nvSpPr>
+          <p:cNvPr id="4" name="Espaço Reservado para Rodapé 3">
+            <a:extLst>
+              <a:ext uri="{FF2B5EF4-FFF2-40B4-BE49-F238E27FC236}">
+                <a16:creationId xmlns:a16="http://schemas.microsoft.com/office/drawing/2014/main" id="{F8A76535-B640-49E4-BC10-54DF7D0C525A}"/>
+              </a:ext>
+            </a:extLst>
+          </p:cNvPr>
+          <p:cNvSpPr>
+            <a:spLocks noGrp="1"/>
+          </p:cNvSpPr>
+          <p:nvPr>
+            <p:ph type="ftr" sz="quarter" idx="11"/>
+          </p:nvPr>
+        </p:nvSpPr>
+        <p:spPr/>
+        <p:txBody>
+          <a:bodyPr/>
+          <a:lstStyle/>
+          <a:p>
+            <a:r>
+              <a:rPr lang="en-US" dirty="0" err="1"/>
+              <a:t>Referencial</a:t>
+            </a:r>
+            <a:r>
+              <a:rPr lang="en-US" dirty="0"/>
+              <a:t> </a:t>
+            </a:r>
+            <a:r>
+              <a:rPr lang="en-US" dirty="0" err="1"/>
+              <a:t>teórico</a:t>
+            </a:r>
+            <a:r>
+              <a:rPr lang="en-US" dirty="0"/>
+              <a:t> – </a:t>
+            </a:r>
+            <a:r>
+              <a:rPr lang="en-US" dirty="0" err="1"/>
+              <a:t>trabalho</a:t>
+            </a:r>
+            <a:r>
+              <a:rPr lang="en-US" dirty="0"/>
+              <a:t> de </a:t>
+            </a:r>
+            <a:r>
+              <a:rPr lang="en-US" dirty="0" err="1"/>
+              <a:t>conclusão</a:t>
+            </a:r>
+            <a:r>
+              <a:rPr lang="en-US" dirty="0"/>
+              <a:t> de </a:t>
+            </a:r>
+            <a:r>
+              <a:rPr lang="en-US" dirty="0" err="1"/>
+              <a:t>curso</a:t>
+            </a:r>
+            <a:r>
+              <a:rPr lang="en-US" dirty="0"/>
+              <a:t> – Evandro </a:t>
+            </a:r>
+            <a:r>
+              <a:rPr lang="en-US" dirty="0" err="1"/>
+              <a:t>coelho</a:t>
+            </a:r>
+            <a:endParaRPr lang="en-US" dirty="0"/>
+          </a:p>
+        </p:txBody>
+      </p:sp>
+    </p:spTree>
+    <p:extLst>
+      <p:ext uri="{BB962C8B-B14F-4D97-AF65-F5344CB8AC3E}">
+        <p14:creationId xmlns:p14="http://schemas.microsoft.com/office/powerpoint/2010/main" val="1431518098"/>
+      </p:ext>
+    </p:extLst>
+  </p:cSld>
+  <p:clrMapOvr>
+    <a:masterClrMapping/>
+  </p:clrMapOvr>
+</p:sld>
+</file>
+
+<file path=ppt/slides/slide9.xml><?xml version="1.0" encoding="utf-8"?>
+<p:sld xmlns:a="http://schemas.openxmlformats.org/drawingml/2006/main" xmlns:r="http://schemas.openxmlformats.org/officeDocument/2006/relationships" xmlns:p="http://schemas.openxmlformats.org/presentationml/2006/main">
+  <p:cSld>
+    <p:spTree>
+      <p:nvGrpSpPr>
+        <p:cNvPr id="1" name=""/>
+        <p:cNvGrpSpPr/>
+        <p:nvPr/>
+      </p:nvGrpSpPr>
+      <p:grpSpPr>
+        <a:xfrm>
+          <a:off x="0" y="0"/>
+          <a:ext cx="0" cy="0"/>
+          <a:chOff x="0" y="0"/>
+          <a:chExt cx="0" cy="0"/>
+        </a:xfrm>
+      </p:grpSpPr>
+      <p:sp>
+        <p:nvSpPr>
+          <p:cNvPr id="2" name="Título 1">
+            <a:extLst>
+              <a:ext uri="{FF2B5EF4-FFF2-40B4-BE49-F238E27FC236}">
+                <a16:creationId xmlns:a16="http://schemas.microsoft.com/office/drawing/2014/main" id="{DD3D015B-8DFC-4502-9DAB-77D1D74CB5F4}"/>
+              </a:ext>
+            </a:extLst>
+          </p:cNvPr>
+          <p:cNvSpPr>
+            <a:spLocks noGrp="1"/>
+          </p:cNvSpPr>
+          <p:nvPr>
+            <p:ph type="title"/>
+          </p:nvPr>
+        </p:nvSpPr>
+        <p:spPr>
+          <a:xfrm>
+            <a:off x="581192" y="702156"/>
+            <a:ext cx="11029616" cy="5273194"/>
+          </a:xfrm>
+        </p:spPr>
+        <p:txBody>
+          <a:bodyPr>
+            <a:normAutofit/>
+          </a:bodyPr>
+          <a:lstStyle/>
+          <a:p>
+            <a:r>
+              <a:rPr lang="pt-BR" sz="6000" dirty="0"/>
+              <a:t>previsão</a:t>
+            </a:r>
+          </a:p>
+        </p:txBody>
+      </p:sp>
+      <p:sp>
+        <p:nvSpPr>
+          <p:cNvPr id="4" name="Espaço Reservado para Número de Slide 3">
+            <a:extLst>
+              <a:ext uri="{FF2B5EF4-FFF2-40B4-BE49-F238E27FC236}">
+                <a16:creationId xmlns:a16="http://schemas.microsoft.com/office/drawing/2014/main" id="{C8EB25D8-0628-4488-B514-DF8C2B1BC376}"/>
+              </a:ext>
+            </a:extLst>
+          </p:cNvPr>
+          <p:cNvSpPr>
+            <a:spLocks noGrp="1"/>
+          </p:cNvSpPr>
+          <p:nvPr>
+            <p:ph type="sldNum" sz="quarter" idx="12"/>
+          </p:nvPr>
+        </p:nvSpPr>
+        <p:spPr/>
+        <p:txBody>
+          <a:bodyPr/>
+          <a:lstStyle/>
+          <a:p>
+            <a:pPr rtl="0"/>
+            <a:fld id="{3A98EE3D-8CD1-4C3F-BD1C-C98C9596463C}" type="slidenum">
+              <a:rPr lang="en-US" smtClean="0"/>
+              <a:t>9</a:t>
+            </a:fld>
+            <a:r>
+              <a:rPr lang="en-US" dirty="0"/>
+              <a:t> / 29</a:t>
+            </a:r>
+          </a:p>
+        </p:txBody>
+      </p:sp>
+    </p:spTree>
+    <p:extLst>
+      <p:ext uri="{BB962C8B-B14F-4D97-AF65-F5344CB8AC3E}">
+        <p14:creationId xmlns:p14="http://schemas.microsoft.com/office/powerpoint/2010/main" val="3630092208"/>
       </p:ext>
     </p:extLst>
   </p:cSld>
